--- a/workspaces/cie-cpp-level3/lesson-13/courseware.pptx
+++ b/workspaces/cie-cpp-level3/lesson-13/courseware.pptx
@@ -30,9 +30,14 @@
     <p:sldId id="278" r:id="rId24"/>
     <p:sldId id="279" r:id="rId25"/>
     <p:sldId id="280" r:id="rId26"/>
+    <p:sldId id="281" r:id="rId27"/>
+    <p:sldId id="282" r:id="rId28"/>
+    <p:sldId id="283" r:id="rId29"/>
+    <p:sldId id="284" r:id="rId30"/>
+    <p:sldId id="285" r:id="rId31"/>
   </p:sldIdLst>
   <p:notesMasterIdLst>
-    <p:notesMasterId r:id="rId27"/>
+    <p:notesMasterId r:id="rId32"/>
   </p:notesMasterIdLst>
   <p:sldSz cx="12192000" cy="6858000"/>
   <p:notesSz cx="6858000" cy="12192000"/>
@@ -526,7 +531,7 @@
           <a:p>
             <a:r>
               <a:rPr lang="en-US" dirty="0"/>
-              <a:t>第13课不再扩展新难度，只做三级范围内的稳定化。</a:t>
+              <a:t>本课不讲超纲新知识。</a:t>
             </a:r>
             <a:endParaRPr lang="en-US" dirty="0"/>
           </a:p>
@@ -614,7 +619,7 @@
           <a:p>
             <a:r>
               <a:rPr lang="en-US" dirty="0"/>
-              <a:t>让学生解释为什么使用1LL。</a:t>
+              <a:t>这是学生板书必记页。</a:t>
             </a:r>
             <a:endParaRPr lang="en-US" dirty="0"/>
           </a:p>
@@ -702,7 +707,7 @@
           <a:p>
             <a:r>
               <a:rPr lang="en-US" dirty="0"/>
-              <a:t>可用密码强度题连接字符数组和模拟。</a:t>
+              <a:t>字符函数处理负char时先转unsigned char更稳妥。</a:t>
             </a:r>
             <a:endParaRPr lang="en-US" dirty="0"/>
           </a:p>
@@ -790,7 +795,7 @@
           <a:p>
             <a:r>
               <a:rPr lang="en-US" dirty="0"/>
-              <a:t>课堂按真实考试节奏执行。</a:t>
+              <a:t>解释1LL用于避免int乘法溢出。</a:t>
             </a:r>
             <a:endParaRPr lang="en-US" dirty="0"/>
           </a:p>
@@ -878,7 +883,7 @@
           <a:p>
             <a:r>
               <a:rPr lang="en-US" dirty="0"/>
-              <a:t>进入客观练习前先建立操作流程。</a:t>
+              <a:t>数组越界可能编译通过但运行结果不可靠。</a:t>
             </a:r>
             <a:endParaRPr lang="en-US" dirty="0"/>
           </a:p>
@@ -966,7 +971,7 @@
           <a:p>
             <a:r>
               <a:rPr lang="en-US" dirty="0"/>
-              <a:t>提交Tiku后再点击显示答案。</a:t>
+              <a:t>边角位置最容易暴露错误。</a:t>
             </a:r>
             <a:endParaRPr lang="en-US" dirty="0"/>
           </a:p>
@@ -1054,7 +1059,7 @@
           <a:p>
             <a:r>
               <a:rPr lang="en-US" dirty="0"/>
-              <a:t>提交Tiku后再点击显示答案。</a:t>
+              <a:t>估算循环次数，避免无意义的高层循环。</a:t>
             </a:r>
             <a:endParaRPr lang="en-US" dirty="0"/>
           </a:p>
@@ -1142,7 +1147,7 @@
           <a:p>
             <a:r>
               <a:rPr lang="en-US" dirty="0"/>
-              <a:t>提交Tiku后再点击显示答案。</a:t>
+              <a:t>模拟题不是照抄文字，要先定义状态。</a:t>
             </a:r>
             <a:endParaRPr lang="en-US" dirty="0"/>
           </a:p>
@@ -1230,7 +1235,7 @@
           <a:p>
             <a:r>
               <a:rPr lang="en-US" dirty="0"/>
-              <a:t>教师按学生薄弱点安排4—6题。</a:t>
+              <a:t>连接密码强度等真实题型。</a:t>
             </a:r>
             <a:endParaRPr lang="en-US" dirty="0"/>
           </a:p>
@@ -1318,7 +1323,7 @@
           <a:p>
             <a:r>
               <a:rPr lang="en-US" dirty="0"/>
-              <a:t>训练函数与数位分解。</a:t>
+              <a:t>程序正确但格式不符也可能不得分。</a:t>
             </a:r>
             <a:endParaRPr lang="en-US" dirty="0"/>
           </a:p>
@@ -1406,7 +1411,7 @@
           <a:p>
             <a:r>
               <a:rPr lang="en-US" dirty="0"/>
-              <a:t>训练递归终止与状态关系。</a:t>
+              <a:t>类型是在运算发生前决定的。</a:t>
             </a:r>
             <a:endParaRPr lang="en-US" dirty="0"/>
           </a:p>
@@ -1494,7 +1499,7 @@
           <a:p>
             <a:r>
               <a:rPr lang="en-US" dirty="0"/>
-              <a:t>强调稳定性，不追求超纲题。</a:t>
+              <a:t>学生可截屏或抄写为考前笔记。</a:t>
             </a:r>
             <a:endParaRPr lang="en-US" dirty="0"/>
           </a:p>
@@ -1582,7 +1587,7 @@
           <a:p>
             <a:r>
               <a:rPr lang="en-US" dirty="0"/>
-              <a:t>训练字符数组与类别状态。</a:t>
+              <a:t>选择题也要留下推理痕迹。</a:t>
             </a:r>
             <a:endParaRPr lang="en-US" dirty="0"/>
           </a:p>
@@ -1670,7 +1675,7 @@
           <a:p>
             <a:r>
               <a:rPr lang="en-US" dirty="0"/>
-              <a:t>训练数学函数与枚举。</a:t>
+              <a:t>只测样例不等于完成测试。</a:t>
             </a:r>
             <a:endParaRPr lang="en-US" dirty="0"/>
           </a:p>
@@ -1758,7 +1763,7 @@
           <a:p>
             <a:r>
               <a:rPr lang="en-US" dirty="0"/>
-              <a:t>训练模拟与状态更新。</a:t>
+              <a:t>错题必须按原因分类。</a:t>
             </a:r>
             <a:endParaRPr lang="en-US" dirty="0"/>
           </a:p>
@@ -1846,7 +1851,7 @@
           <a:p>
             <a:r>
               <a:rPr lang="en-US" dirty="0"/>
-              <a:t>训练二维坐标与边界。</a:t>
+              <a:t>正式学生入口也会在Learn页面显示“开始整卷练习”。</a:t>
             </a:r>
             <a:endParaRPr lang="en-US" dirty="0"/>
           </a:p>
@@ -1934,7 +1939,7 @@
           <a:p>
             <a:r>
               <a:rPr lang="en-US" dirty="0"/>
-              <a:t>让每位学生保留一张自己的检查卡。</a:t>
+              <a:t>不得只抄正确答案。</a:t>
             </a:r>
             <a:endParaRPr lang="en-US" dirty="0"/>
           </a:p>
@@ -2022,7 +2027,7 @@
           <a:p>
             <a:r>
               <a:rPr lang="en-US" dirty="0"/>
-              <a:t>收集最终成绩与个人待复测清单。</a:t>
+              <a:t>保存成绩与复测证据。</a:t>
             </a:r>
             <a:endParaRPr lang="en-US" dirty="0"/>
           </a:p>
@@ -2046,6 +2051,358 @@
             <a:fld id="{F7021451-1387-4CA6-816F-3879F97B5CBC}" type="slidenum">
               <a:rPr lang="en-US"/>
               <a:t>25</a:t>
+            </a:fld>
+            <a:endParaRPr lang="en-US"/>
+          </a:p>
+        </p:txBody>
+      </p:sp>
+    </p:spTree>
+    <p:extLst>
+      <p:ext uri="{BB962C8B-B14F-4D97-AF65-F5344CB8AC3E}">
+        <p14:creationId xmlns:p14="http://schemas.microsoft.com/office/powerpoint/2010/main" val="1024086991"/>
+      </p:ext>
+    </p:extLst>
+  </p:cSld>
+  <p:clrMapOvr>
+    <a:masterClrMapping/>
+  </p:clrMapOvr>
+</p:notes>
+</file>
+
+<file path=ppt/notesSlides/notesSlide26.xml><?xml version="1.0" encoding="utf-8"?>
+<p:notes xmlns:a="http://schemas.openxmlformats.org/drawingml/2006/main" xmlns:r="http://schemas.openxmlformats.org/officeDocument/2006/relationships" xmlns:p="http://schemas.openxmlformats.org/presentationml/2006/main">
+  <p:cSld>
+    <p:spTree>
+      <p:nvGrpSpPr>
+        <p:cNvPr id="1" name=""/>
+        <p:cNvGrpSpPr/>
+        <p:nvPr/>
+      </p:nvGrpSpPr>
+      <p:grpSpPr>
+        <a:xfrm>
+          <a:off x="0" y="0"/>
+          <a:ext cx="0" cy="0"/>
+          <a:chOff x="0" y="0"/>
+          <a:chExt cx="0" cy="0"/>
+        </a:xfrm>
+      </p:grpSpPr>
+      <p:sp>
+        <p:nvSpPr>
+          <p:cNvPr id="2" name="Slide Image Placeholder 1"/>
+          <p:cNvSpPr>
+            <a:spLocks noGrp="1" noRot="1" noChangeAspect="1"/>
+          </p:cNvSpPr>
+          <p:nvPr>
+            <p:ph type="sldImg"/>
+          </p:nvPr>
+        </p:nvSpPr>
+        <p:spPr/>
+      </p:sp>
+      <p:sp>
+        <p:nvSpPr>
+          <p:cNvPr id="3" name="Notes Placeholder 2"/>
+          <p:cNvSpPr>
+            <a:spLocks noGrp="1"/>
+          </p:cNvSpPr>
+          <p:nvPr>
+            <p:ph type="body" idx="1"/>
+          </p:nvPr>
+        </p:nvSpPr>
+        <p:spPr/>
+        <p:txBody>
+          <a:bodyPr/>
+          <a:lstStyle/>
+          <a:p>
+            <a:r>
+              <a:rPr lang="en-US" dirty="0"/>
+              <a:t>不逐题报答案，按错误类型讲评。</a:t>
+            </a:r>
+            <a:endParaRPr lang="en-US" dirty="0"/>
+          </a:p>
+        </p:txBody>
+      </p:sp>
+      <p:sp>
+        <p:nvSpPr>
+          <p:cNvPr id="4" name="Slide Number Placeholder 3"/>
+          <p:cNvSpPr>
+            <a:spLocks noGrp="1"/>
+          </p:cNvSpPr>
+          <p:nvPr>
+            <p:ph type="sldNum" sz="quarter" idx="10"/>
+          </p:nvPr>
+        </p:nvSpPr>
+        <p:spPr/>
+        <p:txBody>
+          <a:bodyPr/>
+          <a:lstStyle/>
+          <a:p>
+            <a:fld id="{F7021451-1387-4CA6-816F-3879F97B5CBC}" type="slidenum">
+              <a:rPr lang="en-US"/>
+              <a:t>26</a:t>
+            </a:fld>
+            <a:endParaRPr lang="en-US"/>
+          </a:p>
+        </p:txBody>
+      </p:sp>
+    </p:spTree>
+    <p:extLst>
+      <p:ext uri="{BB962C8B-B14F-4D97-AF65-F5344CB8AC3E}">
+        <p14:creationId xmlns:p14="http://schemas.microsoft.com/office/powerpoint/2010/main" val="1024086991"/>
+      </p:ext>
+    </p:extLst>
+  </p:cSld>
+  <p:clrMapOvr>
+    <a:masterClrMapping/>
+  </p:clrMapOvr>
+</p:notes>
+</file>
+
+<file path=ppt/notesSlides/notesSlide27.xml><?xml version="1.0" encoding="utf-8"?>
+<p:notes xmlns:a="http://schemas.openxmlformats.org/drawingml/2006/main" xmlns:r="http://schemas.openxmlformats.org/officeDocument/2006/relationships" xmlns:p="http://schemas.openxmlformats.org/presentationml/2006/main">
+  <p:cSld>
+    <p:spTree>
+      <p:nvGrpSpPr>
+        <p:cNvPr id="1" name=""/>
+        <p:cNvGrpSpPr/>
+        <p:nvPr/>
+      </p:nvGrpSpPr>
+      <p:grpSpPr>
+        <a:xfrm>
+          <a:off x="0" y="0"/>
+          <a:ext cx="0" cy="0"/>
+          <a:chOff x="0" y="0"/>
+          <a:chExt cx="0" cy="0"/>
+        </a:xfrm>
+      </p:grpSpPr>
+      <p:sp>
+        <p:nvSpPr>
+          <p:cNvPr id="2" name="Slide Image Placeholder 1"/>
+          <p:cNvSpPr>
+            <a:spLocks noGrp="1" noRot="1" noChangeAspect="1"/>
+          </p:cNvSpPr>
+          <p:nvPr>
+            <p:ph type="sldImg"/>
+          </p:nvPr>
+        </p:nvSpPr>
+        <p:spPr/>
+      </p:sp>
+      <p:sp>
+        <p:nvSpPr>
+          <p:cNvPr id="3" name="Notes Placeholder 2"/>
+          <p:cNvSpPr>
+            <a:spLocks noGrp="1"/>
+          </p:cNvSpPr>
+          <p:nvPr>
+            <p:ph type="body" idx="1"/>
+          </p:nvPr>
+        </p:nvSpPr>
+        <p:spPr/>
+        <p:txBody>
+          <a:bodyPr/>
+          <a:lstStyle/>
+          <a:p>
+            <a:r>
+              <a:rPr lang="en-US" dirty="0"/>
+              <a:t>编程得分必须来自真实OJ状态。</a:t>
+            </a:r>
+            <a:endParaRPr lang="en-US" dirty="0"/>
+          </a:p>
+        </p:txBody>
+      </p:sp>
+      <p:sp>
+        <p:nvSpPr>
+          <p:cNvPr id="4" name="Slide Number Placeholder 3"/>
+          <p:cNvSpPr>
+            <a:spLocks noGrp="1"/>
+          </p:cNvSpPr>
+          <p:nvPr>
+            <p:ph type="sldNum" sz="quarter" idx="10"/>
+          </p:nvPr>
+        </p:nvSpPr>
+        <p:spPr/>
+        <p:txBody>
+          <a:bodyPr/>
+          <a:lstStyle/>
+          <a:p>
+            <a:fld id="{F7021451-1387-4CA6-816F-3879F97B5CBC}" type="slidenum">
+              <a:rPr lang="en-US"/>
+              <a:t>27</a:t>
+            </a:fld>
+            <a:endParaRPr lang="en-US"/>
+          </a:p>
+        </p:txBody>
+      </p:sp>
+    </p:spTree>
+    <p:extLst>
+      <p:ext uri="{BB962C8B-B14F-4D97-AF65-F5344CB8AC3E}">
+        <p14:creationId xmlns:p14="http://schemas.microsoft.com/office/powerpoint/2010/main" val="1024086991"/>
+      </p:ext>
+    </p:extLst>
+  </p:cSld>
+  <p:clrMapOvr>
+    <a:masterClrMapping/>
+  </p:clrMapOvr>
+</p:notes>
+</file>
+
+<file path=ppt/notesSlides/notesSlide28.xml><?xml version="1.0" encoding="utf-8"?>
+<p:notes xmlns:a="http://schemas.openxmlformats.org/drawingml/2006/main" xmlns:r="http://schemas.openxmlformats.org/officeDocument/2006/relationships" xmlns:p="http://schemas.openxmlformats.org/presentationml/2006/main">
+  <p:cSld>
+    <p:spTree>
+      <p:nvGrpSpPr>
+        <p:cNvPr id="1" name=""/>
+        <p:cNvGrpSpPr/>
+        <p:nvPr/>
+      </p:nvGrpSpPr>
+      <p:grpSpPr>
+        <a:xfrm>
+          <a:off x="0" y="0"/>
+          <a:ext cx="0" cy="0"/>
+          <a:chOff x="0" y="0"/>
+          <a:chExt cx="0" cy="0"/>
+        </a:xfrm>
+      </p:grpSpPr>
+      <p:sp>
+        <p:nvSpPr>
+          <p:cNvPr id="2" name="Slide Image Placeholder 1"/>
+          <p:cNvSpPr>
+            <a:spLocks noGrp="1" noRot="1" noChangeAspect="1"/>
+          </p:cNvSpPr>
+          <p:nvPr>
+            <p:ph type="sldImg"/>
+          </p:nvPr>
+        </p:nvSpPr>
+        <p:spPr/>
+      </p:sp>
+      <p:sp>
+        <p:nvSpPr>
+          <p:cNvPr id="3" name="Notes Placeholder 2"/>
+          <p:cNvSpPr>
+            <a:spLocks noGrp="1"/>
+          </p:cNvSpPr>
+          <p:nvPr>
+            <p:ph type="body" idx="1"/>
+          </p:nvPr>
+        </p:nvSpPr>
+        <p:spPr/>
+        <p:txBody>
+          <a:bodyPr/>
+          <a:lstStyle/>
+          <a:p>
+            <a:r>
+              <a:rPr lang="en-US" dirty="0"/>
+              <a:t>第13课使用两卷对照；第12课先建立基线。</a:t>
+            </a:r>
+            <a:endParaRPr lang="en-US" dirty="0"/>
+          </a:p>
+        </p:txBody>
+      </p:sp>
+      <p:sp>
+        <p:nvSpPr>
+          <p:cNvPr id="4" name="Slide Number Placeholder 3"/>
+          <p:cNvSpPr>
+            <a:spLocks noGrp="1"/>
+          </p:cNvSpPr>
+          <p:nvPr>
+            <p:ph type="sldNum" sz="quarter" idx="10"/>
+          </p:nvPr>
+        </p:nvSpPr>
+        <p:spPr/>
+        <p:txBody>
+          <a:bodyPr/>
+          <a:lstStyle/>
+          <a:p>
+            <a:fld id="{F7021451-1387-4CA6-816F-3879F97B5CBC}" type="slidenum">
+              <a:rPr lang="en-US"/>
+              <a:t>28</a:t>
+            </a:fld>
+            <a:endParaRPr lang="en-US"/>
+          </a:p>
+        </p:txBody>
+      </p:sp>
+    </p:spTree>
+    <p:extLst>
+      <p:ext uri="{BB962C8B-B14F-4D97-AF65-F5344CB8AC3E}">
+        <p14:creationId xmlns:p14="http://schemas.microsoft.com/office/powerpoint/2010/main" val="1024086991"/>
+      </p:ext>
+    </p:extLst>
+  </p:cSld>
+  <p:clrMapOvr>
+    <a:masterClrMapping/>
+  </p:clrMapOvr>
+</p:notes>
+</file>
+
+<file path=ppt/notesSlides/notesSlide29.xml><?xml version="1.0" encoding="utf-8"?>
+<p:notes xmlns:a="http://schemas.openxmlformats.org/drawingml/2006/main" xmlns:r="http://schemas.openxmlformats.org/officeDocument/2006/relationships" xmlns:p="http://schemas.openxmlformats.org/presentationml/2006/main">
+  <p:cSld>
+    <p:spTree>
+      <p:nvGrpSpPr>
+        <p:cNvPr id="1" name=""/>
+        <p:cNvGrpSpPr/>
+        <p:nvPr/>
+      </p:nvGrpSpPr>
+      <p:grpSpPr>
+        <a:xfrm>
+          <a:off x="0" y="0"/>
+          <a:ext cx="0" cy="0"/>
+          <a:chOff x="0" y="0"/>
+          <a:chExt cx="0" cy="0"/>
+        </a:xfrm>
+      </p:grpSpPr>
+      <p:sp>
+        <p:nvSpPr>
+          <p:cNvPr id="2" name="Slide Image Placeholder 1"/>
+          <p:cNvSpPr>
+            <a:spLocks noGrp="1" noRot="1" noChangeAspect="1"/>
+          </p:cNvSpPr>
+          <p:nvPr>
+            <p:ph type="sldImg"/>
+          </p:nvPr>
+        </p:nvSpPr>
+        <p:spPr/>
+      </p:sp>
+      <p:sp>
+        <p:nvSpPr>
+          <p:cNvPr id="3" name="Notes Placeholder 2"/>
+          <p:cNvSpPr>
+            <a:spLocks noGrp="1"/>
+          </p:cNvSpPr>
+          <p:nvPr>
+            <p:ph type="body" idx="1"/>
+          </p:nvPr>
+        </p:nvSpPr>
+        <p:spPr/>
+        <p:txBody>
+          <a:bodyPr/>
+          <a:lstStyle/>
+          <a:p>
+            <a:r>
+              <a:rPr lang="en-US" dirty="0"/>
+              <a:t>补给题来自Tiku，不回退旧Teach problems。</a:t>
+            </a:r>
+            <a:endParaRPr lang="en-US" dirty="0"/>
+          </a:p>
+        </p:txBody>
+      </p:sp>
+      <p:sp>
+        <p:nvSpPr>
+          <p:cNvPr id="4" name="Slide Number Placeholder 3"/>
+          <p:cNvSpPr>
+            <a:spLocks noGrp="1"/>
+          </p:cNvSpPr>
+          <p:nvPr>
+            <p:ph type="sldNum" sz="quarter" idx="10"/>
+          </p:nvPr>
+        </p:nvSpPr>
+        <p:spPr/>
+        <p:txBody>
+          <a:bodyPr/>
+          <a:lstStyle/>
+          <a:p>
+            <a:fld id="{F7021451-1387-4CA6-816F-3879F97B5CBC}" type="slidenum">
+              <a:rPr lang="en-US"/>
+              <a:t>29</a:t>
             </a:fld>
             <a:endParaRPr lang="en-US"/>
           </a:p>
@@ -2110,7 +2467,7 @@
           <a:p>
             <a:r>
               <a:rPr lang="en-US" dirty="0"/>
-              <a:t>请学生分别举出一个适合函数和递归的任务。</a:t>
+              <a:t>先建立时间预算。</a:t>
             </a:r>
             <a:endParaRPr lang="en-US" dirty="0"/>
           </a:p>
@@ -2134,6 +2491,94 @@
             <a:fld id="{F7021451-1387-4CA6-816F-3879F97B5CBC}" type="slidenum">
               <a:rPr lang="en-US"/>
               <a:t>3</a:t>
+            </a:fld>
+            <a:endParaRPr lang="en-US"/>
+          </a:p>
+        </p:txBody>
+      </p:sp>
+    </p:spTree>
+    <p:extLst>
+      <p:ext uri="{BB962C8B-B14F-4D97-AF65-F5344CB8AC3E}">
+        <p14:creationId xmlns:p14="http://schemas.microsoft.com/office/powerpoint/2010/main" val="1024086991"/>
+      </p:ext>
+    </p:extLst>
+  </p:cSld>
+  <p:clrMapOvr>
+    <a:masterClrMapping/>
+  </p:clrMapOvr>
+</p:notes>
+</file>
+
+<file path=ppt/notesSlides/notesSlide30.xml><?xml version="1.0" encoding="utf-8"?>
+<p:notes xmlns:a="http://schemas.openxmlformats.org/drawingml/2006/main" xmlns:r="http://schemas.openxmlformats.org/officeDocument/2006/relationships" xmlns:p="http://schemas.openxmlformats.org/presentationml/2006/main">
+  <p:cSld>
+    <p:spTree>
+      <p:nvGrpSpPr>
+        <p:cNvPr id="1" name=""/>
+        <p:cNvGrpSpPr/>
+        <p:nvPr/>
+      </p:nvGrpSpPr>
+      <p:grpSpPr>
+        <a:xfrm>
+          <a:off x="0" y="0"/>
+          <a:ext cx="0" cy="0"/>
+          <a:chOff x="0" y="0"/>
+          <a:chExt cx="0" cy="0"/>
+        </a:xfrm>
+      </p:grpSpPr>
+      <p:sp>
+        <p:nvSpPr>
+          <p:cNvPr id="2" name="Slide Image Placeholder 1"/>
+          <p:cNvSpPr>
+            <a:spLocks noGrp="1" noRot="1" noChangeAspect="1"/>
+          </p:cNvSpPr>
+          <p:nvPr>
+            <p:ph type="sldImg"/>
+          </p:nvPr>
+        </p:nvSpPr>
+        <p:spPr/>
+      </p:sp>
+      <p:sp>
+        <p:nvSpPr>
+          <p:cNvPr id="3" name="Notes Placeholder 2"/>
+          <p:cNvSpPr>
+            <a:spLocks noGrp="1"/>
+          </p:cNvSpPr>
+          <p:nvPr>
+            <p:ph type="body" idx="1"/>
+          </p:nvPr>
+        </p:nvSpPr>
+        <p:spPr/>
+        <p:txBody>
+          <a:bodyPr/>
+          <a:lstStyle/>
+          <a:p>
+            <a:r>
+              <a:rPr lang="en-US" dirty="0"/>
+              <a:t>确认每位学生都有明确的复测题目与时间。</a:t>
+            </a:r>
+            <a:endParaRPr lang="en-US" dirty="0"/>
+          </a:p>
+        </p:txBody>
+      </p:sp>
+      <p:sp>
+        <p:nvSpPr>
+          <p:cNvPr id="4" name="Slide Number Placeholder 3"/>
+          <p:cNvSpPr>
+            <a:spLocks noGrp="1"/>
+          </p:cNvSpPr>
+          <p:nvPr>
+            <p:ph type="sldNum" sz="quarter" idx="10"/>
+          </p:nvPr>
+        </p:nvSpPr>
+        <p:spPr/>
+        <p:txBody>
+          <a:bodyPr/>
+          <a:lstStyle/>
+          <a:p>
+            <a:fld id="{F7021451-1387-4CA6-816F-3879F97B5CBC}" type="slidenum">
+              <a:rPr lang="en-US"/>
+              <a:t>30</a:t>
             </a:fld>
             <a:endParaRPr lang="en-US"/>
           </a:p>
@@ -2198,7 +2643,7 @@
           <a:p>
             <a:r>
               <a:rPr lang="en-US" dirty="0"/>
-              <a:t>内容比较必须使用strcmp，不使用==。</a:t>
+              <a:t>让学生指出返回类型、函数名、形参和实参。</a:t>
             </a:r>
             <a:endParaRPr lang="en-US" dirty="0"/>
           </a:p>
@@ -2286,7 +2731,7 @@
           <a:p>
             <a:r>
               <a:rPr lang="en-US" dirty="0"/>
-              <a:t>只保留三级要求和程序判断常见风险。</a:t>
+              <a:t>引用符号写在形参类型后。</a:t>
             </a:r>
             <a:endParaRPr lang="en-US" dirty="0"/>
           </a:p>
@@ -2374,7 +2819,7 @@
           <a:p>
             <a:r>
               <a:rPr lang="en-US" dirty="0"/>
-              <a:t>不引入搜索、动态规划等超出本课目标的模型。</a:t>
+              <a:t>程序阅读题常从调用顺序和作用域设陷阱。</a:t>
             </a:r>
             <a:endParaRPr lang="en-US" dirty="0"/>
           </a:p>
@@ -2462,7 +2907,7 @@
           <a:p>
             <a:r>
               <a:rPr lang="en-US" dirty="0"/>
-              <a:t>二维内容用于综合应用，难度不超过GESP四级。</a:t>
+              <a:t>三项缺一不可。</a:t>
             </a:r>
             <a:endParaRPr lang="en-US" dirty="0"/>
           </a:p>
@@ -2550,7 +2995,7 @@
           <a:p>
             <a:r>
               <a:rPr lang="en-US" dirty="0"/>
-              <a:t>第12课未闭环清单在此完成。</a:t>
+              <a:t>要求学生画出sum(4)调用链。</a:t>
             </a:r>
             <a:endParaRPr lang="en-US" dirty="0"/>
           </a:p>
@@ -2638,7 +3083,7 @@
           <a:p>
             <a:r>
               <a:rPr lang="en-US" dirty="0"/>
-              <a:t>不是所有学生都必须按同一顺序做6题。</a:t>
+              <a:t>区分数组容量和当前字符串长度。</a:t>
             </a:r>
             <a:endParaRPr lang="en-US" dirty="0"/>
           </a:p>
@@ -3046,7 +3491,7 @@
                 <a:ea typeface="Hiragino Sans GB" pitchFamily="34" charset="-122"/>
                 <a:cs typeface="Hiragino Sans GB" pitchFamily="34" charset="-120"/>
               </a:rPr>
-              <a:t>最终冲刺：把会做变成稳定得分</a:t>
+              <a:t>三级全真模拟二：最终清库与稳定得分</a:t>
             </a:r>
             <a:endParaRPr lang="en-US" sz="3800" dirty="0"/>
           </a:p>
@@ -3087,7 +3532,7 @@
                 <a:ea typeface="Hiragino Sans GB" pitchFamily="34" charset="-122"/>
                 <a:cs typeface="Hiragino Sans GB" pitchFamily="34" charset="-120"/>
               </a:rPr>
-              <a:t>个人清库 · 全考点复盘 · 最终限时卷 · 考场流程</a:t>
+              <a:t>复测第一套错题，完成第二套整卷，把知识、边界、实现和格式错误清零。</a:t>
             </a:r>
             <a:endParaRPr lang="en-US" sz="2100" dirty="0"/>
           </a:p>
@@ -3226,7 +3671,7 @@
                 <a:ea typeface="Hiragino Sans GB" pitchFamily="34" charset="-122"/>
                 <a:cs typeface="Hiragino Sans GB" pitchFamily="34" charset="-120"/>
               </a:rPr>
-              <a:t>例题复盘：完全平方数检查</a:t>
+              <a:t>常用字符串函数：必须会写函数原型和条件</a:t>
             </a:r>
             <a:endParaRPr lang="en-US" sz="2700" dirty="0"/>
           </a:p>
@@ -3269,24 +3714,7 @@
                 <a:ea typeface="Courier New" pitchFamily="34" charset="-122"/>
                 <a:cs typeface="Courier New" pitchFamily="34" charset="-120"/>
               </a:rPr>
-              <a:t>int r = (int)sqrt(n);</a:t>
-            </a:r>
-            <a:endParaRPr lang="en-US" sz="1800" dirty="0"/>
-          </a:p>
-          <a:p>
-            <a:pPr indent="0" marL="0">
-              <a:buNone/>
-            </a:pPr>
-            <a:r>
-              <a:rPr lang="en-US" sz="1800" dirty="0">
-                <a:solidFill>
-                  <a:srgbClr val="F8FAFC"/>
-                </a:solidFill>
-                <a:latin typeface="Courier New" pitchFamily="34" charset="0"/>
-                <a:ea typeface="Courier New" pitchFamily="34" charset="-122"/>
-                <a:cs typeface="Courier New" pitchFamily="34" charset="-120"/>
-              </a:rPr>
-              <a:t>bool ok = 1LL * r * r == n;</a:t>
+              <a:t>#include &lt;cstring&gt;</a:t>
             </a:r>
             <a:endParaRPr lang="en-US" sz="1800" dirty="0"/>
           </a:p>
@@ -3327,7 +3755,76 @@
                 <a:ea typeface="Hiragino Sans GB" pitchFamily="34" charset="-122"/>
                 <a:cs typeface="Hiragino Sans GB" pitchFamily="34" charset="-120"/>
               </a:rPr>
-              <a:t>不要把浮点近似直接当作整数结论。</a:t>
+              <a:t>返回有效字符个数，不含\0</a:t>
+            </a:r>
+            <a:endParaRPr lang="en-US" sz="2100" dirty="0"/>
+          </a:p>
+          <a:p>
+            <a:pPr indent="0" marL="0">
+              <a:buNone/>
+            </a:pPr>
+            <a:endParaRPr lang="en-US" sz="2100" dirty="0"/>
+          </a:p>
+          <a:p>
+            <a:pPr indent="0" marL="0">
+              <a:buNone/>
+            </a:pPr>
+            <a:r>
+              <a:rPr lang="en-US" sz="2100" dirty="0">
+                <a:solidFill>
+                  <a:srgbClr val="172033"/>
+                </a:solidFill>
+                <a:latin typeface="Hiragino Sans GB" pitchFamily="34" charset="0"/>
+                <a:ea typeface="Hiragino Sans GB" pitchFamily="34" charset="-122"/>
+                <a:cs typeface="Hiragino Sans GB" pitchFamily="34" charset="-120"/>
+              </a:rPr>
+              <a:t>复制src到dst；dst容量必须足够</a:t>
+            </a:r>
+            <a:endParaRPr lang="en-US" sz="2100" dirty="0"/>
+          </a:p>
+          <a:p>
+            <a:pPr indent="0" marL="0">
+              <a:buNone/>
+            </a:pPr>
+            <a:endParaRPr lang="en-US" sz="2100" dirty="0"/>
+          </a:p>
+          <a:p>
+            <a:pPr indent="0" marL="0">
+              <a:buNone/>
+            </a:pPr>
+            <a:r>
+              <a:rPr lang="en-US" sz="2100" dirty="0">
+                <a:solidFill>
+                  <a:srgbClr val="172033"/>
+                </a:solidFill>
+                <a:latin typeface="Hiragino Sans GB" pitchFamily="34" charset="0"/>
+                <a:ea typeface="Hiragino Sans GB" pitchFamily="34" charset="-122"/>
+                <a:cs typeface="Hiragino Sans GB" pitchFamily="34" charset="-120"/>
+              </a:rPr>
+              <a:t>把src接到dst末尾；容量≥两串长度+1</a:t>
+            </a:r>
+            <a:endParaRPr lang="en-US" sz="2100" dirty="0"/>
+          </a:p>
+          <a:p>
+            <a:pPr indent="0" marL="0">
+              <a:buNone/>
+            </a:pPr>
+            <a:endParaRPr lang="en-US" sz="2100" dirty="0"/>
+          </a:p>
+          <a:p>
+            <a:pPr indent="0" marL="0">
+              <a:buNone/>
+            </a:pPr>
+            <a:r>
+              <a:rPr lang="en-US" sz="2100" dirty="0">
+                <a:solidFill>
+                  <a:srgbClr val="172033"/>
+                </a:solidFill>
+                <a:latin typeface="Hiragino Sans GB" pitchFamily="34" charset="0"/>
+                <a:ea typeface="Hiragino Sans GB" pitchFamily="34" charset="-122"/>
+                <a:cs typeface="Hiragino Sans GB" pitchFamily="34" charset="-120"/>
+              </a:rPr>
+              <a:t>返回0表示内容相等；负/正表示字典序</a:t>
             </a:r>
             <a:endParaRPr lang="en-US" sz="2100" dirty="0"/>
           </a:p>
@@ -3478,7 +3975,7 @@
                 <a:ea typeface="Hiragino Sans GB" pitchFamily="34" charset="-122"/>
                 <a:cs typeface="Hiragino Sans GB" pitchFamily="34" charset="-120"/>
               </a:rPr>
-              <a:t>例题复盘：字符扫描状态表</a:t>
+              <a:t>字符分类与大小写转换</a:t>
             </a:r>
             <a:endParaRPr lang="en-US" sz="2700" dirty="0"/>
           </a:p>
@@ -3521,7 +4018,7 @@
                 <a:ea typeface="Courier New" pitchFamily="34" charset="-122"/>
                 <a:cs typeface="Courier New" pitchFamily="34" charset="-120"/>
               </a:rPr>
-              <a:t>长度  大写  小写  数字  其他</a:t>
+              <a:t>#include &lt;cctype&gt;</a:t>
             </a:r>
             <a:endParaRPr lang="en-US" sz="1800" dirty="0"/>
           </a:p>
@@ -3538,7 +4035,7 @@
                 <a:ea typeface="Courier New" pitchFamily="34" charset="-122"/>
                 <a:cs typeface="Courier New" pitchFamily="34" charset="-120"/>
               </a:rPr>
-              <a:t> 0     0     0     0     0</a:t>
+              <a:t>if (isdigit((unsigned char)ch)) digits++;</a:t>
             </a:r>
             <a:endParaRPr lang="en-US" sz="1800" dirty="0"/>
           </a:p>
@@ -3579,7 +4076,76 @@
                 <a:ea typeface="Hiragino Sans GB" pitchFamily="34" charset="-122"/>
                 <a:cs typeface="Hiragino Sans GB" pitchFamily="34" charset="-120"/>
               </a:rPr>
-              <a:t>先定义状态含义，再决定每种字符如何更新，最后统一判断。</a:t>
+              <a:t>是否为数字字符0—9</a:t>
+            </a:r>
+            <a:endParaRPr lang="en-US" sz="2100" dirty="0"/>
+          </a:p>
+          <a:p>
+            <a:pPr indent="0" marL="0">
+              <a:buNone/>
+            </a:pPr>
+            <a:endParaRPr lang="en-US" sz="2100" dirty="0"/>
+          </a:p>
+          <a:p>
+            <a:pPr indent="0" marL="0">
+              <a:buNone/>
+            </a:pPr>
+            <a:r>
+              <a:rPr lang="en-US" sz="2100" dirty="0">
+                <a:solidFill>
+                  <a:srgbClr val="172033"/>
+                </a:solidFill>
+                <a:latin typeface="Hiragino Sans GB" pitchFamily="34" charset="0"/>
+                <a:ea typeface="Hiragino Sans GB" pitchFamily="34" charset="-122"/>
+                <a:cs typeface="Hiragino Sans GB" pitchFamily="34" charset="-120"/>
+              </a:rPr>
+              <a:t>是否为英文字母</a:t>
+            </a:r>
+            <a:endParaRPr lang="en-US" sz="2100" dirty="0"/>
+          </a:p>
+          <a:p>
+            <a:pPr indent="0" marL="0">
+              <a:buNone/>
+            </a:pPr>
+            <a:endParaRPr lang="en-US" sz="2100" dirty="0"/>
+          </a:p>
+          <a:p>
+            <a:pPr indent="0" marL="0">
+              <a:buNone/>
+            </a:pPr>
+            <a:r>
+              <a:rPr lang="en-US" sz="2100" dirty="0">
+                <a:solidFill>
+                  <a:srgbClr val="172033"/>
+                </a:solidFill>
+                <a:latin typeface="Hiragino Sans GB" pitchFamily="34" charset="0"/>
+                <a:ea typeface="Hiragino Sans GB" pitchFamily="34" charset="-122"/>
+                <a:cs typeface="Hiragino Sans GB" pitchFamily="34" charset="-120"/>
+              </a:rPr>
+              <a:t>判断小写/大写字母</a:t>
+            </a:r>
+            <a:endParaRPr lang="en-US" sz="2100" dirty="0"/>
+          </a:p>
+          <a:p>
+            <a:pPr indent="0" marL="0">
+              <a:buNone/>
+            </a:pPr>
+            <a:endParaRPr lang="en-US" sz="2100" dirty="0"/>
+          </a:p>
+          <a:p>
+            <a:pPr indent="0" marL="0">
+              <a:buNone/>
+            </a:pPr>
+            <a:r>
+              <a:rPr lang="en-US" sz="2100" dirty="0">
+                <a:solidFill>
+                  <a:srgbClr val="172033"/>
+                </a:solidFill>
+                <a:latin typeface="Hiragino Sans GB" pitchFamily="34" charset="0"/>
+                <a:ea typeface="Hiragino Sans GB" pitchFamily="34" charset="-122"/>
+                <a:cs typeface="Hiragino Sans GB" pitchFamily="34" charset="-120"/>
+              </a:rPr>
+              <a:t>转换大小写并返回转换后的字符</a:t>
             </a:r>
             <a:endParaRPr lang="en-US" sz="2100" dirty="0"/>
           </a:p>
@@ -3730,7 +4296,7 @@
                 <a:ea typeface="Hiragino Sans GB" pitchFamily="34" charset="-122"/>
                 <a:cs typeface="Hiragino Sans GB" pitchFamily="34" charset="-120"/>
               </a:rPr>
-              <a:t>最终限时卷执行顺序</a:t>
+              <a:t>cmath常用函数与整数验证</a:t>
             </a:r>
             <a:endParaRPr lang="en-US" sz="2700" dirty="0"/>
           </a:p>
@@ -3738,87 +4304,25 @@
       </p:sp>
       <p:sp>
         <p:nvSpPr>
-          <p:cNvPr id="5" name="Shape 2"/>
-          <p:cNvSpPr/>
-          <p:nvPr/>
-        </p:nvSpPr>
-        <p:spPr>
-          <a:xfrm>
-            <a:off x="822960" y="1508760"/>
-            <a:ext cx="594360" cy="594360"/>
-          </a:xfrm>
-          <a:prstGeom prst="ellipse">
+          <p:cNvPr id="5" name="Text 2"/>
+          <p:cNvSpPr/>
+          <p:nvPr/>
+        </p:nvSpPr>
+        <p:spPr>
+          <a:xfrm>
+            <a:off x="658368" y="1417320"/>
+            <a:ext cx="6583680" cy="4480560"/>
+          </a:xfrm>
+          <a:prstGeom prst="rect">
             <a:avLst/>
           </a:prstGeom>
           <a:solidFill>
-            <a:srgbClr val="F97316"/>
+            <a:srgbClr val="111827"/>
           </a:solidFill>
-          <a:ln w="12700">
-            <a:solidFill>
-              <a:srgbClr val="F97316"/>
-            </a:solidFill>
-            <a:prstDash val="solid"/>
-          </a:ln>
-        </p:spPr>
-      </p:sp>
-      <p:sp>
-        <p:nvSpPr>
-          <p:cNvPr id="6" name="Text 3"/>
-          <p:cNvSpPr/>
-          <p:nvPr/>
-        </p:nvSpPr>
-        <p:spPr>
-          <a:xfrm>
-            <a:off x="822960" y="1627632"/>
-            <a:ext cx="594360" cy="228600"/>
-          </a:xfrm>
-          <a:prstGeom prst="rect">
-            <a:avLst/>
-          </a:prstGeom>
-          <a:noFill/>
-          <a:ln/>
-        </p:spPr>
-        <p:txBody>
-          <a:bodyPr wrap="square" lIns="0" tIns="0" rIns="0" bIns="0" rtlCol="0" anchor="ctr"/>
-          <a:lstStyle/>
-          <a:p>
-            <a:pPr algn="ctr" indent="0" marL="0">
-              <a:buNone/>
-            </a:pPr>
-            <a:r>
-              <a:rPr lang="en-US" b="1" dirty="0">
-                <a:solidFill>
-                  <a:srgbClr val="FFFFFF"/>
-                </a:solidFill>
-                <a:latin typeface="Hiragino Sans GB" pitchFamily="34" charset="0"/>
-                <a:ea typeface="Hiragino Sans GB" pitchFamily="34" charset="-122"/>
-                <a:cs typeface="Hiragino Sans GB" pitchFamily="34" charset="-120"/>
-              </a:rPr>
-              <a:t>1</a:t>
-            </a:r>
-            <a:endParaRPr lang="en-US" dirty="0"/>
-          </a:p>
-        </p:txBody>
-      </p:sp>
-      <p:sp>
-        <p:nvSpPr>
-          <p:cNvPr id="7" name="Text 4"/>
-          <p:cNvSpPr/>
-          <p:nvPr/>
-        </p:nvSpPr>
-        <p:spPr>
-          <a:xfrm>
-            <a:off x="1691640" y="1481328"/>
-            <a:ext cx="9601200" cy="685800"/>
-          </a:xfrm>
-          <a:prstGeom prst="rect">
-            <a:avLst/>
-          </a:prstGeom>
-          <a:noFill/>
-          <a:ln/>
-        </p:spPr>
-        <p:txBody>
-          <a:bodyPr wrap="square" lIns="381" tIns="381" rIns="381" bIns="381" rtlCol="0" anchor="ctr">
+          <a:ln/>
+        </p:spPr>
+        <p:txBody>
+          <a:bodyPr wrap="square" lIns="3556" tIns="3556" rIns="3556" bIns="3556" rtlCol="0" anchor="ctr">
             <a:normAutofit/>
           </a:bodyPr>
           <a:lstStyle/>
@@ -3827,7 +4331,65 @@
               <a:buNone/>
             </a:pPr>
             <a:r>
-              <a:rPr lang="en-US" sz="2200" dirty="0">
+              <a:rPr lang="en-US" sz="1800" dirty="0">
+                <a:solidFill>
+                  <a:srgbClr val="F8FAFC"/>
+                </a:solidFill>
+                <a:latin typeface="Courier New" pitchFamily="34" charset="0"/>
+                <a:ea typeface="Courier New" pitchFamily="34" charset="-122"/>
+                <a:cs typeface="Courier New" pitchFamily="34" charset="-120"/>
+              </a:rPr>
+              <a:t>int r=(int)sqrt(n);</a:t>
+            </a:r>
+            <a:endParaRPr lang="en-US" sz="1800" dirty="0"/>
+          </a:p>
+          <a:p>
+            <a:pPr indent="0" marL="0">
+              <a:buNone/>
+            </a:pPr>
+            <a:r>
+              <a:rPr lang="en-US" sz="1800" dirty="0">
+                <a:solidFill>
+                  <a:srgbClr val="F8FAFC"/>
+                </a:solidFill>
+                <a:latin typeface="Courier New" pitchFamily="34" charset="0"/>
+                <a:ea typeface="Courier New" pitchFamily="34" charset="-122"/>
+                <a:cs typeface="Courier New" pitchFamily="34" charset="-120"/>
+              </a:rPr>
+              <a:t>bool square = 1LL*r*r == n;</a:t>
+            </a:r>
+            <a:endParaRPr lang="en-US" sz="1800" dirty="0"/>
+          </a:p>
+        </p:txBody>
+      </p:sp>
+      <p:sp>
+        <p:nvSpPr>
+          <p:cNvPr id="6" name="Text 3"/>
+          <p:cNvSpPr/>
+          <p:nvPr/>
+        </p:nvSpPr>
+        <p:spPr>
+          <a:xfrm>
+            <a:off x="7543800" y="1554480"/>
+            <a:ext cx="3931920" cy="3931920"/>
+          </a:xfrm>
+          <a:prstGeom prst="rect">
+            <a:avLst/>
+          </a:prstGeom>
+          <a:noFill/>
+          <a:ln/>
+        </p:spPr>
+        <p:txBody>
+          <a:bodyPr wrap="square" lIns="1016" tIns="1016" rIns="1016" bIns="1016" rtlCol="0" anchor="ctr">
+            <a:normAutofit/>
+          </a:bodyPr>
+          <a:lstStyle/>
+          <a:p>
+            <a:pPr indent="0" marL="0">
+              <a:buNone/>
+            </a:pPr>
+            <a:r>
+              <a:rPr lang="en-US" sz="2100" dirty="0">
                 <a:solidFill>
                   <a:srgbClr val="172033"/>
                 </a:solidFill>
@@ -3835,15 +4397,107 @@
                 <a:ea typeface="Hiragino Sans GB" pitchFamily="34" charset="-122"/>
                 <a:cs typeface="Hiragino Sans GB" pitchFamily="34" charset="-120"/>
               </a:rPr>
-              <a:t>卡住时记录卡点并切换题目，不让一道题吞掉整场时间。</a:t>
-            </a:r>
-            <a:endParaRPr lang="en-US" sz="2200" dirty="0"/>
-          </a:p>
-        </p:txBody>
-      </p:sp>
-      <p:sp>
-        <p:nvSpPr>
-          <p:cNvPr id="8" name="Text 5"/>
+              <a:t>平方根，返回浮点结果</a:t>
+            </a:r>
+            <a:endParaRPr lang="en-US" sz="2100" dirty="0"/>
+          </a:p>
+          <a:p>
+            <a:pPr indent="0" marL="0">
+              <a:buNone/>
+            </a:pPr>
+            <a:endParaRPr lang="en-US" sz="2100" dirty="0"/>
+          </a:p>
+          <a:p>
+            <a:pPr indent="0" marL="0">
+              <a:buNone/>
+            </a:pPr>
+            <a:r>
+              <a:rPr lang="en-US" sz="2100" dirty="0">
+                <a:solidFill>
+                  <a:srgbClr val="172033"/>
+                </a:solidFill>
+                <a:latin typeface="Hiragino Sans GB" pitchFamily="34" charset="0"/>
+                <a:ea typeface="Hiragino Sans GB" pitchFamily="34" charset="-122"/>
+                <a:cs typeface="Hiragino Sans GB" pitchFamily="34" charset="-120"/>
+              </a:rPr>
+              <a:t>a的b次幂，返回浮点结果</a:t>
+            </a:r>
+            <a:endParaRPr lang="en-US" sz="2100" dirty="0"/>
+          </a:p>
+          <a:p>
+            <a:pPr indent="0" marL="0">
+              <a:buNone/>
+            </a:pPr>
+            <a:endParaRPr lang="en-US" sz="2100" dirty="0"/>
+          </a:p>
+          <a:p>
+            <a:pPr indent="0" marL="0">
+              <a:buNone/>
+            </a:pPr>
+            <a:r>
+              <a:rPr lang="en-US" sz="2100" dirty="0">
+                <a:solidFill>
+                  <a:srgbClr val="172033"/>
+                </a:solidFill>
+                <a:latin typeface="Hiragino Sans GB" pitchFamily="34" charset="0"/>
+                <a:ea typeface="Hiragino Sans GB" pitchFamily="34" charset="-122"/>
+                <a:cs typeface="Hiragino Sans GB" pitchFamily="34" charset="-120"/>
+              </a:rPr>
+              <a:t>向下取整 / 向上取整</a:t>
+            </a:r>
+            <a:endParaRPr lang="en-US" sz="2100" dirty="0"/>
+          </a:p>
+          <a:p>
+            <a:pPr indent="0" marL="0">
+              <a:buNone/>
+            </a:pPr>
+            <a:endParaRPr lang="en-US" sz="2100" dirty="0"/>
+          </a:p>
+          <a:p>
+            <a:pPr indent="0" marL="0">
+              <a:buNone/>
+            </a:pPr>
+            <a:r>
+              <a:rPr lang="en-US" sz="2100" dirty="0">
+                <a:solidFill>
+                  <a:srgbClr val="172033"/>
+                </a:solidFill>
+                <a:latin typeface="Hiragino Sans GB" pitchFamily="34" charset="0"/>
+                <a:ea typeface="Hiragino Sans GB" pitchFamily="34" charset="-122"/>
+                <a:cs typeface="Hiragino Sans GB" pitchFamily="34" charset="-120"/>
+              </a:rPr>
+              <a:t>四舍五入 / 绝对值</a:t>
+            </a:r>
+            <a:endParaRPr lang="en-US" sz="2100" dirty="0"/>
+          </a:p>
+          <a:p>
+            <a:pPr indent="0" marL="0">
+              <a:buNone/>
+            </a:pPr>
+            <a:endParaRPr lang="en-US" sz="2100" dirty="0"/>
+          </a:p>
+          <a:p>
+            <a:pPr indent="0" marL="0">
+              <a:buNone/>
+            </a:pPr>
+            <a:r>
+              <a:rPr lang="en-US" sz="2100" dirty="0">
+                <a:solidFill>
+                  <a:srgbClr val="172033"/>
+                </a:solidFill>
+                <a:latin typeface="Hiragino Sans GB" pitchFamily="34" charset="0"/>
+                <a:ea typeface="Hiragino Sans GB" pitchFamily="34" charset="-122"/>
+                <a:cs typeface="Hiragino Sans GB" pitchFamily="34" charset="-120"/>
+              </a:rPr>
+              <a:t>浮点函数用于找候选，整数运算用于精确验证。</a:t>
+            </a:r>
+            <a:endParaRPr lang="en-US" sz="2100" dirty="0"/>
+          </a:p>
+        </p:txBody>
+      </p:sp>
+      <p:sp>
+        <p:nvSpPr>
+          <p:cNvPr id="7" name="Text 4"/>
           <p:cNvSpPr/>
           <p:nvPr/>
         </p:nvSpPr>
@@ -3986,7 +4640,7 @@
                 <a:ea typeface="Hiragino Sans GB" pitchFamily="34" charset="-122"/>
                 <a:cs typeface="Hiragino Sans GB" pitchFamily="34" charset="-120"/>
               </a:rPr>
-              <a:t>客观题答题法：写依据，不凭感觉</a:t>
+              <a:t>一维数组：合法下标与初始化</a:t>
             </a:r>
             <a:endParaRPr lang="en-US" sz="2700" dirty="0"/>
           </a:p>
@@ -3994,50 +4648,25 @@
       </p:sp>
       <p:sp>
         <p:nvSpPr>
-          <p:cNvPr id="5" name="Shape 2"/>
-          <p:cNvSpPr/>
-          <p:nvPr/>
-        </p:nvSpPr>
-        <p:spPr>
-          <a:xfrm>
-            <a:off x="777240" y="1645920"/>
-            <a:ext cx="10607040" cy="4114800"/>
-          </a:xfrm>
-          <a:prstGeom prst="roundRect">
-            <a:avLst>
-              <a:gd name="adj" fmla="val 1778"/>
-            </a:avLst>
+          <p:cNvPr id="5" name="Text 2"/>
+          <p:cNvSpPr/>
+          <p:nvPr/>
+        </p:nvSpPr>
+        <p:spPr>
+          <a:xfrm>
+            <a:off x="658368" y="1417320"/>
+            <a:ext cx="6583680" cy="4480560"/>
+          </a:xfrm>
+          <a:prstGeom prst="rect">
+            <a:avLst/>
           </a:prstGeom>
           <a:solidFill>
-            <a:srgbClr val="FFFFFF"/>
+            <a:srgbClr val="111827"/>
           </a:solidFill>
-          <a:ln w="12700">
-            <a:solidFill>
-              <a:srgbClr val="D8DEE9"/>
-            </a:solidFill>
-            <a:prstDash val="solid"/>
-          </a:ln>
-        </p:spPr>
-      </p:sp>
-      <p:sp>
-        <p:nvSpPr>
-          <p:cNvPr id="6" name="Text 3"/>
-          <p:cNvSpPr/>
-          <p:nvPr/>
-        </p:nvSpPr>
-        <p:spPr>
-          <a:xfrm>
-            <a:off x="1097280" y="1965960"/>
-            <a:ext cx="9966960" cy="3474720"/>
-          </a:xfrm>
-          <a:prstGeom prst="rect">
-            <a:avLst/>
-          </a:prstGeom>
-          <a:noFill/>
-          <a:ln/>
-        </p:spPr>
-        <p:txBody>
-          <a:bodyPr wrap="square" lIns="508" tIns="508" rIns="508" bIns="508" rtlCol="0" anchor="ctr">
+          <a:ln/>
+        </p:spPr>
+        <p:txBody>
+          <a:bodyPr wrap="square" lIns="3556" tIns="3556" rIns="3556" bIns="3556" rtlCol="0" anchor="ctr">
             <a:normAutofit/>
           </a:bodyPr>
           <a:lstStyle/>
@@ -4046,7 +4675,65 @@
               <a:buNone/>
             </a:pPr>
             <a:r>
-              <a:rPr lang="en-US" sz="2200" dirty="0">
+              <a:rPr lang="en-US" sz="1800" dirty="0">
+                <a:solidFill>
+                  <a:srgbClr val="F8FAFC"/>
+                </a:solidFill>
+                <a:latin typeface="Courier New" pitchFamily="34" charset="0"/>
+                <a:ea typeface="Courier New" pitchFamily="34" charset="-122"/>
+                <a:cs typeface="Courier New" pitchFamily="34" charset="-120"/>
+              </a:rPr>
+              <a:t>int a[100] = {};        // 全部初始化为0</a:t>
+            </a:r>
+            <a:endParaRPr lang="en-US" sz="1800" dirty="0"/>
+          </a:p>
+          <a:p>
+            <a:pPr indent="0" marL="0">
+              <a:buNone/>
+            </a:pPr>
+            <a:r>
+              <a:rPr lang="en-US" sz="1800" dirty="0">
+                <a:solidFill>
+                  <a:srgbClr val="F8FAFC"/>
+                </a:solidFill>
+                <a:latin typeface="Courier New" pitchFamily="34" charset="0"/>
+                <a:ea typeface="Courier New" pitchFamily="34" charset="-122"/>
+                <a:cs typeface="Courier New" pitchFamily="34" charset="-120"/>
+              </a:rPr>
+              <a:t>for (int i=0; i&lt;n; ++i) cin &gt;&gt; a[i];</a:t>
+            </a:r>
+            <a:endParaRPr lang="en-US" sz="1800" dirty="0"/>
+          </a:p>
+        </p:txBody>
+      </p:sp>
+      <p:sp>
+        <p:nvSpPr>
+          <p:cNvPr id="6" name="Text 3"/>
+          <p:cNvSpPr/>
+          <p:nvPr/>
+        </p:nvSpPr>
+        <p:spPr>
+          <a:xfrm>
+            <a:off x="7543800" y="1554480"/>
+            <a:ext cx="3931920" cy="3931920"/>
+          </a:xfrm>
+          <a:prstGeom prst="rect">
+            <a:avLst/>
+          </a:prstGeom>
+          <a:noFill/>
+          <a:ln/>
+        </p:spPr>
+        <p:txBody>
+          <a:bodyPr wrap="square" lIns="1016" tIns="1016" rIns="1016" bIns="1016" rtlCol="0" anchor="ctr">
+            <a:normAutofit/>
+          </a:bodyPr>
+          <a:lstStyle/>
+          <a:p>
+            <a:pPr indent="0" marL="0">
+              <a:buNone/>
+            </a:pPr>
+            <a:r>
+              <a:rPr lang="en-US" sz="2100" dirty="0">
                 <a:solidFill>
                   <a:srgbClr val="172033"/>
                 </a:solidFill>
@@ -4054,22 +4741,22 @@
                 <a:ea typeface="Hiragino Sans GB" pitchFamily="34" charset="-122"/>
                 <a:cs typeface="Hiragino Sans GB" pitchFamily="34" charset="-120"/>
               </a:rPr>
-              <a:t>写初值和每步变化</a:t>
-            </a:r>
-            <a:endParaRPr lang="en-US" sz="2200" dirty="0"/>
-          </a:p>
-          <a:p>
-            <a:pPr indent="0" marL="0">
-              <a:buNone/>
-            </a:pPr>
-            <a:endParaRPr lang="en-US" sz="2200" dirty="0"/>
-          </a:p>
-          <a:p>
-            <a:pPr indent="0" marL="0">
-              <a:buNone/>
-            </a:pPr>
-            <a:r>
-              <a:rPr lang="en-US" sz="2200" dirty="0">
+              <a:t>合法下标：长度为n时只能访问0到n-1。循环条件写成i&lt;n，不是i&lt;=n。</a:t>
+            </a:r>
+            <a:endParaRPr lang="en-US" sz="2100" dirty="0"/>
+          </a:p>
+          <a:p>
+            <a:pPr indent="0" marL="0">
+              <a:buNone/>
+            </a:pPr>
+            <a:endParaRPr lang="en-US" sz="2100" dirty="0"/>
+          </a:p>
+          <a:p>
+            <a:pPr indent="0" marL="0">
+              <a:buNone/>
+            </a:pPr>
+            <a:r>
+              <a:rPr lang="en-US" sz="2100" dirty="0">
                 <a:solidFill>
                   <a:srgbClr val="172033"/>
                 </a:solidFill>
@@ -4077,55 +4764,9 @@
                 <a:ea typeface="Hiragino Sans GB" pitchFamily="34" charset="-122"/>
                 <a:cs typeface="Hiragino Sans GB" pitchFamily="34" charset="-120"/>
               </a:rPr>
-              <a:t>明确合法范围</a:t>
-            </a:r>
-            <a:endParaRPr lang="en-US" sz="2200" dirty="0"/>
-          </a:p>
-          <a:p>
-            <a:pPr indent="0" marL="0">
-              <a:buNone/>
-            </a:pPr>
-            <a:endParaRPr lang="en-US" sz="2200" dirty="0"/>
-          </a:p>
-          <a:p>
-            <a:pPr indent="0" marL="0">
-              <a:buNone/>
-            </a:pPr>
-            <a:r>
-              <a:rPr lang="en-US" sz="2200" dirty="0">
-                <a:solidFill>
-                  <a:srgbClr val="172033"/>
-                </a:solidFill>
-                <a:latin typeface="Hiragino Sans GB" pitchFamily="34" charset="0"/>
-                <a:ea typeface="Hiragino Sans GB" pitchFamily="34" charset="-122"/>
-                <a:cs typeface="Hiragino Sans GB" pitchFamily="34" charset="-120"/>
-              </a:rPr>
-              <a:t>先判断运算类型</a:t>
-            </a:r>
-            <a:endParaRPr lang="en-US" sz="2200" dirty="0"/>
-          </a:p>
-          <a:p>
-            <a:pPr indent="0" marL="0">
-              <a:buNone/>
-            </a:pPr>
-            <a:endParaRPr lang="en-US" sz="2200" dirty="0"/>
-          </a:p>
-          <a:p>
-            <a:pPr indent="0" marL="0">
-              <a:buNone/>
-            </a:pPr>
-            <a:r>
-              <a:rPr lang="en-US" sz="2200" dirty="0">
-                <a:solidFill>
-                  <a:srgbClr val="172033"/>
-                </a:solidFill>
-                <a:latin typeface="Hiragino Sans GB" pitchFamily="34" charset="0"/>
-                <a:ea typeface="Hiragino Sans GB" pitchFamily="34" charset="-122"/>
-                <a:cs typeface="Hiragino Sans GB" pitchFamily="34" charset="-120"/>
-              </a:rPr>
-              <a:t>用反例检查结论</a:t>
-            </a:r>
-            <a:endParaRPr lang="en-US" sz="2200" dirty="0"/>
+              <a:t>最值初始化可用第一个有效元素，避免用0导致全负数据错误。</a:t>
+            </a:r>
+            <a:endParaRPr lang="en-US" sz="2100" dirty="0"/>
           </a:p>
         </p:txBody>
       </p:sp>
@@ -4274,7 +4915,7 @@
                 <a:ea typeface="Hiragino Sans GB" pitchFamily="34" charset="-122"/>
                 <a:cs typeface="Hiragino Sans GB" pitchFamily="34" charset="-120"/>
               </a:rPr>
-              <a:t>最终客观题 1—4</a:t>
+              <a:t>二维数组：先行后列，先判断再访问</a:t>
             </a:r>
             <a:endParaRPr lang="en-US" sz="2700" dirty="0"/>
           </a:p>
@@ -4282,50 +4923,25 @@
       </p:sp>
       <p:sp>
         <p:nvSpPr>
-          <p:cNvPr id="5" name="Shape 2"/>
-          <p:cNvSpPr/>
-          <p:nvPr/>
-        </p:nvSpPr>
-        <p:spPr>
-          <a:xfrm>
-            <a:off x="658368" y="1508760"/>
-            <a:ext cx="5257800" cy="4297680"/>
-          </a:xfrm>
-          <a:prstGeom prst="roundRect">
-            <a:avLst>
-              <a:gd name="adj" fmla="val 1702"/>
-            </a:avLst>
+          <p:cNvPr id="5" name="Text 2"/>
+          <p:cNvSpPr/>
+          <p:nvPr/>
+        </p:nvSpPr>
+        <p:spPr>
+          <a:xfrm>
+            <a:off x="658368" y="1417320"/>
+            <a:ext cx="6583680" cy="4480560"/>
+          </a:xfrm>
+          <a:prstGeom prst="rect">
+            <a:avLst/>
           </a:prstGeom>
           <a:solidFill>
-            <a:srgbClr val="FFFFFF"/>
+            <a:srgbClr val="111827"/>
           </a:solidFill>
-          <a:ln w="12700">
-            <a:solidFill>
-              <a:srgbClr val="D8DEE9"/>
-            </a:solidFill>
-            <a:prstDash val="solid"/>
-          </a:ln>
-        </p:spPr>
-      </p:sp>
-      <p:sp>
-        <p:nvSpPr>
-          <p:cNvPr id="6" name="Text 3"/>
-          <p:cNvSpPr/>
-          <p:nvPr/>
-        </p:nvSpPr>
-        <p:spPr>
-          <a:xfrm>
-            <a:off x="978408" y="1828800"/>
-            <a:ext cx="4617720" cy="3657600"/>
-          </a:xfrm>
-          <a:prstGeom prst="rect">
-            <a:avLst/>
-          </a:prstGeom>
-          <a:noFill/>
-          <a:ln/>
-        </p:spPr>
-        <p:txBody>
-          <a:bodyPr wrap="square" lIns="508" tIns="508" rIns="508" bIns="508" rtlCol="0" anchor="ctr">
+          <a:ln/>
+        </p:spPr>
+        <p:txBody>
+          <a:bodyPr wrap="square" lIns="3556" tIns="3556" rIns="3556" bIns="3556" rtlCol="0" anchor="ctr">
             <a:normAutofit/>
           </a:bodyPr>
           <a:lstStyle/>
@@ -4334,135 +4950,73 @@
               <a:buNone/>
             </a:pPr>
             <a:r>
-              <a:rPr lang="en-US" sz="2200" dirty="0">
-                <a:solidFill>
-                  <a:srgbClr val="172033"/>
-                </a:solidFill>
-                <a:latin typeface="Hiragino Sans GB" pitchFamily="34" charset="0"/>
-                <a:ea typeface="Hiragino Sans GB" pitchFamily="34" charset="-122"/>
-                <a:cs typeface="Hiragino Sans GB" pitchFamily="34" charset="-120"/>
-              </a:rPr>
-              <a:t>模拟法解决问题时，最先应明确什么？</a:t>
-            </a:r>
-            <a:endParaRPr lang="en-US" sz="2200" dirty="0"/>
-          </a:p>
-          <a:p>
-            <a:pPr indent="0" marL="0">
-              <a:buNone/>
-            </a:pPr>
-            <a:endParaRPr lang="en-US" sz="2200" dirty="0"/>
-          </a:p>
-          <a:p>
-            <a:pPr indent="0" marL="0">
-              <a:buNone/>
-            </a:pPr>
-            <a:r>
-              <a:rPr lang="en-US" sz="2200" dirty="0">
-                <a:solidFill>
-                  <a:srgbClr val="172033"/>
-                </a:solidFill>
-                <a:latin typeface="Hiragino Sans GB" pitchFamily="34" charset="0"/>
-                <a:ea typeface="Hiragino Sans GB" pitchFamily="34" charset="-122"/>
-                <a:cs typeface="Hiragino Sans GB" pitchFamily="34" charset="-120"/>
-              </a:rPr>
-              <a:t>0上1右2下3左时，顺时针转向可写dir=(dir+1)%4。</a:t>
-            </a:r>
-            <a:endParaRPr lang="en-US" sz="2200" dirty="0"/>
-          </a:p>
-          <a:p>
-            <a:pPr indent="0" marL="0">
-              <a:buNone/>
-            </a:pPr>
-            <a:endParaRPr lang="en-US" sz="2200" dirty="0"/>
-          </a:p>
-          <a:p>
-            <a:pPr indent="0" marL="0">
-              <a:buNone/>
-            </a:pPr>
-            <a:r>
-              <a:rPr lang="en-US" sz="2200" dirty="0">
-                <a:solidFill>
-                  <a:srgbClr val="172033"/>
-                </a:solidFill>
-                <a:latin typeface="Hiragino Sans GB" pitchFamily="34" charset="0"/>
-                <a:ea typeface="Hiragino Sans GB" pitchFamily="34" charset="-122"/>
-                <a:cs typeface="Hiragino Sans GB" pitchFamily="34" charset="-120"/>
-              </a:rPr>
-              <a:t>模拟程序只测试普通数据即可，边界状态不影响答案。</a:t>
-            </a:r>
-            <a:endParaRPr lang="en-US" sz="2200" dirty="0"/>
-          </a:p>
-          <a:p>
-            <a:pPr indent="0" marL="0">
-              <a:buNone/>
-            </a:pPr>
-            <a:endParaRPr lang="en-US" sz="2200" dirty="0"/>
-          </a:p>
-          <a:p>
-            <a:pPr indent="0" marL="0">
-              <a:buNone/>
-            </a:pPr>
-            <a:r>
-              <a:rPr lang="en-US" sz="2200" dirty="0">
-                <a:solidFill>
-                  <a:srgbClr val="172033"/>
-                </a:solidFill>
-                <a:latin typeface="Hiragino Sans GB" pitchFamily="34" charset="0"/>
-                <a:ea typeface="Hiragino Sans GB" pitchFamily="34" charset="-122"/>
-                <a:cs typeface="Hiragino Sans GB" pitchFamily="34" charset="-120"/>
-              </a:rPr>
-              <a:t>访问n行m列矩阵所有元素，正确循环范围是？</a:t>
-            </a:r>
-            <a:endParaRPr lang="en-US" sz="2200" dirty="0"/>
-          </a:p>
-        </p:txBody>
-      </p:sp>
-      <p:sp>
-        <p:nvSpPr>
-          <p:cNvPr id="7" name="Shape 4"/>
-          <p:cNvSpPr/>
-          <p:nvPr/>
-        </p:nvSpPr>
-        <p:spPr>
-          <a:xfrm>
-            <a:off x="6263640" y="1508760"/>
-            <a:ext cx="5257800" cy="4297680"/>
-          </a:xfrm>
-          <a:prstGeom prst="roundRect">
-            <a:avLst>
-              <a:gd name="adj" fmla="val 1702"/>
-            </a:avLst>
-          </a:prstGeom>
-          <a:solidFill>
-            <a:srgbClr val="FFFFFF"/>
-          </a:solidFill>
-          <a:ln w="12700">
-            <a:solidFill>
-              <a:srgbClr val="D8DEE9"/>
-            </a:solidFill>
-            <a:prstDash val="solid"/>
-          </a:ln>
-        </p:spPr>
-      </p:sp>
-      <p:sp>
-        <p:nvSpPr>
-          <p:cNvPr id="8" name="Text 5"/>
-          <p:cNvSpPr/>
-          <p:nvPr/>
-        </p:nvSpPr>
-        <p:spPr>
-          <a:xfrm>
-            <a:off x="6583680" y="1828800"/>
-            <a:ext cx="4617720" cy="3657600"/>
-          </a:xfrm>
-          <a:prstGeom prst="rect">
-            <a:avLst/>
-          </a:prstGeom>
-          <a:noFill/>
-          <a:ln/>
-        </p:spPr>
-        <p:txBody>
-          <a:bodyPr wrap="square" lIns="508" tIns="508" rIns="508" bIns="508" rtlCol="0" anchor="ctr">
+              <a:rPr lang="en-US" sz="1800" dirty="0">
+                <a:solidFill>
+                  <a:srgbClr val="F8FAFC"/>
+                </a:solidFill>
+                <a:latin typeface="Courier New" pitchFamily="34" charset="0"/>
+                <a:ea typeface="Courier New" pitchFamily="34" charset="-122"/>
+                <a:cs typeface="Courier New" pitchFamily="34" charset="-120"/>
+              </a:rPr>
+              <a:t>for (int i=0; i&lt;n; ++i)       // n行</a:t>
+            </a:r>
+            <a:endParaRPr lang="en-US" sz="1800" dirty="0"/>
+          </a:p>
+          <a:p>
+            <a:pPr indent="0" marL="0">
+              <a:buNone/>
+            </a:pPr>
+            <a:r>
+              <a:rPr lang="en-US" sz="1800" dirty="0">
+                <a:solidFill>
+                  <a:srgbClr val="F8FAFC"/>
+                </a:solidFill>
+                <a:latin typeface="Courier New" pitchFamily="34" charset="0"/>
+                <a:ea typeface="Courier New" pitchFamily="34" charset="-122"/>
+                <a:cs typeface="Courier New" pitchFamily="34" charset="-120"/>
+              </a:rPr>
+              <a:t>  for (int j=0; j&lt;m; ++j)     // m列</a:t>
+            </a:r>
+            <a:endParaRPr lang="en-US" sz="1800" dirty="0"/>
+          </a:p>
+          <a:p>
+            <a:pPr indent="0" marL="0">
+              <a:buNone/>
+            </a:pPr>
+            <a:r>
+              <a:rPr lang="en-US" sz="1800" dirty="0">
+                <a:solidFill>
+                  <a:srgbClr val="F8FAFC"/>
+                </a:solidFill>
+                <a:latin typeface="Courier New" pitchFamily="34" charset="0"/>
+                <a:ea typeface="Courier New" pitchFamily="34" charset="-122"/>
+                <a:cs typeface="Courier New" pitchFamily="34" charset="-120"/>
+              </a:rPr>
+              <a:t>    visit(a[i][j]);</a:t>
+            </a:r>
+            <a:endParaRPr lang="en-US" sz="1800" dirty="0"/>
+          </a:p>
+        </p:txBody>
+      </p:sp>
+      <p:sp>
+        <p:nvSpPr>
+          <p:cNvPr id="6" name="Text 3"/>
+          <p:cNvSpPr/>
+          <p:nvPr/>
+        </p:nvSpPr>
+        <p:spPr>
+          <a:xfrm>
+            <a:off x="7543800" y="1554480"/>
+            <a:ext cx="3931920" cy="3931920"/>
+          </a:xfrm>
+          <a:prstGeom prst="rect">
+            <a:avLst/>
+          </a:prstGeom>
+          <a:noFill/>
+          <a:ln/>
+        </p:spPr>
+        <p:txBody>
+          <a:bodyPr wrap="square" lIns="1016" tIns="1016" rIns="1016" bIns="1016" rtlCol="0" anchor="ctr">
             <a:normAutofit/>
           </a:bodyPr>
           <a:lstStyle/>
@@ -4471,7 +5025,7 @@
               <a:buNone/>
             </a:pPr>
             <a:r>
-              <a:rPr lang="en-US" sz="2200" dirty="0">
+              <a:rPr lang="en-US" sz="2100" dirty="0">
                 <a:solidFill>
                   <a:srgbClr val="172033"/>
                 </a:solidFill>
@@ -4479,84 +5033,15 @@
                 <a:ea typeface="Hiragino Sans GB" pitchFamily="34" charset="-122"/>
                 <a:cs typeface="Hiragino Sans GB" pitchFamily="34" charset="-120"/>
               </a:rPr>
-              <a:t>A：模拟的核心是定义状态、操作和更新顺序。</a:t>
-            </a:r>
-            <a:endParaRPr lang="en-US" sz="2200" dirty="0"/>
-          </a:p>
-          <a:p>
-            <a:pPr indent="0" marL="0">
-              <a:buNone/>
-            </a:pPr>
-            <a:endParaRPr lang="en-US" sz="2200" dirty="0"/>
-          </a:p>
-          <a:p>
-            <a:pPr indent="0" marL="0">
-              <a:buNone/>
-            </a:pPr>
-            <a:r>
-              <a:rPr lang="en-US" sz="2200" dirty="0">
-                <a:solidFill>
-                  <a:srgbClr val="172033"/>
-                </a:solidFill>
-                <a:latin typeface="Hiragino Sans GB" pitchFamily="34" charset="0"/>
-                <a:ea typeface="Hiragino Sans GB" pitchFamily="34" charset="-122"/>
-                <a:cs typeface="Hiragino Sans GB" pitchFamily="34" charset="-120"/>
-              </a:rPr>
-              <a:t>T：加1并取模形成循环方向。</a:t>
-            </a:r>
-            <a:endParaRPr lang="en-US" sz="2200" dirty="0"/>
-          </a:p>
-          <a:p>
-            <a:pPr indent="0" marL="0">
-              <a:buNone/>
-            </a:pPr>
-            <a:endParaRPr lang="en-US" sz="2200" dirty="0"/>
-          </a:p>
-          <a:p>
-            <a:pPr indent="0" marL="0">
-              <a:buNone/>
-            </a:pPr>
-            <a:r>
-              <a:rPr lang="en-US" sz="2200" dirty="0">
-                <a:solidFill>
-                  <a:srgbClr val="172033"/>
-                </a:solidFill>
-                <a:latin typeface="Hiragino Sans GB" pitchFamily="34" charset="0"/>
-                <a:ea typeface="Hiragino Sans GB" pitchFamily="34" charset="-122"/>
-                <a:cs typeface="Hiragino Sans GB" pitchFamily="34" charset="-120"/>
-              </a:rPr>
-              <a:t>F：初始即结束、越界、并列等边界常决定正确性。</a:t>
-            </a:r>
-            <a:endParaRPr lang="en-US" sz="2200" dirty="0"/>
-          </a:p>
-          <a:p>
-            <a:pPr indent="0" marL="0">
-              <a:buNone/>
-            </a:pPr>
-            <a:endParaRPr lang="en-US" sz="2200" dirty="0"/>
-          </a:p>
-          <a:p>
-            <a:pPr indent="0" marL="0">
-              <a:buNone/>
-            </a:pPr>
-            <a:r>
-              <a:rPr lang="en-US" sz="2200" dirty="0">
-                <a:solidFill>
-                  <a:srgbClr val="172033"/>
-                </a:solidFill>
-                <a:latin typeface="Hiragino Sans GB" pitchFamily="34" charset="0"/>
-                <a:ea typeface="Hiragino Sans GB" pitchFamily="34" charset="-122"/>
-                <a:cs typeface="Hiragino Sans GB" pitchFamily="34" charset="-120"/>
-              </a:rPr>
-              <a:t>A：行下标0到n-1，列下标0到m-1。</a:t>
-            </a:r>
-            <a:endParaRPr lang="en-US" sz="2200" dirty="0"/>
-          </a:p>
-        </p:txBody>
-      </p:sp>
-      <p:sp>
-        <p:nvSpPr>
-          <p:cNvPr id="9" name="Text 6"/>
+              <a:t>访问相邻格(nr,nc)前必须检查：0≤nr&lt;n 且 0≤nc&lt;m。测试时一定加入非方阵，防止把n、m写反。</a:t>
+            </a:r>
+            <a:endParaRPr lang="en-US" sz="2100" dirty="0"/>
+          </a:p>
+        </p:txBody>
+      </p:sp>
+      <p:sp>
+        <p:nvSpPr>
+          <p:cNvPr id="7" name="Text 4"/>
           <p:cNvSpPr/>
           <p:nvPr/>
         </p:nvSpPr>
@@ -4699,7 +5184,7 @@
                 <a:ea typeface="Hiragino Sans GB" pitchFamily="34" charset="-122"/>
                 <a:cs typeface="Hiragino Sans GB" pitchFamily="34" charset="-120"/>
               </a:rPr>
-              <a:t>最终客观题 5—8</a:t>
+              <a:t>枚举法：列出所有候选并逐个验证</a:t>
             </a:r>
             <a:endParaRPr lang="en-US" sz="2700" dirty="0"/>
           </a:p>
@@ -4707,87 +5192,25 @@
       </p:sp>
       <p:sp>
         <p:nvSpPr>
-          <p:cNvPr id="5" name="Shape 2"/>
-          <p:cNvSpPr/>
-          <p:nvPr/>
-        </p:nvSpPr>
-        <p:spPr>
-          <a:xfrm>
-            <a:off x="822960" y="1508760"/>
-            <a:ext cx="594360" cy="594360"/>
-          </a:xfrm>
-          <a:prstGeom prst="ellipse">
+          <p:cNvPr id="5" name="Text 2"/>
+          <p:cNvSpPr/>
+          <p:nvPr/>
+        </p:nvSpPr>
+        <p:spPr>
+          <a:xfrm>
+            <a:off x="658368" y="1417320"/>
+            <a:ext cx="6583680" cy="4480560"/>
+          </a:xfrm>
+          <a:prstGeom prst="rect">
             <a:avLst/>
           </a:prstGeom>
           <a:solidFill>
-            <a:srgbClr val="F97316"/>
+            <a:srgbClr val="111827"/>
           </a:solidFill>
-          <a:ln w="12700">
-            <a:solidFill>
-              <a:srgbClr val="F97316"/>
-            </a:solidFill>
-            <a:prstDash val="solid"/>
-          </a:ln>
-        </p:spPr>
-      </p:sp>
-      <p:sp>
-        <p:nvSpPr>
-          <p:cNvPr id="6" name="Text 3"/>
-          <p:cNvSpPr/>
-          <p:nvPr/>
-        </p:nvSpPr>
-        <p:spPr>
-          <a:xfrm>
-            <a:off x="822960" y="1627632"/>
-            <a:ext cx="594360" cy="228600"/>
-          </a:xfrm>
-          <a:prstGeom prst="rect">
-            <a:avLst/>
-          </a:prstGeom>
-          <a:noFill/>
-          <a:ln/>
-        </p:spPr>
-        <p:txBody>
-          <a:bodyPr wrap="square" lIns="0" tIns="0" rIns="0" bIns="0" rtlCol="0" anchor="ctr"/>
-          <a:lstStyle/>
-          <a:p>
-            <a:pPr algn="ctr" indent="0" marL="0">
-              <a:buNone/>
-            </a:pPr>
-            <a:r>
-              <a:rPr lang="en-US" b="1" dirty="0">
-                <a:solidFill>
-                  <a:srgbClr val="FFFFFF"/>
-                </a:solidFill>
-                <a:latin typeface="Hiragino Sans GB" pitchFamily="34" charset="0"/>
-                <a:ea typeface="Hiragino Sans GB" pitchFamily="34" charset="-122"/>
-                <a:cs typeface="Hiragino Sans GB" pitchFamily="34" charset="-120"/>
-              </a:rPr>
-              <a:t>1</a:t>
-            </a:r>
-            <a:endParaRPr lang="en-US" dirty="0"/>
-          </a:p>
-        </p:txBody>
-      </p:sp>
-      <p:sp>
-        <p:nvSpPr>
-          <p:cNvPr id="7" name="Text 4"/>
-          <p:cNvSpPr/>
-          <p:nvPr/>
-        </p:nvSpPr>
-        <p:spPr>
-          <a:xfrm>
-            <a:off x="1691640" y="1481328"/>
-            <a:ext cx="9601200" cy="685800"/>
-          </a:xfrm>
-          <a:prstGeom prst="rect">
-            <a:avLst/>
-          </a:prstGeom>
-          <a:noFill/>
-          <a:ln/>
-        </p:spPr>
-        <p:txBody>
-          <a:bodyPr wrap="square" lIns="381" tIns="381" rIns="381" bIns="381" rtlCol="0" anchor="ctr">
+          <a:ln/>
+        </p:spPr>
+        <p:txBody>
+          <a:bodyPr wrap="square" lIns="3556" tIns="3556" rIns="3556" bIns="3556" rtlCol="0" anchor="ctr">
             <a:normAutofit/>
           </a:bodyPr>
           <a:lstStyle/>
@@ -4796,103 +5219,39 @@
               <a:buNone/>
             </a:pPr>
             <a:r>
-              <a:rPr lang="en-US" sz="2200" dirty="0">
-                <a:solidFill>
-                  <a:srgbClr val="172033"/>
-                </a:solidFill>
-                <a:latin typeface="Hiragino Sans GB" pitchFamily="34" charset="0"/>
-                <a:ea typeface="Hiragino Sans GB" pitchFamily="34" charset="-122"/>
-                <a:cs typeface="Hiragino Sans GB" pitchFamily="34" charset="-120"/>
-              </a:rPr>
-              <a:t>顺时针旋转时，原位置(i,j)常映射到？</a:t>
-            </a:r>
-            <a:endParaRPr lang="en-US" sz="2200" dirty="0"/>
-          </a:p>
-        </p:txBody>
-      </p:sp>
-      <p:sp>
-        <p:nvSpPr>
-          <p:cNvPr id="8" name="Shape 5"/>
-          <p:cNvSpPr/>
-          <p:nvPr/>
-        </p:nvSpPr>
-        <p:spPr>
-          <a:xfrm>
-            <a:off x="822960" y="2606040"/>
-            <a:ext cx="594360" cy="594360"/>
-          </a:xfrm>
-          <a:prstGeom prst="ellipse">
-            <a:avLst/>
-          </a:prstGeom>
-          <a:solidFill>
-            <a:srgbClr val="F97316"/>
-          </a:solidFill>
-          <a:ln w="12700">
-            <a:solidFill>
-              <a:srgbClr val="F97316"/>
-            </a:solidFill>
-            <a:prstDash val="solid"/>
-          </a:ln>
-        </p:spPr>
-      </p:sp>
-      <p:sp>
-        <p:nvSpPr>
-          <p:cNvPr id="9" name="Text 6"/>
-          <p:cNvSpPr/>
-          <p:nvPr/>
-        </p:nvSpPr>
-        <p:spPr>
-          <a:xfrm>
-            <a:off x="822960" y="2724912"/>
-            <a:ext cx="594360" cy="228600"/>
-          </a:xfrm>
-          <a:prstGeom prst="rect">
-            <a:avLst/>
-          </a:prstGeom>
-          <a:noFill/>
-          <a:ln/>
-        </p:spPr>
-        <p:txBody>
-          <a:bodyPr wrap="square" lIns="0" tIns="0" rIns="0" bIns="0" rtlCol="0" anchor="ctr"/>
-          <a:lstStyle/>
-          <a:p>
-            <a:pPr algn="ctr" indent="0" marL="0">
-              <a:buNone/>
-            </a:pPr>
-            <a:r>
-              <a:rPr lang="en-US" b="1" dirty="0">
-                <a:solidFill>
-                  <a:srgbClr val="FFFFFF"/>
-                </a:solidFill>
-                <a:latin typeface="Hiragino Sans GB" pitchFamily="34" charset="0"/>
-                <a:ea typeface="Hiragino Sans GB" pitchFamily="34" charset="-122"/>
-                <a:cs typeface="Hiragino Sans GB" pitchFamily="34" charset="-120"/>
-              </a:rPr>
-              <a:t>2</a:t>
-            </a:r>
-            <a:endParaRPr lang="en-US" dirty="0"/>
-          </a:p>
-        </p:txBody>
-      </p:sp>
-      <p:sp>
-        <p:nvSpPr>
-          <p:cNvPr id="10" name="Text 7"/>
-          <p:cNvSpPr/>
-          <p:nvPr/>
-        </p:nvSpPr>
-        <p:spPr>
-          <a:xfrm>
-            <a:off x="1691640" y="2578608"/>
-            <a:ext cx="9601200" cy="685800"/>
-          </a:xfrm>
-          <a:prstGeom prst="rect">
-            <a:avLst/>
-          </a:prstGeom>
-          <a:noFill/>
-          <a:ln/>
-        </p:spPr>
-        <p:txBody>
-          <a:bodyPr wrap="square" lIns="381" tIns="381" rIns="381" bIns="381" rtlCol="0" anchor="ctr">
+              <a:rPr lang="en-US" sz="1800" dirty="0">
+                <a:solidFill>
+                  <a:srgbClr val="F8FAFC"/>
+                </a:solidFill>
+                <a:latin typeface="Courier New" pitchFamily="34" charset="0"/>
+                <a:ea typeface="Courier New" pitchFamily="34" charset="-122"/>
+                <a:cs typeface="Courier New" pitchFamily="34" charset="-120"/>
+              </a:rPr>
+              <a:t>for(int i=1;i&lt;=n;i++) if(check(i)) ...;</a:t>
+            </a:r>
+            <a:endParaRPr lang="en-US" sz="1800" dirty="0"/>
+          </a:p>
+        </p:txBody>
+      </p:sp>
+      <p:sp>
+        <p:nvSpPr>
+          <p:cNvPr id="6" name="Text 3"/>
+          <p:cNvSpPr/>
+          <p:nvPr/>
+        </p:nvSpPr>
+        <p:spPr>
+          <a:xfrm>
+            <a:off x="7543800" y="1554480"/>
+            <a:ext cx="3931920" cy="3931920"/>
+          </a:xfrm>
+          <a:prstGeom prst="rect">
+            <a:avLst/>
+          </a:prstGeom>
+          <a:noFill/>
+          <a:ln/>
+        </p:spPr>
+        <p:txBody>
+          <a:bodyPr wrap="square" lIns="1016" tIns="1016" rIns="1016" bIns="1016" rtlCol="0" anchor="ctr">
             <a:normAutofit/>
           </a:bodyPr>
           <a:lstStyle/>
@@ -4901,7 +5260,7 @@
               <a:buNone/>
             </a:pPr>
             <a:r>
-              <a:rPr lang="en-US" sz="2200" dirty="0">
+              <a:rPr lang="en-US" sz="2100" dirty="0">
                 <a:solidFill>
                   <a:srgbClr val="172033"/>
                 </a:solidFill>
@@ -4909,104 +5268,22 @@
                 <a:ea typeface="Hiragino Sans GB" pitchFamily="34" charset="-122"/>
                 <a:cs typeface="Hiragino Sans GB" pitchFamily="34" charset="-120"/>
               </a:rPr>
-              <a:t>访问相邻格前必须先判断新行列是否在矩阵范围内。</a:t>
-            </a:r>
-            <a:endParaRPr lang="en-US" sz="2200" dirty="0"/>
-          </a:p>
-        </p:txBody>
-      </p:sp>
-      <p:sp>
-        <p:nvSpPr>
-          <p:cNvPr id="11" name="Shape 8"/>
-          <p:cNvSpPr/>
-          <p:nvPr/>
-        </p:nvSpPr>
-        <p:spPr>
-          <a:xfrm>
-            <a:off x="822960" y="3703320"/>
-            <a:ext cx="594360" cy="594360"/>
-          </a:xfrm>
-          <a:prstGeom prst="ellipse">
-            <a:avLst/>
-          </a:prstGeom>
-          <a:solidFill>
-            <a:srgbClr val="F97316"/>
-          </a:solidFill>
-          <a:ln w="12700">
-            <a:solidFill>
-              <a:srgbClr val="F97316"/>
-            </a:solidFill>
-            <a:prstDash val="solid"/>
-          </a:ln>
-        </p:spPr>
-      </p:sp>
-      <p:sp>
-        <p:nvSpPr>
-          <p:cNvPr id="12" name="Text 9"/>
-          <p:cNvSpPr/>
-          <p:nvPr/>
-        </p:nvSpPr>
-        <p:spPr>
-          <a:xfrm>
-            <a:off x="822960" y="3822192"/>
-            <a:ext cx="594360" cy="228600"/>
-          </a:xfrm>
-          <a:prstGeom prst="rect">
-            <a:avLst/>
-          </a:prstGeom>
-          <a:noFill/>
-          <a:ln/>
-        </p:spPr>
-        <p:txBody>
-          <a:bodyPr wrap="square" lIns="0" tIns="0" rIns="0" bIns="0" rtlCol="0" anchor="ctr"/>
-          <a:lstStyle/>
-          <a:p>
-            <a:pPr algn="ctr" indent="0" marL="0">
-              <a:buNone/>
-            </a:pPr>
-            <a:r>
-              <a:rPr lang="en-US" b="1" dirty="0">
-                <a:solidFill>
-                  <a:srgbClr val="FFFFFF"/>
-                </a:solidFill>
-                <a:latin typeface="Hiragino Sans GB" pitchFamily="34" charset="0"/>
-                <a:ea typeface="Hiragino Sans GB" pitchFamily="34" charset="-122"/>
-                <a:cs typeface="Hiragino Sans GB" pitchFamily="34" charset="-120"/>
-              </a:rPr>
-              <a:t>3</a:t>
-            </a:r>
-            <a:endParaRPr lang="en-US" dirty="0"/>
-          </a:p>
-        </p:txBody>
-      </p:sp>
-      <p:sp>
-        <p:nvSpPr>
-          <p:cNvPr id="13" name="Text 10"/>
-          <p:cNvSpPr/>
-          <p:nvPr/>
-        </p:nvSpPr>
-        <p:spPr>
-          <a:xfrm>
-            <a:off x="1691640" y="3675888"/>
-            <a:ext cx="9601200" cy="685800"/>
-          </a:xfrm>
-          <a:prstGeom prst="rect">
-            <a:avLst/>
-          </a:prstGeom>
-          <a:noFill/>
-          <a:ln/>
-        </p:spPr>
-        <p:txBody>
-          <a:bodyPr wrap="square" lIns="381" tIns="381" rIns="381" bIns="381" rtlCol="0" anchor="ctr">
-            <a:normAutofit/>
-          </a:bodyPr>
-          <a:lstStyle/>
-          <a:p>
-            <a:pPr indent="0" marL="0">
-              <a:buNone/>
-            </a:pPr>
-            <a:r>
-              <a:rPr lang="en-US" sz="2200" dirty="0">
+              <a:t>候选数量有限，可以完整检查</a:t>
+            </a:r>
+            <a:endParaRPr lang="en-US" sz="2100" dirty="0"/>
+          </a:p>
+          <a:p>
+            <a:pPr indent="0" marL="0">
+              <a:buNone/>
+            </a:pPr>
+            <a:endParaRPr lang="en-US" sz="2100" dirty="0"/>
+          </a:p>
+          <a:p>
+            <a:pPr indent="0" marL="0">
+              <a:buNone/>
+            </a:pPr>
+            <a:r>
+              <a:rPr lang="en-US" sz="2100" dirty="0">
                 <a:solidFill>
                   <a:srgbClr val="172033"/>
                 </a:solidFill>
@@ -5014,104 +5291,22 @@
                 <a:ea typeface="Hiragino Sans GB" pitchFamily="34" charset="-122"/>
                 <a:cs typeface="Hiragino Sans GB" pitchFamily="34" charset="-120"/>
               </a:rPr>
-              <a:t>计算较大整数的精确平方时，可以始终放心地用`pow(x,2)`代替`x*x`。</a:t>
-            </a:r>
-            <a:endParaRPr lang="en-US" sz="2200" dirty="0"/>
-          </a:p>
-        </p:txBody>
-      </p:sp>
-      <p:sp>
-        <p:nvSpPr>
-          <p:cNvPr id="14" name="Shape 11"/>
-          <p:cNvSpPr/>
-          <p:nvPr/>
-        </p:nvSpPr>
-        <p:spPr>
-          <a:xfrm>
-            <a:off x="822960" y="4800600"/>
-            <a:ext cx="594360" cy="594360"/>
-          </a:xfrm>
-          <a:prstGeom prst="ellipse">
-            <a:avLst/>
-          </a:prstGeom>
-          <a:solidFill>
-            <a:srgbClr val="0F9F79"/>
-          </a:solidFill>
-          <a:ln w="12700">
-            <a:solidFill>
-              <a:srgbClr val="0F9F79"/>
-            </a:solidFill>
-            <a:prstDash val="solid"/>
-          </a:ln>
-        </p:spPr>
-      </p:sp>
-      <p:sp>
-        <p:nvSpPr>
-          <p:cNvPr id="15" name="Text 12"/>
-          <p:cNvSpPr/>
-          <p:nvPr/>
-        </p:nvSpPr>
-        <p:spPr>
-          <a:xfrm>
-            <a:off x="822960" y="4919472"/>
-            <a:ext cx="594360" cy="228600"/>
-          </a:xfrm>
-          <a:prstGeom prst="rect">
-            <a:avLst/>
-          </a:prstGeom>
-          <a:noFill/>
-          <a:ln/>
-        </p:spPr>
-        <p:txBody>
-          <a:bodyPr wrap="square" lIns="0" tIns="0" rIns="0" bIns="0" rtlCol="0" anchor="ctr"/>
-          <a:lstStyle/>
-          <a:p>
-            <a:pPr algn="ctr" indent="0" marL="0">
-              <a:buNone/>
-            </a:pPr>
-            <a:r>
-              <a:rPr lang="en-US" b="1" dirty="0">
-                <a:solidFill>
-                  <a:srgbClr val="FFFFFF"/>
-                </a:solidFill>
-                <a:latin typeface="Hiragino Sans GB" pitchFamily="34" charset="0"/>
-                <a:ea typeface="Hiragino Sans GB" pitchFamily="34" charset="-122"/>
-                <a:cs typeface="Hiragino Sans GB" pitchFamily="34" charset="-120"/>
-              </a:rPr>
-              <a:t>4</a:t>
-            </a:r>
-            <a:endParaRPr lang="en-US" dirty="0"/>
-          </a:p>
-        </p:txBody>
-      </p:sp>
-      <p:sp>
-        <p:nvSpPr>
-          <p:cNvPr id="16" name="Text 13"/>
-          <p:cNvSpPr/>
-          <p:nvPr/>
-        </p:nvSpPr>
-        <p:spPr>
-          <a:xfrm>
-            <a:off x="1691640" y="4773168"/>
-            <a:ext cx="9601200" cy="685800"/>
-          </a:xfrm>
-          <a:prstGeom prst="rect">
-            <a:avLst/>
-          </a:prstGeom>
-          <a:noFill/>
-          <a:ln/>
-        </p:spPr>
-        <p:txBody>
-          <a:bodyPr wrap="square" lIns="381" tIns="381" rIns="381" bIns="381" rtlCol="0" anchor="ctr">
-            <a:normAutofit/>
-          </a:bodyPr>
-          <a:lstStyle/>
-          <a:p>
-            <a:pPr indent="0" marL="0">
-              <a:buNone/>
-            </a:pPr>
-            <a:r>
-              <a:rPr lang="en-US" sz="2200" dirty="0">
+              <a:t>确定不重不漏的枚举范围</a:t>
+            </a:r>
+            <a:endParaRPr lang="en-US" sz="2100" dirty="0"/>
+          </a:p>
+          <a:p>
+            <a:pPr indent="0" marL="0">
+              <a:buNone/>
+            </a:pPr>
+            <a:endParaRPr lang="en-US" sz="2100" dirty="0"/>
+          </a:p>
+          <a:p>
+            <a:pPr indent="0" marL="0">
+              <a:buNone/>
+            </a:pPr>
+            <a:r>
+              <a:rPr lang="en-US" sz="2100" dirty="0">
                 <a:solidFill>
                   <a:srgbClr val="172033"/>
                 </a:solidFill>
@@ -5119,15 +5314,38 @@
                 <a:ea typeface="Hiragino Sans GB" pitchFamily="34" charset="-122"/>
                 <a:cs typeface="Hiragino Sans GB" pitchFamily="34" charset="-120"/>
               </a:rPr>
-              <a:t>表达式`(double)7/2`的值是（ ）。</a:t>
-            </a:r>
-            <a:endParaRPr lang="en-US" sz="2200" dirty="0"/>
-          </a:p>
-        </p:txBody>
-      </p:sp>
-      <p:sp>
-        <p:nvSpPr>
-          <p:cNvPr id="17" name="Text 14"/>
+              <a:t>为每个候选写正确判定条件</a:t>
+            </a:r>
+            <a:endParaRPr lang="en-US" sz="2100" dirty="0"/>
+          </a:p>
+          <a:p>
+            <a:pPr indent="0" marL="0">
+              <a:buNone/>
+            </a:pPr>
+            <a:endParaRPr lang="en-US" sz="2100" dirty="0"/>
+          </a:p>
+          <a:p>
+            <a:pPr indent="0" marL="0">
+              <a:buNone/>
+            </a:pPr>
+            <a:r>
+              <a:rPr lang="en-US" sz="2100" dirty="0">
+                <a:solidFill>
+                  <a:srgbClr val="172033"/>
+                </a:solidFill>
+                <a:latin typeface="Hiragino Sans GB" pitchFamily="34" charset="0"/>
+                <a:ea typeface="Hiragino Sans GB" pitchFamily="34" charset="-122"/>
+                <a:cs typeface="Hiragino Sans GB" pitchFamily="34" charset="-120"/>
+              </a:rPr>
+              <a:t>通过i&lt;j或i&lt;j&lt;k限制顺序</a:t>
+            </a:r>
+            <a:endParaRPr lang="en-US" sz="2100" dirty="0"/>
+          </a:p>
+        </p:txBody>
+      </p:sp>
+      <p:sp>
+        <p:nvSpPr>
+          <p:cNvPr id="7" name="Text 4"/>
           <p:cNvSpPr/>
           <p:nvPr/>
         </p:nvSpPr>
@@ -5270,7 +5488,7 @@
                 <a:ea typeface="Hiragino Sans GB" pitchFamily="34" charset="-122"/>
                 <a:cs typeface="Hiragino Sans GB" pitchFamily="34" charset="-120"/>
               </a:rPr>
-              <a:t>最终客观题 9—12</a:t>
+              <a:t>模拟法：把题目规则翻译成状态更新</a:t>
             </a:r>
             <a:endParaRPr lang="en-US" sz="2700" dirty="0"/>
           </a:p>
@@ -5338,7 +5556,7 @@
                 <a:ea typeface="Hiragino Sans GB" pitchFamily="34" charset="-122"/>
                 <a:cs typeface="Hiragino Sans GB" pitchFamily="34" charset="-120"/>
               </a:rPr>
-              <a:t>递归函数必须有可达的终止条件，并且每次调用应更接近终止条件。</a:t>
+              <a:t>描述当前局面所需的最少变量</a:t>
             </a:r>
             <a:endParaRPr lang="en-US" sz="2200" dirty="0"/>
           </a:p>
@@ -5361,7 +5579,7 @@
                 <a:ea typeface="Hiragino Sans GB" pitchFamily="34" charset="-122"/>
                 <a:cs typeface="Hiragino Sans GB" pitchFamily="34" charset="-120"/>
               </a:rPr>
-              <a:t>函数声明`int f(int x);`能够告诉编译器什么？</a:t>
+              <a:t>每读入一个操作，发生什么变化</a:t>
             </a:r>
             <a:endParaRPr lang="en-US" sz="2200" dirty="0"/>
           </a:p>
@@ -5384,7 +5602,7 @@
                 <a:ea typeface="Hiragino Sans GB" pitchFamily="34" charset="-122"/>
                 <a:cs typeface="Hiragino Sans GB" pitchFamily="34" charset="-120"/>
               </a:rPr>
-              <a:t>字符数组`char s[]="cat";`的`strlen(s)`是（ ）。</a:t>
+              <a:t>后一步用旧状态还是新状态</a:t>
             </a:r>
             <a:endParaRPr lang="en-US" sz="2200" dirty="0"/>
           </a:p>
@@ -5407,7 +5625,7 @@
                 <a:ea typeface="Hiragino Sans GB" pitchFamily="34" charset="-122"/>
                 <a:cs typeface="Hiragino Sans GB" pitchFamily="34" charset="-120"/>
               </a:rPr>
-              <a:t>判断两个C风格字符串内容是否相等，应使用（ ）。</a:t>
+              <a:t>何时停止，停止前后是否还要输出</a:t>
             </a:r>
             <a:endParaRPr lang="en-US" sz="2200" dirty="0"/>
           </a:p>
@@ -5430,30 +5648,7 @@
                 <a:ea typeface="Hiragino Sans GB" pitchFamily="34" charset="-122"/>
                 <a:cs typeface="Hiragino Sans GB" pitchFamily="34" charset="-120"/>
               </a:rPr>
-              <a:t>T：这是递归能够停止的两个基本条件。</a:t>
-            </a:r>
-            <a:endParaRPr lang="en-US" sz="2200" dirty="0"/>
-          </a:p>
-          <a:p>
-            <a:pPr indent="0" marL="0">
-              <a:buNone/>
-            </a:pPr>
-            <a:endParaRPr lang="en-US" sz="2200" dirty="0"/>
-          </a:p>
-          <a:p>
-            <a:pPr indent="0" marL="0">
-              <a:buNone/>
-            </a:pPr>
-            <a:r>
-              <a:rPr lang="en-US" sz="2200" dirty="0">
-                <a:solidFill>
-                  <a:srgbClr val="172033"/>
-                </a:solidFill>
-                <a:latin typeface="Hiragino Sans GB" pitchFamily="34" charset="0"/>
-                <a:ea typeface="Hiragino Sans GB" pitchFamily="34" charset="-122"/>
-                <a:cs typeface="Hiragino Sans GB" pitchFamily="34" charset="-120"/>
-              </a:rPr>
-              <a:t>A：声明提供函数签名，使调用处能够通过编译。</a:t>
+              <a:t>建议先画状态表：步骤、输入、旧状态、新状态、输出。</a:t>
             </a:r>
             <a:endParaRPr lang="en-US" sz="2200" dirty="0"/>
           </a:p>
@@ -5604,7 +5799,7 @@
                 <a:ea typeface="Hiragino Sans GB" pitchFamily="34" charset="-122"/>
                 <a:cs typeface="Hiragino Sans GB" pitchFamily="34" charset="-120"/>
               </a:rPr>
-              <a:t>最终6道编程题：按弱项分层清库</a:t>
+              <a:t>字符串扫描：一次循环维护多个计数</a:t>
             </a:r>
             <a:endParaRPr lang="en-US" sz="2700" dirty="0"/>
           </a:p>
@@ -5612,50 +5807,25 @@
       </p:sp>
       <p:sp>
         <p:nvSpPr>
-          <p:cNvPr id="5" name="Shape 2"/>
-          <p:cNvSpPr/>
-          <p:nvPr/>
-        </p:nvSpPr>
-        <p:spPr>
-          <a:xfrm>
-            <a:off x="658368" y="1508760"/>
-            <a:ext cx="5257800" cy="4297680"/>
-          </a:xfrm>
-          <a:prstGeom prst="roundRect">
-            <a:avLst>
-              <a:gd name="adj" fmla="val 1702"/>
-            </a:avLst>
+          <p:cNvPr id="5" name="Text 2"/>
+          <p:cNvSpPr/>
+          <p:nvPr/>
+        </p:nvSpPr>
+        <p:spPr>
+          <a:xfrm>
+            <a:off x="658368" y="1417320"/>
+            <a:ext cx="6583680" cy="4480560"/>
+          </a:xfrm>
+          <a:prstGeom prst="rect">
+            <a:avLst/>
           </a:prstGeom>
           <a:solidFill>
-            <a:srgbClr val="FFFFFF"/>
+            <a:srgbClr val="111827"/>
           </a:solidFill>
-          <a:ln w="12700">
-            <a:solidFill>
-              <a:srgbClr val="D8DEE9"/>
-            </a:solidFill>
-            <a:prstDash val="solid"/>
-          </a:ln>
-        </p:spPr>
-      </p:sp>
-      <p:sp>
-        <p:nvSpPr>
-          <p:cNvPr id="6" name="Text 3"/>
-          <p:cNvSpPr/>
-          <p:nvPr/>
-        </p:nvSpPr>
-        <p:spPr>
-          <a:xfrm>
-            <a:off x="978408" y="1828800"/>
-            <a:ext cx="4617720" cy="3657600"/>
-          </a:xfrm>
-          <a:prstGeom prst="rect">
-            <a:avLst/>
-          </a:prstGeom>
-          <a:noFill/>
-          <a:ln/>
-        </p:spPr>
-        <p:txBody>
-          <a:bodyPr wrap="square" lIns="508" tIns="508" rIns="508" bIns="508" rtlCol="0" anchor="ctr">
+          <a:ln/>
+        </p:spPr>
+        <p:txBody>
+          <a:bodyPr wrap="square" lIns="3556" tIns="3556" rIns="3556" bIns="3556" rtlCol="0" anchor="ctr">
             <a:normAutofit/>
           </a:bodyPr>
           <a:lstStyle/>
@@ -5664,66 +5834,124 @@
               <a:buNone/>
             </a:pPr>
             <a:r>
-              <a:rPr lang="en-US" sz="2200" dirty="0">
-                <a:solidFill>
-                  <a:srgbClr val="172033"/>
-                </a:solidFill>
-                <a:latin typeface="Hiragino Sans GB" pitchFamily="34" charset="0"/>
-                <a:ea typeface="Hiragino Sans GB" pitchFamily="34" charset="-122"/>
-                <a:cs typeface="Hiragino Sans GB" pitchFamily="34" charset="-120"/>
-              </a:rPr>
-              <a:t>每题完整题面和评测都从 Learn 跳转进入。</a:t>
-            </a:r>
-            <a:endParaRPr lang="en-US" sz="2200" dirty="0"/>
-          </a:p>
-        </p:txBody>
-      </p:sp>
-      <p:sp>
-        <p:nvSpPr>
-          <p:cNvPr id="7" name="Shape 4"/>
-          <p:cNvSpPr/>
-          <p:nvPr/>
-        </p:nvSpPr>
-        <p:spPr>
-          <a:xfrm>
-            <a:off x="6263640" y="1508760"/>
-            <a:ext cx="5257800" cy="4297680"/>
-          </a:xfrm>
-          <a:prstGeom prst="roundRect">
-            <a:avLst>
-              <a:gd name="adj" fmla="val 1702"/>
-            </a:avLst>
-          </a:prstGeom>
-          <a:solidFill>
-            <a:srgbClr val="FFFFFF"/>
-          </a:solidFill>
-          <a:ln w="12700">
-            <a:solidFill>
-              <a:srgbClr val="D8DEE9"/>
-            </a:solidFill>
-            <a:prstDash val="solid"/>
-          </a:ln>
-        </p:spPr>
-      </p:sp>
-      <p:sp>
-        <p:nvSpPr>
-          <p:cNvPr id="8" name="Text 5"/>
-          <p:cNvSpPr/>
-          <p:nvPr/>
-        </p:nvSpPr>
-        <p:spPr>
-          <a:xfrm>
-            <a:off x="6583680" y="1828800"/>
-            <a:ext cx="4617720" cy="3657600"/>
-          </a:xfrm>
-          <a:prstGeom prst="rect">
-            <a:avLst/>
-          </a:prstGeom>
-          <a:noFill/>
-          <a:ln/>
-        </p:spPr>
-        <p:txBody>
-          <a:bodyPr wrap="square" lIns="508" tIns="508" rIns="508" bIns="508" rtlCol="0" anchor="ctr">
+              <a:rPr lang="en-US" sz="1800" dirty="0">
+                <a:solidFill>
+                  <a:srgbClr val="F8FAFC"/>
+                </a:solidFill>
+                <a:latin typeface="Courier New" pitchFamily="34" charset="0"/>
+                <a:ea typeface="Courier New" pitchFamily="34" charset="-122"/>
+                <a:cs typeface="Courier New" pitchFamily="34" charset="-120"/>
+              </a:rPr>
+              <a:t>for (int i=0; s[i]!='\0'; ++i) {</a:t>
+            </a:r>
+            <a:endParaRPr lang="en-US" sz="1800" dirty="0"/>
+          </a:p>
+          <a:p>
+            <a:pPr indent="0" marL="0">
+              <a:buNone/>
+            </a:pPr>
+            <a:r>
+              <a:rPr lang="en-US" sz="1800" dirty="0">
+                <a:solidFill>
+                  <a:srgbClr val="F8FAFC"/>
+                </a:solidFill>
+                <a:latin typeface="Courier New" pitchFamily="34" charset="0"/>
+                <a:ea typeface="Courier New" pitchFamily="34" charset="-122"/>
+                <a:cs typeface="Courier New" pitchFamily="34" charset="-120"/>
+              </a:rPr>
+              <a:t>  char ch=s[i];</a:t>
+            </a:r>
+            <a:endParaRPr lang="en-US" sz="1800" dirty="0"/>
+          </a:p>
+          <a:p>
+            <a:pPr indent="0" marL="0">
+              <a:buNone/>
+            </a:pPr>
+            <a:r>
+              <a:rPr lang="en-US" sz="1800" dirty="0">
+                <a:solidFill>
+                  <a:srgbClr val="F8FAFC"/>
+                </a:solidFill>
+                <a:latin typeface="Courier New" pitchFamily="34" charset="0"/>
+                <a:ea typeface="Courier New" pitchFamily="34" charset="-122"/>
+                <a:cs typeface="Courier New" pitchFamily="34" charset="-120"/>
+              </a:rPr>
+              <a:t>  if (isdigit((unsigned char)ch)) digit++;</a:t>
+            </a:r>
+            <a:endParaRPr lang="en-US" sz="1800" dirty="0"/>
+          </a:p>
+          <a:p>
+            <a:pPr indent="0" marL="0">
+              <a:buNone/>
+            </a:pPr>
+            <a:r>
+              <a:rPr lang="en-US" sz="1800" dirty="0">
+                <a:solidFill>
+                  <a:srgbClr val="F8FAFC"/>
+                </a:solidFill>
+                <a:latin typeface="Courier New" pitchFamily="34" charset="0"/>
+                <a:ea typeface="Courier New" pitchFamily="34" charset="-122"/>
+                <a:cs typeface="Courier New" pitchFamily="34" charset="-120"/>
+              </a:rPr>
+              <a:t>  else if (isupper((unsigned char)ch)) upper++;</a:t>
+            </a:r>
+            <a:endParaRPr lang="en-US" sz="1800" dirty="0"/>
+          </a:p>
+          <a:p>
+            <a:pPr indent="0" marL="0">
+              <a:buNone/>
+            </a:pPr>
+            <a:r>
+              <a:rPr lang="en-US" sz="1800" dirty="0">
+                <a:solidFill>
+                  <a:srgbClr val="F8FAFC"/>
+                </a:solidFill>
+                <a:latin typeface="Courier New" pitchFamily="34" charset="0"/>
+                <a:ea typeface="Courier New" pitchFamily="34" charset="-122"/>
+                <a:cs typeface="Courier New" pitchFamily="34" charset="-120"/>
+              </a:rPr>
+              <a:t>  else if (islower((unsigned char)ch)) lower++;</a:t>
+            </a:r>
+            <a:endParaRPr lang="en-US" sz="1800" dirty="0"/>
+          </a:p>
+          <a:p>
+            <a:pPr indent="0" marL="0">
+              <a:buNone/>
+            </a:pPr>
+            <a:r>
+              <a:rPr lang="en-US" sz="1800" dirty="0">
+                <a:solidFill>
+                  <a:srgbClr val="F8FAFC"/>
+                </a:solidFill>
+                <a:latin typeface="Courier New" pitchFamily="34" charset="0"/>
+                <a:ea typeface="Courier New" pitchFamily="34" charset="-122"/>
+                <a:cs typeface="Courier New" pitchFamily="34" charset="-120"/>
+              </a:rPr>
+              <a:t>}</a:t>
+            </a:r>
+            <a:endParaRPr lang="en-US" sz="1800" dirty="0"/>
+          </a:p>
+        </p:txBody>
+      </p:sp>
+      <p:sp>
+        <p:nvSpPr>
+          <p:cNvPr id="6" name="Text 3"/>
+          <p:cNvSpPr/>
+          <p:nvPr/>
+        </p:nvSpPr>
+        <p:spPr>
+          <a:xfrm>
+            <a:off x="7543800" y="1554480"/>
+            <a:ext cx="3931920" cy="3931920"/>
+          </a:xfrm>
+          <a:prstGeom prst="rect">
+            <a:avLst/>
+          </a:prstGeom>
+          <a:noFill/>
+          <a:ln/>
+        </p:spPr>
+        <p:txBody>
+          <a:bodyPr wrap="square" lIns="1016" tIns="1016" rIns="1016" bIns="1016" rtlCol="0" anchor="ctr">
             <a:normAutofit/>
           </a:bodyPr>
           <a:lstStyle/>
@@ -5731,13 +5959,24 @@
             <a:pPr indent="0" marL="0">
               <a:buNone/>
             </a:pPr>
-            <a:endParaRPr lang="en-US" sz="2200" dirty="0"/>
-          </a:p>
-        </p:txBody>
-      </p:sp>
-      <p:sp>
-        <p:nvSpPr>
-          <p:cNvPr id="9" name="Text 6"/>
+            <a:r>
+              <a:rPr lang="en-US" sz="2100" dirty="0">
+                <a:solidFill>
+                  <a:srgbClr val="172033"/>
+                </a:solidFill>
+                <a:latin typeface="Hiragino Sans GB" pitchFamily="34" charset="0"/>
+                <a:ea typeface="Hiragino Sans GB" pitchFamily="34" charset="-122"/>
+                <a:cs typeface="Hiragino Sans GB" pitchFamily="34" charset="-120"/>
+              </a:rPr>
+              <a:t>分类条件通常互斥时使用if—else if，避免同一字符被重复统计。</a:t>
+            </a:r>
+            <a:endParaRPr lang="en-US" sz="2100" dirty="0"/>
+          </a:p>
+        </p:txBody>
+      </p:sp>
+      <p:sp>
+        <p:nvSpPr>
+          <p:cNvPr id="7" name="Text 4"/>
           <p:cNvSpPr/>
           <p:nvPr/>
         </p:nvSpPr>
@@ -5880,7 +6119,7 @@
                 <a:ea typeface="Hiragino Sans GB" pitchFamily="34" charset="-122"/>
                 <a:cs typeface="Hiragino Sans GB" pitchFamily="34" charset="-120"/>
               </a:rPr>
-              <a:t>最终编程题 1</a:t>
+              <a:t>输入输出：空格也属于数据</a:t>
             </a:r>
             <a:endParaRPr lang="en-US" sz="2700" dirty="0"/>
           </a:p>
@@ -5985,7 +6224,7 @@
                 <a:ea typeface="Hiragino Sans GB" pitchFamily="34" charset="-122"/>
                 <a:cs typeface="Hiragino Sans GB" pitchFamily="34" charset="-120"/>
               </a:rPr>
-              <a:t>函数与数位分解。完整题面与评测请在Learn打开。</a:t>
+              <a:t>读取到空白字符前停止</a:t>
             </a:r>
             <a:endParaRPr lang="en-US" sz="2200" dirty="0"/>
           </a:p>
@@ -5993,7 +6232,322 @@
       </p:sp>
       <p:sp>
         <p:nvSpPr>
-          <p:cNvPr id="8" name="Text 5"/>
+          <p:cNvPr id="8" name="Shape 5"/>
+          <p:cNvSpPr/>
+          <p:nvPr/>
+        </p:nvSpPr>
+        <p:spPr>
+          <a:xfrm>
+            <a:off x="822960" y="2606040"/>
+            <a:ext cx="594360" cy="594360"/>
+          </a:xfrm>
+          <a:prstGeom prst="ellipse">
+            <a:avLst/>
+          </a:prstGeom>
+          <a:solidFill>
+            <a:srgbClr val="F97316"/>
+          </a:solidFill>
+          <a:ln w="12700">
+            <a:solidFill>
+              <a:srgbClr val="F97316"/>
+            </a:solidFill>
+            <a:prstDash val="solid"/>
+          </a:ln>
+        </p:spPr>
+      </p:sp>
+      <p:sp>
+        <p:nvSpPr>
+          <p:cNvPr id="9" name="Text 6"/>
+          <p:cNvSpPr/>
+          <p:nvPr/>
+        </p:nvSpPr>
+        <p:spPr>
+          <a:xfrm>
+            <a:off x="822960" y="2724912"/>
+            <a:ext cx="594360" cy="228600"/>
+          </a:xfrm>
+          <a:prstGeom prst="rect">
+            <a:avLst/>
+          </a:prstGeom>
+          <a:noFill/>
+          <a:ln/>
+        </p:spPr>
+        <p:txBody>
+          <a:bodyPr wrap="square" lIns="0" tIns="0" rIns="0" bIns="0" rtlCol="0" anchor="ctr"/>
+          <a:lstStyle/>
+          <a:p>
+            <a:pPr algn="ctr" indent="0" marL="0">
+              <a:buNone/>
+            </a:pPr>
+            <a:r>
+              <a:rPr lang="en-US" b="1" dirty="0">
+                <a:solidFill>
+                  <a:srgbClr val="FFFFFF"/>
+                </a:solidFill>
+                <a:latin typeface="Hiragino Sans GB" pitchFamily="34" charset="0"/>
+                <a:ea typeface="Hiragino Sans GB" pitchFamily="34" charset="-122"/>
+                <a:cs typeface="Hiragino Sans GB" pitchFamily="34" charset="-120"/>
+              </a:rPr>
+              <a:t>2</a:t>
+            </a:r>
+            <a:endParaRPr lang="en-US" dirty="0"/>
+          </a:p>
+        </p:txBody>
+      </p:sp>
+      <p:sp>
+        <p:nvSpPr>
+          <p:cNvPr id="10" name="Text 7"/>
+          <p:cNvSpPr/>
+          <p:nvPr/>
+        </p:nvSpPr>
+        <p:spPr>
+          <a:xfrm>
+            <a:off x="1691640" y="2578608"/>
+            <a:ext cx="9601200" cy="685800"/>
+          </a:xfrm>
+          <a:prstGeom prst="rect">
+            <a:avLst/>
+          </a:prstGeom>
+          <a:noFill/>
+          <a:ln/>
+        </p:spPr>
+        <p:txBody>
+          <a:bodyPr wrap="square" lIns="381" tIns="381" rIns="381" bIns="381" rtlCol="0" anchor="ctr">
+            <a:normAutofit/>
+          </a:bodyPr>
+          <a:lstStyle/>
+          <a:p>
+            <a:pPr indent="0" marL="0">
+              <a:buNone/>
+            </a:pPr>
+            <a:r>
+              <a:rPr lang="en-US" sz="2200" dirty="0">
+                <a:solidFill>
+                  <a:srgbClr val="172033"/>
+                </a:solidFill>
+                <a:latin typeface="Hiragino Sans GB" pitchFamily="34" charset="0"/>
+                <a:ea typeface="Hiragino Sans GB" pitchFamily="34" charset="-122"/>
+                <a:cs typeface="Hiragino Sans GB" pitchFamily="34" charset="-120"/>
+              </a:rPr>
+              <a:t>读取一整行，可包含空格</a:t>
+            </a:r>
+            <a:endParaRPr lang="en-US" sz="2200" dirty="0"/>
+          </a:p>
+        </p:txBody>
+      </p:sp>
+      <p:sp>
+        <p:nvSpPr>
+          <p:cNvPr id="11" name="Shape 8"/>
+          <p:cNvSpPr/>
+          <p:nvPr/>
+        </p:nvSpPr>
+        <p:spPr>
+          <a:xfrm>
+            <a:off x="822960" y="3703320"/>
+            <a:ext cx="594360" cy="594360"/>
+          </a:xfrm>
+          <a:prstGeom prst="ellipse">
+            <a:avLst/>
+          </a:prstGeom>
+          <a:solidFill>
+            <a:srgbClr val="F97316"/>
+          </a:solidFill>
+          <a:ln w="12700">
+            <a:solidFill>
+              <a:srgbClr val="F97316"/>
+            </a:solidFill>
+            <a:prstDash val="solid"/>
+          </a:ln>
+        </p:spPr>
+      </p:sp>
+      <p:sp>
+        <p:nvSpPr>
+          <p:cNvPr id="12" name="Text 9"/>
+          <p:cNvSpPr/>
+          <p:nvPr/>
+        </p:nvSpPr>
+        <p:spPr>
+          <a:xfrm>
+            <a:off x="822960" y="3822192"/>
+            <a:ext cx="594360" cy="228600"/>
+          </a:xfrm>
+          <a:prstGeom prst="rect">
+            <a:avLst/>
+          </a:prstGeom>
+          <a:noFill/>
+          <a:ln/>
+        </p:spPr>
+        <p:txBody>
+          <a:bodyPr wrap="square" lIns="0" tIns="0" rIns="0" bIns="0" rtlCol="0" anchor="ctr"/>
+          <a:lstStyle/>
+          <a:p>
+            <a:pPr algn="ctr" indent="0" marL="0">
+              <a:buNone/>
+            </a:pPr>
+            <a:r>
+              <a:rPr lang="en-US" b="1" dirty="0">
+                <a:solidFill>
+                  <a:srgbClr val="FFFFFF"/>
+                </a:solidFill>
+                <a:latin typeface="Hiragino Sans GB" pitchFamily="34" charset="0"/>
+                <a:ea typeface="Hiragino Sans GB" pitchFamily="34" charset="-122"/>
+                <a:cs typeface="Hiragino Sans GB" pitchFamily="34" charset="-120"/>
+              </a:rPr>
+              <a:t>3</a:t>
+            </a:r>
+            <a:endParaRPr lang="en-US" dirty="0"/>
+          </a:p>
+        </p:txBody>
+      </p:sp>
+      <p:sp>
+        <p:nvSpPr>
+          <p:cNvPr id="13" name="Text 10"/>
+          <p:cNvSpPr/>
+          <p:nvPr/>
+        </p:nvSpPr>
+        <p:spPr>
+          <a:xfrm>
+            <a:off x="1691640" y="3675888"/>
+            <a:ext cx="9601200" cy="685800"/>
+          </a:xfrm>
+          <a:prstGeom prst="rect">
+            <a:avLst/>
+          </a:prstGeom>
+          <a:noFill/>
+          <a:ln/>
+        </p:spPr>
+        <p:txBody>
+          <a:bodyPr wrap="square" lIns="381" tIns="381" rIns="381" bIns="381" rtlCol="0" anchor="ctr">
+            <a:normAutofit/>
+          </a:bodyPr>
+          <a:lstStyle/>
+          <a:p>
+            <a:pPr indent="0" marL="0">
+              <a:buNone/>
+            </a:pPr>
+            <a:r>
+              <a:rPr lang="en-US" sz="2200" dirty="0">
+                <a:solidFill>
+                  <a:srgbClr val="172033"/>
+                </a:solidFill>
+                <a:latin typeface="Hiragino Sans GB" pitchFamily="34" charset="0"/>
+                <a:ea typeface="Hiragino Sans GB" pitchFamily="34" charset="-122"/>
+                <a:cs typeface="Hiragino Sans GB" pitchFamily="34" charset="-120"/>
+              </a:rPr>
+              <a:t>混用cin和getline时先处理输入缓冲区</a:t>
+            </a:r>
+            <a:endParaRPr lang="en-US" sz="2200" dirty="0"/>
+          </a:p>
+        </p:txBody>
+      </p:sp>
+      <p:sp>
+        <p:nvSpPr>
+          <p:cNvPr id="14" name="Shape 11"/>
+          <p:cNvSpPr/>
+          <p:nvPr/>
+        </p:nvSpPr>
+        <p:spPr>
+          <a:xfrm>
+            <a:off x="822960" y="4800600"/>
+            <a:ext cx="594360" cy="594360"/>
+          </a:xfrm>
+          <a:prstGeom prst="ellipse">
+            <a:avLst/>
+          </a:prstGeom>
+          <a:solidFill>
+            <a:srgbClr val="0F9F79"/>
+          </a:solidFill>
+          <a:ln w="12700">
+            <a:solidFill>
+              <a:srgbClr val="0F9F79"/>
+            </a:solidFill>
+            <a:prstDash val="solid"/>
+          </a:ln>
+        </p:spPr>
+      </p:sp>
+      <p:sp>
+        <p:nvSpPr>
+          <p:cNvPr id="15" name="Text 12"/>
+          <p:cNvSpPr/>
+          <p:nvPr/>
+        </p:nvSpPr>
+        <p:spPr>
+          <a:xfrm>
+            <a:off x="822960" y="4919472"/>
+            <a:ext cx="594360" cy="228600"/>
+          </a:xfrm>
+          <a:prstGeom prst="rect">
+            <a:avLst/>
+          </a:prstGeom>
+          <a:noFill/>
+          <a:ln/>
+        </p:spPr>
+        <p:txBody>
+          <a:bodyPr wrap="square" lIns="0" tIns="0" rIns="0" bIns="0" rtlCol="0" anchor="ctr"/>
+          <a:lstStyle/>
+          <a:p>
+            <a:pPr algn="ctr" indent="0" marL="0">
+              <a:buNone/>
+            </a:pPr>
+            <a:r>
+              <a:rPr lang="en-US" b="1" dirty="0">
+                <a:solidFill>
+                  <a:srgbClr val="FFFFFF"/>
+                </a:solidFill>
+                <a:latin typeface="Hiragino Sans GB" pitchFamily="34" charset="0"/>
+                <a:ea typeface="Hiragino Sans GB" pitchFamily="34" charset="-122"/>
+                <a:cs typeface="Hiragino Sans GB" pitchFamily="34" charset="-120"/>
+              </a:rPr>
+              <a:t>4</a:t>
+            </a:r>
+            <a:endParaRPr lang="en-US" dirty="0"/>
+          </a:p>
+        </p:txBody>
+      </p:sp>
+      <p:sp>
+        <p:nvSpPr>
+          <p:cNvPr id="16" name="Text 13"/>
+          <p:cNvSpPr/>
+          <p:nvPr/>
+        </p:nvSpPr>
+        <p:spPr>
+          <a:xfrm>
+            <a:off x="1691640" y="4773168"/>
+            <a:ext cx="9601200" cy="685800"/>
+          </a:xfrm>
+          <a:prstGeom prst="rect">
+            <a:avLst/>
+          </a:prstGeom>
+          <a:noFill/>
+          <a:ln/>
+        </p:spPr>
+        <p:txBody>
+          <a:bodyPr wrap="square" lIns="381" tIns="381" rIns="381" bIns="381" rtlCol="0" anchor="ctr">
+            <a:normAutofit/>
+          </a:bodyPr>
+          <a:lstStyle/>
+          <a:p>
+            <a:pPr indent="0" marL="0">
+              <a:buNone/>
+            </a:pPr>
+            <a:r>
+              <a:rPr lang="en-US" sz="2200" dirty="0">
+                <a:solidFill>
+                  <a:srgbClr val="172033"/>
+                </a:solidFill>
+                <a:latin typeface="Hiragino Sans GB" pitchFamily="34" charset="0"/>
+                <a:ea typeface="Hiragino Sans GB" pitchFamily="34" charset="-122"/>
+                <a:cs typeface="Hiragino Sans GB" pitchFamily="34" charset="-120"/>
+              </a:rPr>
+              <a:t>空格、换行、顺序都属于答案</a:t>
+            </a:r>
+            <a:endParaRPr lang="en-US" sz="2200" dirty="0"/>
+          </a:p>
+        </p:txBody>
+      </p:sp>
+      <p:sp>
+        <p:nvSpPr>
+          <p:cNvPr id="17" name="Text 14"/>
           <p:cNvSpPr/>
           <p:nvPr/>
         </p:nvSpPr>
@@ -6136,7 +6690,7 @@
                 <a:ea typeface="Hiragino Sans GB" pitchFamily="34" charset="-122"/>
                 <a:cs typeface="Hiragino Sans GB" pitchFamily="34" charset="-120"/>
               </a:rPr>
-              <a:t>最终编程题 2</a:t>
+              <a:t>整数类型、除法和溢出</a:t>
             </a:r>
             <a:endParaRPr lang="en-US" sz="2700" dirty="0"/>
           </a:p>
@@ -6144,50 +6698,25 @@
       </p:sp>
       <p:sp>
         <p:nvSpPr>
-          <p:cNvPr id="5" name="Shape 2"/>
-          <p:cNvSpPr/>
-          <p:nvPr/>
-        </p:nvSpPr>
-        <p:spPr>
-          <a:xfrm>
-            <a:off x="777240" y="1645920"/>
-            <a:ext cx="10607040" cy="4114800"/>
-          </a:xfrm>
-          <a:prstGeom prst="roundRect">
-            <a:avLst>
-              <a:gd name="adj" fmla="val 1778"/>
-            </a:avLst>
+          <p:cNvPr id="5" name="Text 2"/>
+          <p:cNvSpPr/>
+          <p:nvPr/>
+        </p:nvSpPr>
+        <p:spPr>
+          <a:xfrm>
+            <a:off x="658368" y="1417320"/>
+            <a:ext cx="6583680" cy="4480560"/>
+          </a:xfrm>
+          <a:prstGeom prst="rect">
+            <a:avLst/>
           </a:prstGeom>
           <a:solidFill>
-            <a:srgbClr val="FFFFFF"/>
+            <a:srgbClr val="111827"/>
           </a:solidFill>
-          <a:ln w="12700">
-            <a:solidFill>
-              <a:srgbClr val="D8DEE9"/>
-            </a:solidFill>
-            <a:prstDash val="solid"/>
-          </a:ln>
-        </p:spPr>
-      </p:sp>
-      <p:sp>
-        <p:nvSpPr>
-          <p:cNvPr id="6" name="Text 3"/>
-          <p:cNvSpPr/>
-          <p:nvPr/>
-        </p:nvSpPr>
-        <p:spPr>
-          <a:xfrm>
-            <a:off x="1097280" y="1965960"/>
-            <a:ext cx="9966960" cy="3474720"/>
-          </a:xfrm>
-          <a:prstGeom prst="rect">
-            <a:avLst/>
-          </a:prstGeom>
-          <a:noFill/>
-          <a:ln/>
-        </p:spPr>
-        <p:txBody>
-          <a:bodyPr wrap="square" lIns="508" tIns="508" rIns="508" bIns="508" rtlCol="0" anchor="ctr">
+          <a:ln/>
+        </p:spPr>
+        <p:txBody>
+          <a:bodyPr wrap="square" lIns="3556" tIns="3556" rIns="3556" bIns="3556" rtlCol="0" anchor="ctr">
             <a:normAutofit/>
           </a:bodyPr>
           <a:lstStyle/>
@@ -6196,7 +6725,82 @@
               <a:buNone/>
             </a:pPr>
             <a:r>
-              <a:rPr lang="en-US" sz="2200" dirty="0">
+              <a:rPr lang="en-US" sz="1800" dirty="0">
+                <a:solidFill>
+                  <a:srgbClr val="F8FAFC"/>
+                </a:solidFill>
+                <a:latin typeface="Courier New" pitchFamily="34" charset="0"/>
+                <a:ea typeface="Courier New" pitchFamily="34" charset="-122"/>
+                <a:cs typeface="Courier New" pitchFamily="34" charset="-120"/>
+              </a:rPr>
+              <a:t>5 / 2          // 2，整数除法</a:t>
+            </a:r>
+            <a:endParaRPr lang="en-US" sz="1800" dirty="0"/>
+          </a:p>
+          <a:p>
+            <a:pPr indent="0" marL="0">
+              <a:buNone/>
+            </a:pPr>
+            <a:r>
+              <a:rPr lang="en-US" sz="1800" dirty="0">
+                <a:solidFill>
+                  <a:srgbClr val="F8FAFC"/>
+                </a:solidFill>
+                <a:latin typeface="Courier New" pitchFamily="34" charset="0"/>
+                <a:ea typeface="Courier New" pitchFamily="34" charset="-122"/>
+                <a:cs typeface="Courier New" pitchFamily="34" charset="-120"/>
+              </a:rPr>
+              <a:t>(double)5 / 2  // 2.5，浮点除法</a:t>
+            </a:r>
+            <a:endParaRPr lang="en-US" sz="1800" dirty="0"/>
+          </a:p>
+          <a:p>
+            <a:pPr indent="0" marL="0">
+              <a:buNone/>
+            </a:pPr>
+            <a:r>
+              <a:rPr lang="en-US" sz="1800" dirty="0">
+                <a:solidFill>
+                  <a:srgbClr val="F8FAFC"/>
+                </a:solidFill>
+                <a:latin typeface="Courier New" pitchFamily="34" charset="0"/>
+                <a:ea typeface="Courier New" pitchFamily="34" charset="-122"/>
+                <a:cs typeface="Courier New" pitchFamily="34" charset="-120"/>
+              </a:rPr>
+              <a:t>1LL * a * b    // 先提升为long long再乘</a:t>
+            </a:r>
+            <a:endParaRPr lang="en-US" sz="1800" dirty="0"/>
+          </a:p>
+        </p:txBody>
+      </p:sp>
+      <p:sp>
+        <p:nvSpPr>
+          <p:cNvPr id="6" name="Text 3"/>
+          <p:cNvSpPr/>
+          <p:nvPr/>
+        </p:nvSpPr>
+        <p:spPr>
+          <a:xfrm>
+            <a:off x="7543800" y="1554480"/>
+            <a:ext cx="3931920" cy="3931920"/>
+          </a:xfrm>
+          <a:prstGeom prst="rect">
+            <a:avLst/>
+          </a:prstGeom>
+          <a:noFill/>
+          <a:ln/>
+        </p:spPr>
+        <p:txBody>
+          <a:bodyPr wrap="square" lIns="1016" tIns="1016" rIns="1016" bIns="1016" rtlCol="0" anchor="ctr">
+            <a:normAutofit/>
+          </a:bodyPr>
+          <a:lstStyle/>
+          <a:p>
+            <a:pPr indent="0" marL="0">
+              <a:buNone/>
+            </a:pPr>
+            <a:r>
+              <a:rPr lang="en-US" sz="2100" dirty="0">
                 <a:solidFill>
                   <a:srgbClr val="172033"/>
                 </a:solidFill>
@@ -6204,9 +6808,9 @@
                 <a:ea typeface="Hiragino Sans GB" pitchFamily="34" charset="-122"/>
                 <a:cs typeface="Hiragino Sans GB" pitchFamily="34" charset="-120"/>
               </a:rPr>
-              <a:t>递归终止与状态关系。完整题面与评测请在Learn打开。</a:t>
-            </a:r>
-            <a:endParaRPr lang="en-US" sz="2200" dirty="0"/>
+              <a:t>看到乘法、累加、平方和时先估算最大值；需要时使用long long。</a:t>
+            </a:r>
+            <a:endParaRPr lang="en-US" sz="2100" dirty="0"/>
           </a:p>
         </p:txBody>
       </p:sp>
@@ -6355,7 +6959,7 @@
                 <a:ea typeface="Hiragino Sans GB" pitchFamily="34" charset="-122"/>
                 <a:cs typeface="Hiragino Sans GB" pitchFamily="34" charset="-120"/>
               </a:rPr>
-              <a:t>第13课完成标准</a:t>
+              <a:t>这不是提纲课：每个知识点要写清四件事</a:t>
             </a:r>
             <a:endParaRPr lang="en-US" sz="2700" dirty="0"/>
           </a:p>
@@ -6423,7 +7027,7 @@
                 <a:ea typeface="Hiragino Sans GB" pitchFamily="34" charset="-122"/>
                 <a:cs typeface="Hiragino Sans GB" pitchFamily="34" charset="-120"/>
               </a:rPr>
-              <a:t>能口述三级考点地图</a:t>
+              <a:t>它是什么、解决什么问题</a:t>
             </a:r>
             <a:endParaRPr lang="en-US" sz="2200" dirty="0"/>
           </a:p>
@@ -6446,7 +7050,7 @@
                 <a:ea typeface="Hiragino Sans GB" pitchFamily="34" charset="-122"/>
                 <a:cs typeface="Hiragino Sans GB" pitchFamily="34" charset="-120"/>
               </a:rPr>
-              <a:t>12题限时完成并订正</a:t>
+              <a:t>标准写法与参数含义</a:t>
             </a:r>
             <a:endParaRPr lang="en-US" sz="2200" dirty="0"/>
           </a:p>
@@ -6514,7 +7118,7 @@
                 <a:ea typeface="Hiragino Sans GB" pitchFamily="34" charset="-122"/>
                 <a:cs typeface="Hiragino Sans GB" pitchFamily="34" charset="-120"/>
               </a:rPr>
-              <a:t>6题按个人弱项分层完成</a:t>
+              <a:t>变量怎样变化、结果怎样得到</a:t>
             </a:r>
             <a:endParaRPr lang="en-US" sz="2200" dirty="0"/>
           </a:p>
@@ -6537,7 +7141,7 @@
                 <a:ea typeface="Hiragino Sans GB" pitchFamily="34" charset="-122"/>
                 <a:cs typeface="Hiragino Sans GB" pitchFamily="34" charset="-120"/>
               </a:rPr>
-              <a:t>形成自己的检查清单</a:t>
+              <a:t>边界、类型、返回和格式</a:t>
             </a:r>
             <a:endParaRPr lang="en-US" sz="2200" dirty="0"/>
           </a:p>
@@ -6688,7 +7292,7 @@
                 <a:ea typeface="Hiragino Sans GB" pitchFamily="34" charset="-122"/>
                 <a:cs typeface="Hiragino Sans GB" pitchFamily="34" charset="-120"/>
               </a:rPr>
-              <a:t>最终编程题 3</a:t>
+              <a:t>程序阅读：四步追踪法</a:t>
             </a:r>
             <a:endParaRPr lang="en-US" sz="2700" dirty="0"/>
           </a:p>
@@ -6756,7 +7360,7 @@
                 <a:ea typeface="Hiragino Sans GB" pitchFamily="34" charset="-122"/>
                 <a:cs typeface="Hiragino Sans GB" pitchFamily="34" charset="-120"/>
               </a:rPr>
-              <a:t>字符数组与类别状态。完整题面与评测请在Learn打开。</a:t>
+              <a:t>循环和递归都不要凭感觉猜结果。循环写迭代表；递归写调用与返回链。</a:t>
             </a:r>
             <a:endParaRPr lang="en-US" sz="2200" dirty="0"/>
           </a:p>
@@ -6964,7 +7568,7 @@
                 <a:ea typeface="Hiragino Sans GB" pitchFamily="34" charset="-122"/>
                 <a:cs typeface="Hiragino Sans GB" pitchFamily="34" charset="-120"/>
               </a:rPr>
-              <a:t>最终编程题 4</a:t>
+              <a:t>提交前测试：至少覆盖五类数据</a:t>
             </a:r>
             <a:endParaRPr lang="en-US" sz="2700" dirty="0"/>
           </a:p>
@@ -7069,7 +7673,7 @@
                 <a:ea typeface="Hiragino Sans GB" pitchFamily="34" charset="-122"/>
                 <a:cs typeface="Hiragino Sans GB" pitchFamily="34" charset="-120"/>
               </a:rPr>
-              <a:t>数学函数与枚举。完整题面与评测请在Learn打开。</a:t>
+              <a:t>n=0或n=1，空串或单字符</a:t>
             </a:r>
             <a:endParaRPr lang="en-US" sz="2200" dirty="0"/>
           </a:p>
@@ -7077,7 +7681,322 @@
       </p:sp>
       <p:sp>
         <p:nvSpPr>
-          <p:cNvPr id="8" name="Text 5"/>
+          <p:cNvPr id="8" name="Shape 5"/>
+          <p:cNvSpPr/>
+          <p:nvPr/>
+        </p:nvSpPr>
+        <p:spPr>
+          <a:xfrm>
+            <a:off x="822960" y="2606040"/>
+            <a:ext cx="594360" cy="594360"/>
+          </a:xfrm>
+          <a:prstGeom prst="ellipse">
+            <a:avLst/>
+          </a:prstGeom>
+          <a:solidFill>
+            <a:srgbClr val="F97316"/>
+          </a:solidFill>
+          <a:ln w="12700">
+            <a:solidFill>
+              <a:srgbClr val="F97316"/>
+            </a:solidFill>
+            <a:prstDash val="solid"/>
+          </a:ln>
+        </p:spPr>
+      </p:sp>
+      <p:sp>
+        <p:nvSpPr>
+          <p:cNvPr id="9" name="Text 6"/>
+          <p:cNvSpPr/>
+          <p:nvPr/>
+        </p:nvSpPr>
+        <p:spPr>
+          <a:xfrm>
+            <a:off x="822960" y="2724912"/>
+            <a:ext cx="594360" cy="228600"/>
+          </a:xfrm>
+          <a:prstGeom prst="rect">
+            <a:avLst/>
+          </a:prstGeom>
+          <a:noFill/>
+          <a:ln/>
+        </p:spPr>
+        <p:txBody>
+          <a:bodyPr wrap="square" lIns="0" tIns="0" rIns="0" bIns="0" rtlCol="0" anchor="ctr"/>
+          <a:lstStyle/>
+          <a:p>
+            <a:pPr algn="ctr" indent="0" marL="0">
+              <a:buNone/>
+            </a:pPr>
+            <a:r>
+              <a:rPr lang="en-US" b="1" dirty="0">
+                <a:solidFill>
+                  <a:srgbClr val="FFFFFF"/>
+                </a:solidFill>
+                <a:latin typeface="Hiragino Sans GB" pitchFamily="34" charset="0"/>
+                <a:ea typeface="Hiragino Sans GB" pitchFamily="34" charset="-122"/>
+                <a:cs typeface="Hiragino Sans GB" pitchFamily="34" charset="-120"/>
+              </a:rPr>
+              <a:t>2</a:t>
+            </a:r>
+            <a:endParaRPr lang="en-US" dirty="0"/>
+          </a:p>
+        </p:txBody>
+      </p:sp>
+      <p:sp>
+        <p:nvSpPr>
+          <p:cNvPr id="10" name="Text 7"/>
+          <p:cNvSpPr/>
+          <p:nvPr/>
+        </p:nvSpPr>
+        <p:spPr>
+          <a:xfrm>
+            <a:off x="1691640" y="2578608"/>
+            <a:ext cx="9601200" cy="685800"/>
+          </a:xfrm>
+          <a:prstGeom prst="rect">
+            <a:avLst/>
+          </a:prstGeom>
+          <a:noFill/>
+          <a:ln/>
+        </p:spPr>
+        <p:txBody>
+          <a:bodyPr wrap="square" lIns="381" tIns="381" rIns="381" bIns="381" rtlCol="0" anchor="ctr">
+            <a:normAutofit/>
+          </a:bodyPr>
+          <a:lstStyle/>
+          <a:p>
+            <a:pPr indent="0" marL="0">
+              <a:buNone/>
+            </a:pPr>
+            <a:r>
+              <a:rPr lang="en-US" sz="2200" dirty="0">
+                <a:solidFill>
+                  <a:srgbClr val="172033"/>
+                </a:solidFill>
+                <a:latin typeface="Hiragino Sans GB" pitchFamily="34" charset="0"/>
+                <a:ea typeface="Hiragino Sans GB" pitchFamily="34" charset="-122"/>
+                <a:cs typeface="Hiragino Sans GB" pitchFamily="34" charset="-120"/>
+              </a:rPr>
+              <a:t>符合题意的典型数据</a:t>
+            </a:r>
+            <a:endParaRPr lang="en-US" sz="2200" dirty="0"/>
+          </a:p>
+        </p:txBody>
+      </p:sp>
+      <p:sp>
+        <p:nvSpPr>
+          <p:cNvPr id="11" name="Shape 8"/>
+          <p:cNvSpPr/>
+          <p:nvPr/>
+        </p:nvSpPr>
+        <p:spPr>
+          <a:xfrm>
+            <a:off x="822960" y="3703320"/>
+            <a:ext cx="594360" cy="594360"/>
+          </a:xfrm>
+          <a:prstGeom prst="ellipse">
+            <a:avLst/>
+          </a:prstGeom>
+          <a:solidFill>
+            <a:srgbClr val="F97316"/>
+          </a:solidFill>
+          <a:ln w="12700">
+            <a:solidFill>
+              <a:srgbClr val="F97316"/>
+            </a:solidFill>
+            <a:prstDash val="solid"/>
+          </a:ln>
+        </p:spPr>
+      </p:sp>
+      <p:sp>
+        <p:nvSpPr>
+          <p:cNvPr id="12" name="Text 9"/>
+          <p:cNvSpPr/>
+          <p:nvPr/>
+        </p:nvSpPr>
+        <p:spPr>
+          <a:xfrm>
+            <a:off x="822960" y="3822192"/>
+            <a:ext cx="594360" cy="228600"/>
+          </a:xfrm>
+          <a:prstGeom prst="rect">
+            <a:avLst/>
+          </a:prstGeom>
+          <a:noFill/>
+          <a:ln/>
+        </p:spPr>
+        <p:txBody>
+          <a:bodyPr wrap="square" lIns="0" tIns="0" rIns="0" bIns="0" rtlCol="0" anchor="ctr"/>
+          <a:lstStyle/>
+          <a:p>
+            <a:pPr algn="ctr" indent="0" marL="0">
+              <a:buNone/>
+            </a:pPr>
+            <a:r>
+              <a:rPr lang="en-US" b="1" dirty="0">
+                <a:solidFill>
+                  <a:srgbClr val="FFFFFF"/>
+                </a:solidFill>
+                <a:latin typeface="Hiragino Sans GB" pitchFamily="34" charset="0"/>
+                <a:ea typeface="Hiragino Sans GB" pitchFamily="34" charset="-122"/>
+                <a:cs typeface="Hiragino Sans GB" pitchFamily="34" charset="-120"/>
+              </a:rPr>
+              <a:t>3</a:t>
+            </a:r>
+            <a:endParaRPr lang="en-US" dirty="0"/>
+          </a:p>
+        </p:txBody>
+      </p:sp>
+      <p:sp>
+        <p:nvSpPr>
+          <p:cNvPr id="13" name="Text 10"/>
+          <p:cNvSpPr/>
+          <p:nvPr/>
+        </p:nvSpPr>
+        <p:spPr>
+          <a:xfrm>
+            <a:off x="1691640" y="3675888"/>
+            <a:ext cx="9601200" cy="685800"/>
+          </a:xfrm>
+          <a:prstGeom prst="rect">
+            <a:avLst/>
+          </a:prstGeom>
+          <a:noFill/>
+          <a:ln/>
+        </p:spPr>
+        <p:txBody>
+          <a:bodyPr wrap="square" lIns="381" tIns="381" rIns="381" bIns="381" rtlCol="0" anchor="ctr">
+            <a:normAutofit/>
+          </a:bodyPr>
+          <a:lstStyle/>
+          <a:p>
+            <a:pPr indent="0" marL="0">
+              <a:buNone/>
+            </a:pPr>
+            <a:r>
+              <a:rPr lang="en-US" sz="2200" dirty="0">
+                <a:solidFill>
+                  <a:srgbClr val="172033"/>
+                </a:solidFill>
+                <a:latin typeface="Hiragino Sans GB" pitchFamily="34" charset="0"/>
+                <a:ea typeface="Hiragino Sans GB" pitchFamily="34" charset="-122"/>
+                <a:cs typeface="Hiragino Sans GB" pitchFamily="34" charset="-120"/>
+              </a:rPr>
+              <a:t>数组末端、最大输入</a:t>
+            </a:r>
+            <a:endParaRPr lang="en-US" sz="2200" dirty="0"/>
+          </a:p>
+        </p:txBody>
+      </p:sp>
+      <p:sp>
+        <p:nvSpPr>
+          <p:cNvPr id="14" name="Shape 11"/>
+          <p:cNvSpPr/>
+          <p:nvPr/>
+        </p:nvSpPr>
+        <p:spPr>
+          <a:xfrm>
+            <a:off x="822960" y="4800600"/>
+            <a:ext cx="594360" cy="594360"/>
+          </a:xfrm>
+          <a:prstGeom prst="ellipse">
+            <a:avLst/>
+          </a:prstGeom>
+          <a:solidFill>
+            <a:srgbClr val="0F9F79"/>
+          </a:solidFill>
+          <a:ln w="12700">
+            <a:solidFill>
+              <a:srgbClr val="0F9F79"/>
+            </a:solidFill>
+            <a:prstDash val="solid"/>
+          </a:ln>
+        </p:spPr>
+      </p:sp>
+      <p:sp>
+        <p:nvSpPr>
+          <p:cNvPr id="15" name="Text 12"/>
+          <p:cNvSpPr/>
+          <p:nvPr/>
+        </p:nvSpPr>
+        <p:spPr>
+          <a:xfrm>
+            <a:off x="822960" y="4919472"/>
+            <a:ext cx="594360" cy="228600"/>
+          </a:xfrm>
+          <a:prstGeom prst="rect">
+            <a:avLst/>
+          </a:prstGeom>
+          <a:noFill/>
+          <a:ln/>
+        </p:spPr>
+        <p:txBody>
+          <a:bodyPr wrap="square" lIns="0" tIns="0" rIns="0" bIns="0" rtlCol="0" anchor="ctr"/>
+          <a:lstStyle/>
+          <a:p>
+            <a:pPr algn="ctr" indent="0" marL="0">
+              <a:buNone/>
+            </a:pPr>
+            <a:r>
+              <a:rPr lang="en-US" b="1" dirty="0">
+                <a:solidFill>
+                  <a:srgbClr val="FFFFFF"/>
+                </a:solidFill>
+                <a:latin typeface="Hiragino Sans GB" pitchFamily="34" charset="0"/>
+                <a:ea typeface="Hiragino Sans GB" pitchFamily="34" charset="-122"/>
+                <a:cs typeface="Hiragino Sans GB" pitchFamily="34" charset="-120"/>
+              </a:rPr>
+              <a:t>4</a:t>
+            </a:r>
+            <a:endParaRPr lang="en-US" dirty="0"/>
+          </a:p>
+        </p:txBody>
+      </p:sp>
+      <p:sp>
+        <p:nvSpPr>
+          <p:cNvPr id="16" name="Text 13"/>
+          <p:cNvSpPr/>
+          <p:nvPr/>
+        </p:nvSpPr>
+        <p:spPr>
+          <a:xfrm>
+            <a:off x="1691640" y="4773168"/>
+            <a:ext cx="9601200" cy="685800"/>
+          </a:xfrm>
+          <a:prstGeom prst="rect">
+            <a:avLst/>
+          </a:prstGeom>
+          <a:noFill/>
+          <a:ln/>
+        </p:spPr>
+        <p:txBody>
+          <a:bodyPr wrap="square" lIns="381" tIns="381" rIns="381" bIns="381" rtlCol="0" anchor="ctr">
+            <a:normAutofit/>
+          </a:bodyPr>
+          <a:lstStyle/>
+          <a:p>
+            <a:pPr indent="0" marL="0">
+              <a:buNone/>
+            </a:pPr>
+            <a:r>
+              <a:rPr lang="en-US" sz="2200" dirty="0">
+                <a:solidFill>
+                  <a:srgbClr val="172033"/>
+                </a:solidFill>
+                <a:latin typeface="Hiragino Sans GB" pitchFamily="34" charset="0"/>
+                <a:ea typeface="Hiragino Sans GB" pitchFamily="34" charset="-122"/>
+                <a:cs typeface="Hiragino Sans GB" pitchFamily="34" charset="-120"/>
+              </a:rPr>
+              <a:t>全相同、全负、无答案、多个答案</a:t>
+            </a:r>
+            <a:endParaRPr lang="en-US" sz="2200" dirty="0"/>
+          </a:p>
+        </p:txBody>
+      </p:sp>
+      <p:sp>
+        <p:nvSpPr>
+          <p:cNvPr id="17" name="Text 14"/>
           <p:cNvSpPr/>
           <p:nvPr/>
         </p:nvSpPr>
@@ -7220,7 +8139,7 @@
                 <a:ea typeface="Hiragino Sans GB" pitchFamily="34" charset="-122"/>
                 <a:cs typeface="Hiragino Sans GB" pitchFamily="34" charset="-120"/>
               </a:rPr>
-              <a:t>最终编程题 5</a:t>
+              <a:t>常见错误诊断表</a:t>
             </a:r>
             <a:endParaRPr lang="en-US" sz="2700" dirty="0"/>
           </a:p>
@@ -7288,7 +8207,76 @@
                 <a:ea typeface="Hiragino Sans GB" pitchFamily="34" charset="-122"/>
                 <a:cs typeface="Hiragino Sans GB" pitchFamily="34" charset="-120"/>
               </a:rPr>
-              <a:t>模拟与状态更新。完整题面与评测请在Learn打开。</a:t>
+              <a:t>头文件、分号、括号、函数声明</a:t>
+            </a:r>
+            <a:endParaRPr lang="en-US" sz="2200" dirty="0"/>
+          </a:p>
+          <a:p>
+            <a:pPr indent="0" marL="0">
+              <a:buNone/>
+            </a:pPr>
+            <a:endParaRPr lang="en-US" sz="2200" dirty="0"/>
+          </a:p>
+          <a:p>
+            <a:pPr indent="0" marL="0">
+              <a:buNone/>
+            </a:pPr>
+            <a:r>
+              <a:rPr lang="en-US" sz="2200" dirty="0">
+                <a:solidFill>
+                  <a:srgbClr val="172033"/>
+                </a:solidFill>
+                <a:latin typeface="Hiragino Sans GB" pitchFamily="34" charset="0"/>
+                <a:ea typeface="Hiragino Sans GB" pitchFamily="34" charset="-122"/>
+                <a:cs typeface="Hiragino Sans GB" pitchFamily="34" charset="-120"/>
+              </a:rPr>
+              <a:t>越界、除0、递归不终止</a:t>
+            </a:r>
+            <a:endParaRPr lang="en-US" sz="2200" dirty="0"/>
+          </a:p>
+          <a:p>
+            <a:pPr indent="0" marL="0">
+              <a:buNone/>
+            </a:pPr>
+            <a:endParaRPr lang="en-US" sz="2200" dirty="0"/>
+          </a:p>
+          <a:p>
+            <a:pPr indent="0" marL="0">
+              <a:buNone/>
+            </a:pPr>
+            <a:r>
+              <a:rPr lang="en-US" sz="2200" dirty="0">
+                <a:solidFill>
+                  <a:srgbClr val="172033"/>
+                </a:solidFill>
+                <a:latin typeface="Hiragino Sans GB" pitchFamily="34" charset="0"/>
+                <a:ea typeface="Hiragino Sans GB" pitchFamily="34" charset="-122"/>
+                <a:cs typeface="Hiragino Sans GB" pitchFamily="34" charset="-120"/>
+              </a:rPr>
+              <a:t>初始化、条件、更新顺序、类型</a:t>
+            </a:r>
+            <a:endParaRPr lang="en-US" sz="2200" dirty="0"/>
+          </a:p>
+          <a:p>
+            <a:pPr indent="0" marL="0">
+              <a:buNone/>
+            </a:pPr>
+            <a:endParaRPr lang="en-US" sz="2200" dirty="0"/>
+          </a:p>
+          <a:p>
+            <a:pPr indent="0" marL="0">
+              <a:buNone/>
+            </a:pPr>
+            <a:r>
+              <a:rPr lang="en-US" sz="2200" dirty="0">
+                <a:solidFill>
+                  <a:srgbClr val="172033"/>
+                </a:solidFill>
+                <a:latin typeface="Hiragino Sans GB" pitchFamily="34" charset="0"/>
+                <a:ea typeface="Hiragino Sans GB" pitchFamily="34" charset="-122"/>
+                <a:cs typeface="Hiragino Sans GB" pitchFamily="34" charset="-120"/>
+              </a:rPr>
+              <a:t>空格、换行、大小写、输出次数</a:t>
             </a:r>
             <a:endParaRPr lang="en-US" sz="2200" dirty="0"/>
           </a:p>
@@ -7439,7 +8427,7 @@
                 <a:ea typeface="Hiragino Sans GB" pitchFamily="34" charset="-122"/>
                 <a:cs typeface="Hiragino Sans GB" pitchFamily="34" charset="-120"/>
               </a:rPr>
-              <a:t>最终编程题 6</a:t>
+              <a:t>开始全真模拟卷（二）</a:t>
             </a:r>
             <a:endParaRPr lang="en-US" sz="2700" dirty="0"/>
           </a:p>
@@ -7507,7 +8495,30 @@
                 <a:ea typeface="Hiragino Sans GB" pitchFamily="34" charset="-122"/>
                 <a:cs typeface="Hiragino Sans GB" pitchFamily="34" charset="-120"/>
               </a:rPr>
-              <a:t>二维坐标与边界。完整题面与评测请在Learn打开。</a:t>
+              <a:t>10选择＋10判断＋2编程</a:t>
+            </a:r>
+            <a:endParaRPr lang="en-US" sz="2200" dirty="0"/>
+          </a:p>
+          <a:p>
+            <a:pPr indent="0" marL="0">
+              <a:buNone/>
+            </a:pPr>
+            <a:endParaRPr lang="en-US" sz="2200" dirty="0"/>
+          </a:p>
+          <a:p>
+            <a:pPr indent="0" marL="0">
+              <a:buNone/>
+            </a:pPr>
+            <a:r>
+              <a:rPr lang="en-US" sz="2200" dirty="0">
+                <a:solidFill>
+                  <a:srgbClr val="172033"/>
+                </a:solidFill>
+                <a:latin typeface="Hiragino Sans GB" pitchFamily="34" charset="0"/>
+                <a:ea typeface="Hiragino Sans GB" pitchFamily="34" charset="-122"/>
+                <a:cs typeface="Hiragino Sans GB" pitchFamily="34" charset="-120"/>
+              </a:rPr>
+              <a:t>100分；客观40分，编程60分</a:t>
             </a:r>
             <a:endParaRPr lang="en-US" sz="2200" dirty="0"/>
           </a:p>
@@ -7566,6 +8577,40 @@
             <a:pPr indent="0" marL="0">
               <a:buNone/>
             </a:pPr>
+            <a:r>
+              <a:rPr lang="en-US" sz="2200" dirty="0">
+                <a:solidFill>
+                  <a:srgbClr val="172033"/>
+                </a:solidFill>
+                <a:latin typeface="Hiragino Sans GB" pitchFamily="34" charset="0"/>
+                <a:ea typeface="Hiragino Sans GB" pitchFamily="34" charset="-122"/>
+                <a:cs typeface="Hiragino Sans GB" pitchFamily="34" charset="-120"/>
+              </a:rPr>
+              <a:t>关闭笔记，独立完成，记录卡点</a:t>
+            </a:r>
+            <a:endParaRPr lang="en-US" sz="2200" dirty="0"/>
+          </a:p>
+          <a:p>
+            <a:pPr indent="0" marL="0">
+              <a:buNone/>
+            </a:pPr>
+            <a:endParaRPr lang="en-US" sz="2200" dirty="0"/>
+          </a:p>
+          <a:p>
+            <a:pPr indent="0" marL="0">
+              <a:buNone/>
+            </a:pPr>
+            <a:r>
+              <a:rPr lang="en-US" sz="2200" dirty="0">
+                <a:solidFill>
+                  <a:srgbClr val="172033"/>
+                </a:solidFill>
+                <a:latin typeface="Hiragino Sans GB" pitchFamily="34" charset="0"/>
+                <a:ea typeface="Hiragino Sans GB" pitchFamily="34" charset="-122"/>
+                <a:cs typeface="Hiragino Sans GB" pitchFamily="34" charset="-120"/>
+              </a:rPr>
+              <a:t>按四类错因整理错题</a:t>
+            </a:r>
             <a:endParaRPr lang="en-US" sz="2200" dirty="0"/>
           </a:p>
         </p:txBody>
@@ -7715,7 +8760,7 @@
                 <a:ea typeface="Hiragino Sans GB" pitchFamily="34" charset="-122"/>
                 <a:cs typeface="Hiragino Sans GB" pitchFamily="34" charset="-120"/>
               </a:rPr>
-              <a:t>考前个人检查卡</a:t>
+              <a:t>整卷完成后的复盘单</a:t>
             </a:r>
             <a:endParaRPr lang="en-US" sz="2700" dirty="0"/>
           </a:p>
@@ -7820,7 +8865,7 @@
                 <a:ea typeface="Hiragino Sans GB" pitchFamily="34" charset="-122"/>
                 <a:cs typeface="Hiragino Sans GB" pitchFamily="34" charset="-120"/>
               </a:rPr>
-              <a:t>头文件、分号、变量名</a:t>
+              <a:t>不知道定义或函数含义</a:t>
             </a:r>
             <a:endParaRPr lang="en-US" sz="2200" dirty="0"/>
           </a:p>
@@ -7925,7 +8970,7 @@
                 <a:ea typeface="Hiragino Sans GB" pitchFamily="34" charset="-122"/>
                 <a:cs typeface="Hiragino Sans GB" pitchFamily="34" charset="-120"/>
               </a:rPr>
-              <a:t>最小、边界、特殊值</a:t>
+              <a:t>范围、下标、终止条件遗漏</a:t>
             </a:r>
             <a:endParaRPr lang="en-US" sz="2200" dirty="0"/>
           </a:p>
@@ -8030,7 +9075,7 @@
                 <a:ea typeface="Hiragino Sans GB" pitchFamily="34" charset="-122"/>
                 <a:cs typeface="Hiragino Sans GB" pitchFamily="34" charset="-120"/>
               </a:rPr>
-              <a:t>数组、循环、整数溢出</a:t>
+              <a:t>状态、顺序、变量更新错误</a:t>
             </a:r>
             <a:endParaRPr lang="en-US" sz="2200" dirty="0"/>
           </a:p>
@@ -8135,7 +9180,7 @@
                 <a:ea typeface="Hiragino Sans GB" pitchFamily="34" charset="-122"/>
                 <a:cs typeface="Hiragino Sans GB" pitchFamily="34" charset="-120"/>
               </a:rPr>
-              <a:t>内容、顺序、格式</a:t>
+              <a:t>输入输出和提交要求不符</a:t>
             </a:r>
             <a:endParaRPr lang="en-US" sz="2200" dirty="0"/>
           </a:p>
@@ -8286,7 +9331,7 @@
                 <a:ea typeface="Hiragino Sans GB" pitchFamily="34" charset="-122"/>
                 <a:cs typeface="Hiragino Sans GB" pitchFamily="34" charset="-120"/>
               </a:rPr>
-              <a:t>课程结束：带走一套稳定得分流程</a:t>
+              <a:t>本课完成标准</a:t>
             </a:r>
             <a:endParaRPr lang="en-US" sz="2700" dirty="0"/>
           </a:p>
@@ -8354,7 +9399,7 @@
                 <a:ea typeface="Hiragino Sans GB" pitchFamily="34" charset="-122"/>
                 <a:cs typeface="Hiragino Sans GB" pitchFamily="34" charset="-120"/>
               </a:rPr>
-              <a:t>目标不是做更难，而是在电子学会三级范围内稳定、完整、少失误。</a:t>
+              <a:t>两套卷都完成后，只保留仍未闭环的个人薄弱点。</a:t>
             </a:r>
             <a:endParaRPr lang="en-US" sz="2200" dirty="0"/>
           </a:p>
@@ -8363,6 +9408,1546 @@
       <p:sp>
         <p:nvSpPr>
           <p:cNvPr id="7" name="Text 4"/>
+          <p:cNvSpPr/>
+          <p:nvPr/>
+        </p:nvSpPr>
+        <p:spPr>
+          <a:xfrm>
+            <a:off x="658368" y="6473952"/>
+            <a:ext cx="1828800" cy="182880"/>
+          </a:xfrm>
+          <a:prstGeom prst="rect">
+            <a:avLst/>
+          </a:prstGeom>
+          <a:noFill/>
+          <a:ln/>
+        </p:spPr>
+        <p:txBody>
+          <a:bodyPr wrap="square" lIns="0" tIns="0" rIns="0" bIns="0" rtlCol="0" anchor="ctr"/>
+          <a:lstStyle/>
+          <a:p>
+            <a:pPr indent="0" marL="0">
+              <a:buNone/>
+            </a:pPr>
+            <a:r>
+              <a:rPr lang="en-US" sz="1000" dirty="0">
+                <a:solidFill>
+                  <a:srgbClr val="64748B"/>
+                </a:solidFill>
+                <a:latin typeface="Hiragino Sans GB" pitchFamily="34" charset="0"/>
+                <a:ea typeface="Hiragino Sans GB" pitchFamily="34" charset="-122"/>
+                <a:cs typeface="Hiragino Sans GB" pitchFamily="34" charset="-120"/>
+              </a:rPr>
+              <a:t>童澄未来</a:t>
+            </a:r>
+            <a:endParaRPr lang="en-US" sz="1000" dirty="0"/>
+          </a:p>
+        </p:txBody>
+      </p:sp>
+    </p:spTree>
+  </p:cSld>
+  <p:clrMapOvr>
+    <a:masterClrMapping/>
+  </p:clrMapOvr>
+</p:sld>
+</file>
+
+<file path=ppt/slides/slide26.xml><?xml version="1.0" encoding="utf-8"?>
+<p:sld xmlns:a="http://schemas.openxmlformats.org/drawingml/2006/main" xmlns:r="http://schemas.openxmlformats.org/officeDocument/2006/relationships" xmlns:p="http://schemas.openxmlformats.org/presentationml/2006/main">
+  <p:cSld name="Slide 26">
+    <p:bg>
+      <p:bgPr>
+        <a:solidFill>
+          <a:srgbClr val="FCFCFD"/>
+        </a:solidFill>
+      </p:bgPr>
+    </p:bg>
+    <p:spTree>
+      <p:nvGrpSpPr>
+        <p:cNvPr id="1" name=""/>
+        <p:cNvGrpSpPr/>
+        <p:nvPr/>
+      </p:nvGrpSpPr>
+      <p:grpSpPr>
+        <a:xfrm>
+          <a:off x="0" y="0"/>
+          <a:ext cx="0" cy="0"/>
+          <a:chOff x="0" y="0"/>
+          <a:chExt cx="0" cy="0"/>
+        </a:xfrm>
+      </p:grpSpPr>
+      <p:sp>
+        <p:nvSpPr>
+          <p:cNvPr id="3" name="Text 0"/>
+          <p:cNvSpPr/>
+          <p:nvPr/>
+        </p:nvSpPr>
+        <p:spPr>
+          <a:xfrm>
+            <a:off x="658368" y="292608"/>
+            <a:ext cx="5029200" cy="256032"/>
+          </a:xfrm>
+          <a:prstGeom prst="rect">
+            <a:avLst/>
+          </a:prstGeom>
+          <a:noFill/>
+          <a:ln/>
+        </p:spPr>
+        <p:txBody>
+          <a:bodyPr wrap="square" lIns="0" tIns="0" rIns="0" bIns="0" rtlCol="0" anchor="ctr"/>
+          <a:lstStyle/>
+          <a:p>
+            <a:pPr indent="0" marL="0">
+              <a:buNone/>
+            </a:pPr>
+            <a:r>
+              <a:rPr lang="en-US" sz="1100" b="1" dirty="0">
+                <a:solidFill>
+                  <a:srgbClr val="F97316"/>
+                </a:solidFill>
+                <a:latin typeface="Hiragino Sans GB" pitchFamily="34" charset="0"/>
+                <a:ea typeface="Hiragino Sans GB" pitchFamily="34" charset="-122"/>
+                <a:cs typeface="Hiragino Sans GB" pitchFamily="34" charset="-120"/>
+              </a:rPr>
+              <a:t>童澄课堂 · 26</a:t>
+            </a:r>
+            <a:endParaRPr lang="en-US" sz="1100" dirty="0"/>
+          </a:p>
+        </p:txBody>
+      </p:sp>
+      <p:sp>
+        <p:nvSpPr>
+          <p:cNvPr id="4" name="Text 1"/>
+          <p:cNvSpPr/>
+          <p:nvPr/>
+        </p:nvSpPr>
+        <p:spPr>
+          <a:xfrm>
+            <a:off x="658368" y="658368"/>
+            <a:ext cx="10789920" cy="594360"/>
+          </a:xfrm>
+          <a:prstGeom prst="rect">
+            <a:avLst/>
+          </a:prstGeom>
+          <a:noFill/>
+          <a:ln/>
+        </p:spPr>
+        <p:txBody>
+          <a:bodyPr wrap="square" lIns="0" tIns="0" rIns="0" bIns="0" rtlCol="0" anchor="ctr">
+            <a:normAutofit/>
+          </a:bodyPr>
+          <a:lstStyle/>
+          <a:p>
+            <a:pPr indent="0" marL="0">
+              <a:buNone/>
+            </a:pPr>
+            <a:r>
+              <a:rPr lang="en-US" sz="2700" b="1" dirty="0">
+                <a:solidFill>
+                  <a:srgbClr val="172033"/>
+                </a:solidFill>
+                <a:latin typeface="Hiragino Sans GB" pitchFamily="34" charset="0"/>
+                <a:ea typeface="Hiragino Sans GB" pitchFamily="34" charset="-122"/>
+                <a:cs typeface="Hiragino Sans GB" pitchFamily="34" charset="-120"/>
+              </a:rPr>
+              <a:t>教师讲评：客观题只讲错误集中点</a:t>
+            </a:r>
+            <a:endParaRPr lang="en-US" sz="2700" dirty="0"/>
+          </a:p>
+        </p:txBody>
+      </p:sp>
+      <p:sp>
+        <p:nvSpPr>
+          <p:cNvPr id="5" name="Shape 2"/>
+          <p:cNvSpPr/>
+          <p:nvPr/>
+        </p:nvSpPr>
+        <p:spPr>
+          <a:xfrm>
+            <a:off x="658368" y="1508760"/>
+            <a:ext cx="5257800" cy="4297680"/>
+          </a:xfrm>
+          <a:prstGeom prst="roundRect">
+            <a:avLst>
+              <a:gd name="adj" fmla="val 1702"/>
+            </a:avLst>
+          </a:prstGeom>
+          <a:solidFill>
+            <a:srgbClr val="FFFFFF"/>
+          </a:solidFill>
+          <a:ln w="12700">
+            <a:solidFill>
+              <a:srgbClr val="D8DEE9"/>
+            </a:solidFill>
+            <a:prstDash val="solid"/>
+          </a:ln>
+        </p:spPr>
+      </p:sp>
+      <p:sp>
+        <p:nvSpPr>
+          <p:cNvPr id="6" name="Text 3"/>
+          <p:cNvSpPr/>
+          <p:nvPr/>
+        </p:nvSpPr>
+        <p:spPr>
+          <a:xfrm>
+            <a:off x="978408" y="1828800"/>
+            <a:ext cx="4617720" cy="3657600"/>
+          </a:xfrm>
+          <a:prstGeom prst="rect">
+            <a:avLst/>
+          </a:prstGeom>
+          <a:noFill/>
+          <a:ln/>
+        </p:spPr>
+        <p:txBody>
+          <a:bodyPr wrap="square" lIns="508" tIns="508" rIns="508" bIns="508" rtlCol="0" anchor="ctr">
+            <a:normAutofit/>
+          </a:bodyPr>
+          <a:lstStyle/>
+          <a:p>
+            <a:pPr indent="0" marL="0">
+              <a:buNone/>
+            </a:pPr>
+            <a:r>
+              <a:rPr lang="en-US" sz="2200" dirty="0">
+                <a:solidFill>
+                  <a:srgbClr val="172033"/>
+                </a:solidFill>
+                <a:latin typeface="Hiragino Sans GB" pitchFamily="34" charset="0"/>
+                <a:ea typeface="Hiragino Sans GB" pitchFamily="34" charset="-122"/>
+                <a:cs typeface="Hiragino Sans GB" pitchFamily="34" charset="-120"/>
+              </a:rPr>
+              <a:t>先追调用与返回，再判断结果</a:t>
+            </a:r>
+            <a:endParaRPr lang="en-US" sz="2200" dirty="0"/>
+          </a:p>
+          <a:p>
+            <a:pPr indent="0" marL="0">
+              <a:buNone/>
+            </a:pPr>
+            <a:endParaRPr lang="en-US" sz="2200" dirty="0"/>
+          </a:p>
+          <a:p>
+            <a:pPr indent="0" marL="0">
+              <a:buNone/>
+            </a:pPr>
+            <a:r>
+              <a:rPr lang="en-US" sz="2200" dirty="0">
+                <a:solidFill>
+                  <a:srgbClr val="172033"/>
+                </a:solidFill>
+                <a:latin typeface="Hiragino Sans GB" pitchFamily="34" charset="0"/>
+                <a:ea typeface="Hiragino Sans GB" pitchFamily="34" charset="-122"/>
+                <a:cs typeface="Hiragino Sans GB" pitchFamily="34" charset="-120"/>
+              </a:rPr>
+              <a:t>先确认头文件、返回值和容量条件</a:t>
+            </a:r>
+            <a:endParaRPr lang="en-US" sz="2200" dirty="0"/>
+          </a:p>
+        </p:txBody>
+      </p:sp>
+      <p:sp>
+        <p:nvSpPr>
+          <p:cNvPr id="7" name="Shape 4"/>
+          <p:cNvSpPr/>
+          <p:nvPr/>
+        </p:nvSpPr>
+        <p:spPr>
+          <a:xfrm>
+            <a:off x="6263640" y="1508760"/>
+            <a:ext cx="5257800" cy="4297680"/>
+          </a:xfrm>
+          <a:prstGeom prst="roundRect">
+            <a:avLst>
+              <a:gd name="adj" fmla="val 1702"/>
+            </a:avLst>
+          </a:prstGeom>
+          <a:solidFill>
+            <a:srgbClr val="FFFFFF"/>
+          </a:solidFill>
+          <a:ln w="12700">
+            <a:solidFill>
+              <a:srgbClr val="D8DEE9"/>
+            </a:solidFill>
+            <a:prstDash val="solid"/>
+          </a:ln>
+        </p:spPr>
+      </p:sp>
+      <p:sp>
+        <p:nvSpPr>
+          <p:cNvPr id="8" name="Text 5"/>
+          <p:cNvSpPr/>
+          <p:nvPr/>
+        </p:nvSpPr>
+        <p:spPr>
+          <a:xfrm>
+            <a:off x="6583680" y="1828800"/>
+            <a:ext cx="4617720" cy="3657600"/>
+          </a:xfrm>
+          <a:prstGeom prst="rect">
+            <a:avLst/>
+          </a:prstGeom>
+          <a:noFill/>
+          <a:ln/>
+        </p:spPr>
+        <p:txBody>
+          <a:bodyPr wrap="square" lIns="508" tIns="508" rIns="508" bIns="508" rtlCol="0" anchor="ctr">
+            <a:normAutofit/>
+          </a:bodyPr>
+          <a:lstStyle/>
+          <a:p>
+            <a:pPr indent="0" marL="0">
+              <a:buNone/>
+            </a:pPr>
+            <a:r>
+              <a:rPr lang="en-US" sz="2200" dirty="0">
+                <a:solidFill>
+                  <a:srgbClr val="172033"/>
+                </a:solidFill>
+                <a:latin typeface="Hiragino Sans GB" pitchFamily="34" charset="0"/>
+                <a:ea typeface="Hiragino Sans GB" pitchFamily="34" charset="-122"/>
+                <a:cs typeface="Hiragino Sans GB" pitchFamily="34" charset="-120"/>
+              </a:rPr>
+              <a:t>先说清候选或状态</a:t>
+            </a:r>
+            <a:endParaRPr lang="en-US" sz="2200" dirty="0"/>
+          </a:p>
+          <a:p>
+            <a:pPr indent="0" marL="0">
+              <a:buNone/>
+            </a:pPr>
+            <a:endParaRPr lang="en-US" sz="2200" dirty="0"/>
+          </a:p>
+          <a:p>
+            <a:pPr indent="0" marL="0">
+              <a:buNone/>
+            </a:pPr>
+            <a:r>
+              <a:rPr lang="en-US" sz="2200" dirty="0">
+                <a:solidFill>
+                  <a:srgbClr val="172033"/>
+                </a:solidFill>
+                <a:latin typeface="Hiragino Sans GB" pitchFamily="34" charset="0"/>
+                <a:ea typeface="Hiragino Sans GB" pitchFamily="34" charset="-122"/>
+                <a:cs typeface="Hiragino Sans GB" pitchFamily="34" charset="-120"/>
+              </a:rPr>
+              <a:t>用最小和末端数据现场反证</a:t>
+            </a:r>
+            <a:endParaRPr lang="en-US" sz="2200" dirty="0"/>
+          </a:p>
+        </p:txBody>
+      </p:sp>
+      <p:sp>
+        <p:nvSpPr>
+          <p:cNvPr id="9" name="Text 6"/>
+          <p:cNvSpPr/>
+          <p:nvPr/>
+        </p:nvSpPr>
+        <p:spPr>
+          <a:xfrm>
+            <a:off x="658368" y="6473952"/>
+            <a:ext cx="1828800" cy="182880"/>
+          </a:xfrm>
+          <a:prstGeom prst="rect">
+            <a:avLst/>
+          </a:prstGeom>
+          <a:noFill/>
+          <a:ln/>
+        </p:spPr>
+        <p:txBody>
+          <a:bodyPr wrap="square" lIns="0" tIns="0" rIns="0" bIns="0" rtlCol="0" anchor="ctr"/>
+          <a:lstStyle/>
+          <a:p>
+            <a:pPr indent="0" marL="0">
+              <a:buNone/>
+            </a:pPr>
+            <a:r>
+              <a:rPr lang="en-US" sz="1000" dirty="0">
+                <a:solidFill>
+                  <a:srgbClr val="64748B"/>
+                </a:solidFill>
+                <a:latin typeface="Hiragino Sans GB" pitchFamily="34" charset="0"/>
+                <a:ea typeface="Hiragino Sans GB" pitchFamily="34" charset="-122"/>
+                <a:cs typeface="Hiragino Sans GB" pitchFamily="34" charset="-120"/>
+              </a:rPr>
+              <a:t>童澄未来</a:t>
+            </a:r>
+            <a:endParaRPr lang="en-US" sz="1000" dirty="0"/>
+          </a:p>
+        </p:txBody>
+      </p:sp>
+    </p:spTree>
+  </p:cSld>
+  <p:clrMapOvr>
+    <a:masterClrMapping/>
+  </p:clrMapOvr>
+</p:sld>
+</file>
+
+<file path=ppt/slides/slide27.xml><?xml version="1.0" encoding="utf-8"?>
+<p:sld xmlns:a="http://schemas.openxmlformats.org/drawingml/2006/main" xmlns:r="http://schemas.openxmlformats.org/officeDocument/2006/relationships" xmlns:p="http://schemas.openxmlformats.org/presentationml/2006/main">
+  <p:cSld name="Slide 27">
+    <p:bg>
+      <p:bgPr>
+        <a:solidFill>
+          <a:srgbClr val="FCFCFD"/>
+        </a:solidFill>
+      </p:bgPr>
+    </p:bg>
+    <p:spTree>
+      <p:nvGrpSpPr>
+        <p:cNvPr id="1" name=""/>
+        <p:cNvGrpSpPr/>
+        <p:nvPr/>
+      </p:nvGrpSpPr>
+      <p:grpSpPr>
+        <a:xfrm>
+          <a:off x="0" y="0"/>
+          <a:ext cx="0" cy="0"/>
+          <a:chOff x="0" y="0"/>
+          <a:chExt cx="0" cy="0"/>
+        </a:xfrm>
+      </p:grpSpPr>
+      <p:sp>
+        <p:nvSpPr>
+          <p:cNvPr id="3" name="Text 0"/>
+          <p:cNvSpPr/>
+          <p:nvPr/>
+        </p:nvSpPr>
+        <p:spPr>
+          <a:xfrm>
+            <a:off x="658368" y="292608"/>
+            <a:ext cx="5029200" cy="256032"/>
+          </a:xfrm>
+          <a:prstGeom prst="rect">
+            <a:avLst/>
+          </a:prstGeom>
+          <a:noFill/>
+          <a:ln/>
+        </p:spPr>
+        <p:txBody>
+          <a:bodyPr wrap="square" lIns="0" tIns="0" rIns="0" bIns="0" rtlCol="0" anchor="ctr"/>
+          <a:lstStyle/>
+          <a:p>
+            <a:pPr indent="0" marL="0">
+              <a:buNone/>
+            </a:pPr>
+            <a:r>
+              <a:rPr lang="en-US" sz="1100" b="1" dirty="0">
+                <a:solidFill>
+                  <a:srgbClr val="F97316"/>
+                </a:solidFill>
+                <a:latin typeface="Hiragino Sans GB" pitchFamily="34" charset="0"/>
+                <a:ea typeface="Hiragino Sans GB" pitchFamily="34" charset="-122"/>
+                <a:cs typeface="Hiragino Sans GB" pitchFamily="34" charset="-120"/>
+              </a:rPr>
+              <a:t>童澄课堂 · 27</a:t>
+            </a:r>
+            <a:endParaRPr lang="en-US" sz="1100" dirty="0"/>
+          </a:p>
+        </p:txBody>
+      </p:sp>
+      <p:sp>
+        <p:nvSpPr>
+          <p:cNvPr id="4" name="Text 1"/>
+          <p:cNvSpPr/>
+          <p:nvPr/>
+        </p:nvSpPr>
+        <p:spPr>
+          <a:xfrm>
+            <a:off x="658368" y="658368"/>
+            <a:ext cx="10789920" cy="594360"/>
+          </a:xfrm>
+          <a:prstGeom prst="rect">
+            <a:avLst/>
+          </a:prstGeom>
+          <a:noFill/>
+          <a:ln/>
+        </p:spPr>
+        <p:txBody>
+          <a:bodyPr wrap="square" lIns="0" tIns="0" rIns="0" bIns="0" rtlCol="0" anchor="ctr">
+            <a:normAutofit/>
+          </a:bodyPr>
+          <a:lstStyle/>
+          <a:p>
+            <a:pPr indent="0" marL="0">
+              <a:buNone/>
+            </a:pPr>
+            <a:r>
+              <a:rPr lang="en-US" sz="2700" b="1" dirty="0">
+                <a:solidFill>
+                  <a:srgbClr val="172033"/>
+                </a:solidFill>
+                <a:latin typeface="Hiragino Sans GB" pitchFamily="34" charset="0"/>
+                <a:ea typeface="Hiragino Sans GB" pitchFamily="34" charset="-122"/>
+                <a:cs typeface="Hiragino Sans GB" pitchFamily="34" charset="-120"/>
+              </a:rPr>
+              <a:t>教师讲评：编程题评分证据</a:t>
+            </a:r>
+            <a:endParaRPr lang="en-US" sz="2700" dirty="0"/>
+          </a:p>
+        </p:txBody>
+      </p:sp>
+      <p:sp>
+        <p:nvSpPr>
+          <p:cNvPr id="5" name="Shape 2"/>
+          <p:cNvSpPr/>
+          <p:nvPr/>
+        </p:nvSpPr>
+        <p:spPr>
+          <a:xfrm>
+            <a:off x="822960" y="1508760"/>
+            <a:ext cx="594360" cy="594360"/>
+          </a:xfrm>
+          <a:prstGeom prst="ellipse">
+            <a:avLst/>
+          </a:prstGeom>
+          <a:solidFill>
+            <a:srgbClr val="F97316"/>
+          </a:solidFill>
+          <a:ln w="12700">
+            <a:solidFill>
+              <a:srgbClr val="F97316"/>
+            </a:solidFill>
+            <a:prstDash val="solid"/>
+          </a:ln>
+        </p:spPr>
+      </p:sp>
+      <p:sp>
+        <p:nvSpPr>
+          <p:cNvPr id="6" name="Text 3"/>
+          <p:cNvSpPr/>
+          <p:nvPr/>
+        </p:nvSpPr>
+        <p:spPr>
+          <a:xfrm>
+            <a:off x="822960" y="1627632"/>
+            <a:ext cx="594360" cy="228600"/>
+          </a:xfrm>
+          <a:prstGeom prst="rect">
+            <a:avLst/>
+          </a:prstGeom>
+          <a:noFill/>
+          <a:ln/>
+        </p:spPr>
+        <p:txBody>
+          <a:bodyPr wrap="square" lIns="0" tIns="0" rIns="0" bIns="0" rtlCol="0" anchor="ctr"/>
+          <a:lstStyle/>
+          <a:p>
+            <a:pPr algn="ctr" indent="0" marL="0">
+              <a:buNone/>
+            </a:pPr>
+            <a:r>
+              <a:rPr lang="en-US" b="1" dirty="0">
+                <a:solidFill>
+                  <a:srgbClr val="FFFFFF"/>
+                </a:solidFill>
+                <a:latin typeface="Hiragino Sans GB" pitchFamily="34" charset="0"/>
+                <a:ea typeface="Hiragino Sans GB" pitchFamily="34" charset="-122"/>
+                <a:cs typeface="Hiragino Sans GB" pitchFamily="34" charset="-120"/>
+              </a:rPr>
+              <a:t>1</a:t>
+            </a:r>
+            <a:endParaRPr lang="en-US" dirty="0"/>
+          </a:p>
+        </p:txBody>
+      </p:sp>
+      <p:sp>
+        <p:nvSpPr>
+          <p:cNvPr id="7" name="Text 4"/>
+          <p:cNvSpPr/>
+          <p:nvPr/>
+        </p:nvSpPr>
+        <p:spPr>
+          <a:xfrm>
+            <a:off x="1691640" y="1481328"/>
+            <a:ext cx="9601200" cy="685800"/>
+          </a:xfrm>
+          <a:prstGeom prst="rect">
+            <a:avLst/>
+          </a:prstGeom>
+          <a:noFill/>
+          <a:ln/>
+        </p:spPr>
+        <p:txBody>
+          <a:bodyPr wrap="square" lIns="381" tIns="381" rIns="381" bIns="381" rtlCol="0" anchor="ctr">
+            <a:normAutofit/>
+          </a:bodyPr>
+          <a:lstStyle/>
+          <a:p>
+            <a:pPr indent="0" marL="0">
+              <a:buNone/>
+            </a:pPr>
+            <a:r>
+              <a:rPr lang="en-US" sz="2200" dirty="0">
+                <a:solidFill>
+                  <a:srgbClr val="172033"/>
+                </a:solidFill>
+                <a:latin typeface="Hiragino Sans GB" pitchFamily="34" charset="0"/>
+                <a:ea typeface="Hiragino Sans GB" pitchFamily="34" charset="-122"/>
+                <a:cs typeface="Hiragino Sans GB" pitchFamily="34" charset="-120"/>
+              </a:rPr>
+              <a:t>读题、建模、边界、代码、评测</a:t>
+            </a:r>
+            <a:endParaRPr lang="en-US" sz="2200" dirty="0"/>
+          </a:p>
+        </p:txBody>
+      </p:sp>
+      <p:sp>
+        <p:nvSpPr>
+          <p:cNvPr id="8" name="Shape 5"/>
+          <p:cNvSpPr/>
+          <p:nvPr/>
+        </p:nvSpPr>
+        <p:spPr>
+          <a:xfrm>
+            <a:off x="822960" y="2606040"/>
+            <a:ext cx="594360" cy="594360"/>
+          </a:xfrm>
+          <a:prstGeom prst="ellipse">
+            <a:avLst/>
+          </a:prstGeom>
+          <a:solidFill>
+            <a:srgbClr val="F97316"/>
+          </a:solidFill>
+          <a:ln w="12700">
+            <a:solidFill>
+              <a:srgbClr val="F97316"/>
+            </a:solidFill>
+            <a:prstDash val="solid"/>
+          </a:ln>
+        </p:spPr>
+      </p:sp>
+      <p:sp>
+        <p:nvSpPr>
+          <p:cNvPr id="9" name="Text 6"/>
+          <p:cNvSpPr/>
+          <p:nvPr/>
+        </p:nvSpPr>
+        <p:spPr>
+          <a:xfrm>
+            <a:off x="822960" y="2724912"/>
+            <a:ext cx="594360" cy="228600"/>
+          </a:xfrm>
+          <a:prstGeom prst="rect">
+            <a:avLst/>
+          </a:prstGeom>
+          <a:noFill/>
+          <a:ln/>
+        </p:spPr>
+        <p:txBody>
+          <a:bodyPr wrap="square" lIns="0" tIns="0" rIns="0" bIns="0" rtlCol="0" anchor="ctr"/>
+          <a:lstStyle/>
+          <a:p>
+            <a:pPr algn="ctr" indent="0" marL="0">
+              <a:buNone/>
+            </a:pPr>
+            <a:r>
+              <a:rPr lang="en-US" b="1" dirty="0">
+                <a:solidFill>
+                  <a:srgbClr val="FFFFFF"/>
+                </a:solidFill>
+                <a:latin typeface="Hiragino Sans GB" pitchFamily="34" charset="0"/>
+                <a:ea typeface="Hiragino Sans GB" pitchFamily="34" charset="-122"/>
+                <a:cs typeface="Hiragino Sans GB" pitchFamily="34" charset="-120"/>
+              </a:rPr>
+              <a:t>2</a:t>
+            </a:r>
+            <a:endParaRPr lang="en-US" dirty="0"/>
+          </a:p>
+        </p:txBody>
+      </p:sp>
+      <p:sp>
+        <p:nvSpPr>
+          <p:cNvPr id="10" name="Text 7"/>
+          <p:cNvSpPr/>
+          <p:nvPr/>
+        </p:nvSpPr>
+        <p:spPr>
+          <a:xfrm>
+            <a:off x="1691640" y="2578608"/>
+            <a:ext cx="9601200" cy="685800"/>
+          </a:xfrm>
+          <a:prstGeom prst="rect">
+            <a:avLst/>
+          </a:prstGeom>
+          <a:noFill/>
+          <a:ln/>
+        </p:spPr>
+        <p:txBody>
+          <a:bodyPr wrap="square" lIns="381" tIns="381" rIns="381" bIns="381" rtlCol="0" anchor="ctr">
+            <a:normAutofit/>
+          </a:bodyPr>
+          <a:lstStyle/>
+          <a:p>
+            <a:pPr indent="0" marL="0">
+              <a:buNone/>
+            </a:pPr>
+            <a:r>
+              <a:rPr lang="en-US" sz="2200" dirty="0">
+                <a:solidFill>
+                  <a:srgbClr val="172033"/>
+                </a:solidFill>
+                <a:latin typeface="Hiragino Sans GB" pitchFamily="34" charset="0"/>
+                <a:ea typeface="Hiragino Sans GB" pitchFamily="34" charset="-122"/>
+                <a:cs typeface="Hiragino Sans GB" pitchFamily="34" charset="-120"/>
+              </a:rPr>
+              <a:t>先保可得分部分，再完善特殊数据</a:t>
+            </a:r>
+            <a:endParaRPr lang="en-US" sz="2200" dirty="0"/>
+          </a:p>
+        </p:txBody>
+      </p:sp>
+      <p:sp>
+        <p:nvSpPr>
+          <p:cNvPr id="11" name="Shape 8"/>
+          <p:cNvSpPr/>
+          <p:nvPr/>
+        </p:nvSpPr>
+        <p:spPr>
+          <a:xfrm>
+            <a:off x="822960" y="3703320"/>
+            <a:ext cx="594360" cy="594360"/>
+          </a:xfrm>
+          <a:prstGeom prst="ellipse">
+            <a:avLst/>
+          </a:prstGeom>
+          <a:solidFill>
+            <a:srgbClr val="F97316"/>
+          </a:solidFill>
+          <a:ln w="12700">
+            <a:solidFill>
+              <a:srgbClr val="F97316"/>
+            </a:solidFill>
+            <a:prstDash val="solid"/>
+          </a:ln>
+        </p:spPr>
+      </p:sp>
+      <p:sp>
+        <p:nvSpPr>
+          <p:cNvPr id="12" name="Text 9"/>
+          <p:cNvSpPr/>
+          <p:nvPr/>
+        </p:nvSpPr>
+        <p:spPr>
+          <a:xfrm>
+            <a:off x="822960" y="3822192"/>
+            <a:ext cx="594360" cy="228600"/>
+          </a:xfrm>
+          <a:prstGeom prst="rect">
+            <a:avLst/>
+          </a:prstGeom>
+          <a:noFill/>
+          <a:ln/>
+        </p:spPr>
+        <p:txBody>
+          <a:bodyPr wrap="square" lIns="0" tIns="0" rIns="0" bIns="0" rtlCol="0" anchor="ctr"/>
+          <a:lstStyle/>
+          <a:p>
+            <a:pPr algn="ctr" indent="0" marL="0">
+              <a:buNone/>
+            </a:pPr>
+            <a:r>
+              <a:rPr lang="en-US" b="1" dirty="0">
+                <a:solidFill>
+                  <a:srgbClr val="FFFFFF"/>
+                </a:solidFill>
+                <a:latin typeface="Hiragino Sans GB" pitchFamily="34" charset="0"/>
+                <a:ea typeface="Hiragino Sans GB" pitchFamily="34" charset="-122"/>
+                <a:cs typeface="Hiragino Sans GB" pitchFamily="34" charset="-120"/>
+              </a:rPr>
+              <a:t>3</a:t>
+            </a:r>
+            <a:endParaRPr lang="en-US" dirty="0"/>
+          </a:p>
+        </p:txBody>
+      </p:sp>
+      <p:sp>
+        <p:nvSpPr>
+          <p:cNvPr id="13" name="Text 10"/>
+          <p:cNvSpPr/>
+          <p:nvPr/>
+        </p:nvSpPr>
+        <p:spPr>
+          <a:xfrm>
+            <a:off x="1691640" y="3675888"/>
+            <a:ext cx="9601200" cy="685800"/>
+          </a:xfrm>
+          <a:prstGeom prst="rect">
+            <a:avLst/>
+          </a:prstGeom>
+          <a:noFill/>
+          <a:ln/>
+        </p:spPr>
+        <p:txBody>
+          <a:bodyPr wrap="square" lIns="381" tIns="381" rIns="381" bIns="381" rtlCol="0" anchor="ctr">
+            <a:normAutofit/>
+          </a:bodyPr>
+          <a:lstStyle/>
+          <a:p>
+            <a:pPr indent="0" marL="0">
+              <a:buNone/>
+            </a:pPr>
+            <a:r>
+              <a:rPr lang="en-US" sz="2200" dirty="0">
+                <a:solidFill>
+                  <a:srgbClr val="172033"/>
+                </a:solidFill>
+                <a:latin typeface="Hiragino Sans GB" pitchFamily="34" charset="0"/>
+                <a:ea typeface="Hiragino Sans GB" pitchFamily="34" charset="-122"/>
+                <a:cs typeface="Hiragino Sans GB" pitchFamily="34" charset="-120"/>
+              </a:rPr>
+              <a:t>独立完成且OJ通过</a:t>
+            </a:r>
+            <a:endParaRPr lang="en-US" sz="2200" dirty="0"/>
+          </a:p>
+        </p:txBody>
+      </p:sp>
+      <p:sp>
+        <p:nvSpPr>
+          <p:cNvPr id="14" name="Shape 11"/>
+          <p:cNvSpPr/>
+          <p:nvPr/>
+        </p:nvSpPr>
+        <p:spPr>
+          <a:xfrm>
+            <a:off x="822960" y="4800600"/>
+            <a:ext cx="594360" cy="594360"/>
+          </a:xfrm>
+          <a:prstGeom prst="ellipse">
+            <a:avLst/>
+          </a:prstGeom>
+          <a:solidFill>
+            <a:srgbClr val="0F9F79"/>
+          </a:solidFill>
+          <a:ln w="12700">
+            <a:solidFill>
+              <a:srgbClr val="0F9F79"/>
+            </a:solidFill>
+            <a:prstDash val="solid"/>
+          </a:ln>
+        </p:spPr>
+      </p:sp>
+      <p:sp>
+        <p:nvSpPr>
+          <p:cNvPr id="15" name="Text 12"/>
+          <p:cNvSpPr/>
+          <p:nvPr/>
+        </p:nvSpPr>
+        <p:spPr>
+          <a:xfrm>
+            <a:off x="822960" y="4919472"/>
+            <a:ext cx="594360" cy="228600"/>
+          </a:xfrm>
+          <a:prstGeom prst="rect">
+            <a:avLst/>
+          </a:prstGeom>
+          <a:noFill/>
+          <a:ln/>
+        </p:spPr>
+        <p:txBody>
+          <a:bodyPr wrap="square" lIns="0" tIns="0" rIns="0" bIns="0" rtlCol="0" anchor="ctr"/>
+          <a:lstStyle/>
+          <a:p>
+            <a:pPr algn="ctr" indent="0" marL="0">
+              <a:buNone/>
+            </a:pPr>
+            <a:r>
+              <a:rPr lang="en-US" b="1" dirty="0">
+                <a:solidFill>
+                  <a:srgbClr val="FFFFFF"/>
+                </a:solidFill>
+                <a:latin typeface="Hiragino Sans GB" pitchFamily="34" charset="0"/>
+                <a:ea typeface="Hiragino Sans GB" pitchFamily="34" charset="-122"/>
+                <a:cs typeface="Hiragino Sans GB" pitchFamily="34" charset="-120"/>
+              </a:rPr>
+              <a:t>4</a:t>
+            </a:r>
+            <a:endParaRPr lang="en-US" dirty="0"/>
+          </a:p>
+        </p:txBody>
+      </p:sp>
+      <p:sp>
+        <p:nvSpPr>
+          <p:cNvPr id="16" name="Text 13"/>
+          <p:cNvSpPr/>
+          <p:nvPr/>
+        </p:nvSpPr>
+        <p:spPr>
+          <a:xfrm>
+            <a:off x="1691640" y="4773168"/>
+            <a:ext cx="9601200" cy="685800"/>
+          </a:xfrm>
+          <a:prstGeom prst="rect">
+            <a:avLst/>
+          </a:prstGeom>
+          <a:noFill/>
+          <a:ln/>
+        </p:spPr>
+        <p:txBody>
+          <a:bodyPr wrap="square" lIns="381" tIns="381" rIns="381" bIns="381" rtlCol="0" anchor="ctr">
+            <a:normAutofit/>
+          </a:bodyPr>
+          <a:lstStyle/>
+          <a:p>
+            <a:pPr indent="0" marL="0">
+              <a:buNone/>
+            </a:pPr>
+            <a:r>
+              <a:rPr lang="en-US" sz="2200" dirty="0">
+                <a:solidFill>
+                  <a:srgbClr val="172033"/>
+                </a:solidFill>
+                <a:latin typeface="Hiragino Sans GB" pitchFamily="34" charset="0"/>
+                <a:ea typeface="Hiragino Sans GB" pitchFamily="34" charset="-122"/>
+                <a:cs typeface="Hiragino Sans GB" pitchFamily="34" charset="-120"/>
+              </a:rPr>
+              <a:t>记录提示级别，24小时内复测</a:t>
+            </a:r>
+            <a:endParaRPr lang="en-US" sz="2200" dirty="0"/>
+          </a:p>
+        </p:txBody>
+      </p:sp>
+      <p:sp>
+        <p:nvSpPr>
+          <p:cNvPr id="17" name="Text 14"/>
+          <p:cNvSpPr/>
+          <p:nvPr/>
+        </p:nvSpPr>
+        <p:spPr>
+          <a:xfrm>
+            <a:off x="658368" y="6473952"/>
+            <a:ext cx="1828800" cy="182880"/>
+          </a:xfrm>
+          <a:prstGeom prst="rect">
+            <a:avLst/>
+          </a:prstGeom>
+          <a:noFill/>
+          <a:ln/>
+        </p:spPr>
+        <p:txBody>
+          <a:bodyPr wrap="square" lIns="0" tIns="0" rIns="0" bIns="0" rtlCol="0" anchor="ctr"/>
+          <a:lstStyle/>
+          <a:p>
+            <a:pPr indent="0" marL="0">
+              <a:buNone/>
+            </a:pPr>
+            <a:r>
+              <a:rPr lang="en-US" sz="1000" dirty="0">
+                <a:solidFill>
+                  <a:srgbClr val="64748B"/>
+                </a:solidFill>
+                <a:latin typeface="Hiragino Sans GB" pitchFamily="34" charset="0"/>
+                <a:ea typeface="Hiragino Sans GB" pitchFamily="34" charset="-122"/>
+                <a:cs typeface="Hiragino Sans GB" pitchFamily="34" charset="-120"/>
+              </a:rPr>
+              <a:t>童澄未来</a:t>
+            </a:r>
+            <a:endParaRPr lang="en-US" sz="1000" dirty="0"/>
+          </a:p>
+        </p:txBody>
+      </p:sp>
+    </p:spTree>
+  </p:cSld>
+  <p:clrMapOvr>
+    <a:masterClrMapping/>
+  </p:clrMapOvr>
+</p:sld>
+</file>
+
+<file path=ppt/slides/slide28.xml><?xml version="1.0" encoding="utf-8"?>
+<p:sld xmlns:a="http://schemas.openxmlformats.org/drawingml/2006/main" xmlns:r="http://schemas.openxmlformats.org/officeDocument/2006/relationships" xmlns:p="http://schemas.openxmlformats.org/presentationml/2006/main">
+  <p:cSld name="Slide 28">
+    <p:bg>
+      <p:bgPr>
+        <a:solidFill>
+          <a:srgbClr val="FCFCFD"/>
+        </a:solidFill>
+      </p:bgPr>
+    </p:bg>
+    <p:spTree>
+      <p:nvGrpSpPr>
+        <p:cNvPr id="1" name=""/>
+        <p:cNvGrpSpPr/>
+        <p:nvPr/>
+      </p:nvGrpSpPr>
+      <p:grpSpPr>
+        <a:xfrm>
+          <a:off x="0" y="0"/>
+          <a:ext cx="0" cy="0"/>
+          <a:chOff x="0" y="0"/>
+          <a:chExt cx="0" cy="0"/>
+        </a:xfrm>
+      </p:grpSpPr>
+      <p:sp>
+        <p:nvSpPr>
+          <p:cNvPr id="3" name="Text 0"/>
+          <p:cNvSpPr/>
+          <p:nvPr/>
+        </p:nvSpPr>
+        <p:spPr>
+          <a:xfrm>
+            <a:off x="658368" y="292608"/>
+            <a:ext cx="5029200" cy="256032"/>
+          </a:xfrm>
+          <a:prstGeom prst="rect">
+            <a:avLst/>
+          </a:prstGeom>
+          <a:noFill/>
+          <a:ln/>
+        </p:spPr>
+        <p:txBody>
+          <a:bodyPr wrap="square" lIns="0" tIns="0" rIns="0" bIns="0" rtlCol="0" anchor="ctr"/>
+          <a:lstStyle/>
+          <a:p>
+            <a:pPr indent="0" marL="0">
+              <a:buNone/>
+            </a:pPr>
+            <a:r>
+              <a:rPr lang="en-US" sz="1100" b="1" dirty="0">
+                <a:solidFill>
+                  <a:srgbClr val="F97316"/>
+                </a:solidFill>
+                <a:latin typeface="Hiragino Sans GB" pitchFamily="34" charset="0"/>
+                <a:ea typeface="Hiragino Sans GB" pitchFamily="34" charset="-122"/>
+                <a:cs typeface="Hiragino Sans GB" pitchFamily="34" charset="-120"/>
+              </a:rPr>
+              <a:t>童澄课堂 · 28</a:t>
+            </a:r>
+            <a:endParaRPr lang="en-US" sz="1100" dirty="0"/>
+          </a:p>
+        </p:txBody>
+      </p:sp>
+      <p:sp>
+        <p:nvSpPr>
+          <p:cNvPr id="4" name="Text 1"/>
+          <p:cNvSpPr/>
+          <p:nvPr/>
+        </p:nvSpPr>
+        <p:spPr>
+          <a:xfrm>
+            <a:off x="658368" y="658368"/>
+            <a:ext cx="10789920" cy="594360"/>
+          </a:xfrm>
+          <a:prstGeom prst="rect">
+            <a:avLst/>
+          </a:prstGeom>
+          <a:noFill/>
+          <a:ln/>
+        </p:spPr>
+        <p:txBody>
+          <a:bodyPr wrap="square" lIns="0" tIns="0" rIns="0" bIns="0" rtlCol="0" anchor="ctr">
+            <a:normAutofit/>
+          </a:bodyPr>
+          <a:lstStyle/>
+          <a:p>
+            <a:pPr indent="0" marL="0">
+              <a:buNone/>
+            </a:pPr>
+            <a:r>
+              <a:rPr lang="en-US" sz="2700" b="1" dirty="0">
+                <a:solidFill>
+                  <a:srgbClr val="172033"/>
+                </a:solidFill>
+                <a:latin typeface="Hiragino Sans GB" pitchFamily="34" charset="0"/>
+                <a:ea typeface="Hiragino Sans GB" pitchFamily="34" charset="-122"/>
+                <a:cs typeface="Hiragino Sans GB" pitchFamily="34" charset="-120"/>
+              </a:rPr>
+              <a:t>教师讲评：两卷对照</a:t>
+            </a:r>
+            <a:endParaRPr lang="en-US" sz="2700" dirty="0"/>
+          </a:p>
+        </p:txBody>
+      </p:sp>
+      <p:sp>
+        <p:nvSpPr>
+          <p:cNvPr id="5" name="Text 2"/>
+          <p:cNvSpPr/>
+          <p:nvPr/>
+        </p:nvSpPr>
+        <p:spPr>
+          <a:xfrm>
+            <a:off x="658368" y="1417320"/>
+            <a:ext cx="6583680" cy="4480560"/>
+          </a:xfrm>
+          <a:prstGeom prst="rect">
+            <a:avLst/>
+          </a:prstGeom>
+          <a:solidFill>
+            <a:srgbClr val="111827"/>
+          </a:solidFill>
+          <a:ln/>
+        </p:spPr>
+        <p:txBody>
+          <a:bodyPr wrap="square" lIns="3556" tIns="3556" rIns="3556" bIns="3556" rtlCol="0" anchor="ctr">
+            <a:normAutofit/>
+          </a:bodyPr>
+          <a:lstStyle/>
+          <a:p>
+            <a:pPr indent="0" marL="0">
+              <a:buNone/>
+            </a:pPr>
+            <a:r>
+              <a:rPr lang="en-US" sz="1800" dirty="0">
+                <a:solidFill>
+                  <a:srgbClr val="F8FAFC"/>
+                </a:solidFill>
+                <a:latin typeface="Courier New" pitchFamily="34" charset="0"/>
+                <a:ea typeface="Courier New" pitchFamily="34" charset="-122"/>
+                <a:cs typeface="Courier New" pitchFamily="34" charset="-120"/>
+              </a:rPr>
+              <a:t>指标          模拟一   模拟二</a:t>
+            </a:r>
+            <a:endParaRPr lang="en-US" sz="1800" dirty="0"/>
+          </a:p>
+          <a:p>
+            <a:pPr indent="0" marL="0">
+              <a:buNone/>
+            </a:pPr>
+            <a:r>
+              <a:rPr lang="en-US" sz="1800" dirty="0">
+                <a:solidFill>
+                  <a:srgbClr val="F8FAFC"/>
+                </a:solidFill>
+                <a:latin typeface="Courier New" pitchFamily="34" charset="0"/>
+                <a:ea typeface="Courier New" pitchFamily="34" charset="-122"/>
+                <a:cs typeface="Courier New" pitchFamily="34" charset="-120"/>
+              </a:rPr>
+              <a:t>客观正确数      __      __</a:t>
+            </a:r>
+            <a:endParaRPr lang="en-US" sz="1800" dirty="0"/>
+          </a:p>
+          <a:p>
+            <a:pPr indent="0" marL="0">
+              <a:buNone/>
+            </a:pPr>
+            <a:r>
+              <a:rPr lang="en-US" sz="1800" dirty="0">
+                <a:solidFill>
+                  <a:srgbClr val="F8FAFC"/>
+                </a:solidFill>
+                <a:latin typeface="Courier New" pitchFamily="34" charset="0"/>
+                <a:ea typeface="Courier New" pitchFamily="34" charset="-122"/>
+                <a:cs typeface="Courier New" pitchFamily="34" charset="-120"/>
+              </a:rPr>
+              <a:t>编程通过数      __      __</a:t>
+            </a:r>
+            <a:endParaRPr lang="en-US" sz="1800" dirty="0"/>
+          </a:p>
+          <a:p>
+            <a:pPr indent="0" marL="0">
+              <a:buNone/>
+            </a:pPr>
+            <a:r>
+              <a:rPr lang="en-US" sz="1800" dirty="0">
+                <a:solidFill>
+                  <a:srgbClr val="F8FAFC"/>
+                </a:solidFill>
+                <a:latin typeface="Courier New" pitchFamily="34" charset="0"/>
+                <a:ea typeface="Courier New" pitchFamily="34" charset="-122"/>
+                <a:cs typeface="Courier New" pitchFamily="34" charset="-120"/>
+              </a:rPr>
+              <a:t>边界错误数      __      __</a:t>
+            </a:r>
+            <a:endParaRPr lang="en-US" sz="1800" dirty="0"/>
+          </a:p>
+          <a:p>
+            <a:pPr indent="0" marL="0">
+              <a:buNone/>
+            </a:pPr>
+            <a:r>
+              <a:rPr lang="en-US" sz="1800" dirty="0">
+                <a:solidFill>
+                  <a:srgbClr val="F8FAFC"/>
+                </a:solidFill>
+                <a:latin typeface="Courier New" pitchFamily="34" charset="0"/>
+                <a:ea typeface="Courier New" pitchFamily="34" charset="-122"/>
+                <a:cs typeface="Courier New" pitchFamily="34" charset="-120"/>
+              </a:rPr>
+              <a:t>完成用时        __      __</a:t>
+            </a:r>
+            <a:endParaRPr lang="en-US" sz="1800" dirty="0"/>
+          </a:p>
+        </p:txBody>
+      </p:sp>
+      <p:sp>
+        <p:nvSpPr>
+          <p:cNvPr id="6" name="Text 3"/>
+          <p:cNvSpPr/>
+          <p:nvPr/>
+        </p:nvSpPr>
+        <p:spPr>
+          <a:xfrm>
+            <a:off x="7543800" y="1554480"/>
+            <a:ext cx="3931920" cy="3931920"/>
+          </a:xfrm>
+          <a:prstGeom prst="rect">
+            <a:avLst/>
+          </a:prstGeom>
+          <a:noFill/>
+          <a:ln/>
+        </p:spPr>
+        <p:txBody>
+          <a:bodyPr wrap="square" lIns="1016" tIns="1016" rIns="1016" bIns="1016" rtlCol="0" anchor="ctr">
+            <a:normAutofit/>
+          </a:bodyPr>
+          <a:lstStyle/>
+          <a:p>
+            <a:pPr indent="0" marL="0">
+              <a:buNone/>
+            </a:pPr>
+            <a:r>
+              <a:rPr lang="en-US" sz="2100" dirty="0">
+                <a:solidFill>
+                  <a:srgbClr val="172033"/>
+                </a:solidFill>
+                <a:latin typeface="Hiragino Sans GB" pitchFamily="34" charset="0"/>
+                <a:ea typeface="Hiragino Sans GB" pitchFamily="34" charset="-122"/>
+                <a:cs typeface="Hiragino Sans GB" pitchFamily="34" charset="-120"/>
+              </a:rPr>
+              <a:t>关注错误类型是否减少，不只比较总分。</a:t>
+            </a:r>
+            <a:endParaRPr lang="en-US" sz="2100" dirty="0"/>
+          </a:p>
+        </p:txBody>
+      </p:sp>
+      <p:sp>
+        <p:nvSpPr>
+          <p:cNvPr id="7" name="Text 4"/>
+          <p:cNvSpPr/>
+          <p:nvPr/>
+        </p:nvSpPr>
+        <p:spPr>
+          <a:xfrm>
+            <a:off x="658368" y="6473952"/>
+            <a:ext cx="1828800" cy="182880"/>
+          </a:xfrm>
+          <a:prstGeom prst="rect">
+            <a:avLst/>
+          </a:prstGeom>
+          <a:noFill/>
+          <a:ln/>
+        </p:spPr>
+        <p:txBody>
+          <a:bodyPr wrap="square" lIns="0" tIns="0" rIns="0" bIns="0" rtlCol="0" anchor="ctr"/>
+          <a:lstStyle/>
+          <a:p>
+            <a:pPr indent="0" marL="0">
+              <a:buNone/>
+            </a:pPr>
+            <a:r>
+              <a:rPr lang="en-US" sz="1000" dirty="0">
+                <a:solidFill>
+                  <a:srgbClr val="64748B"/>
+                </a:solidFill>
+                <a:latin typeface="Hiragino Sans GB" pitchFamily="34" charset="0"/>
+                <a:ea typeface="Hiragino Sans GB" pitchFamily="34" charset="-122"/>
+                <a:cs typeface="Hiragino Sans GB" pitchFamily="34" charset="-120"/>
+              </a:rPr>
+              <a:t>童澄未来</a:t>
+            </a:r>
+            <a:endParaRPr lang="en-US" sz="1000" dirty="0"/>
+          </a:p>
+        </p:txBody>
+      </p:sp>
+    </p:spTree>
+  </p:cSld>
+  <p:clrMapOvr>
+    <a:masterClrMapping/>
+  </p:clrMapOvr>
+</p:sld>
+</file>
+
+<file path=ppt/slides/slide29.xml><?xml version="1.0" encoding="utf-8"?>
+<p:sld xmlns:a="http://schemas.openxmlformats.org/drawingml/2006/main" xmlns:r="http://schemas.openxmlformats.org/officeDocument/2006/relationships" xmlns:p="http://schemas.openxmlformats.org/presentationml/2006/main">
+  <p:cSld name="Slide 29">
+    <p:bg>
+      <p:bgPr>
+        <a:solidFill>
+          <a:srgbClr val="FCFCFD"/>
+        </a:solidFill>
+      </p:bgPr>
+    </p:bg>
+    <p:spTree>
+      <p:nvGrpSpPr>
+        <p:cNvPr id="1" name=""/>
+        <p:cNvGrpSpPr/>
+        <p:nvPr/>
+      </p:nvGrpSpPr>
+      <p:grpSpPr>
+        <a:xfrm>
+          <a:off x="0" y="0"/>
+          <a:ext cx="0" cy="0"/>
+          <a:chOff x="0" y="0"/>
+          <a:chExt cx="0" cy="0"/>
+        </a:xfrm>
+      </p:grpSpPr>
+      <p:sp>
+        <p:nvSpPr>
+          <p:cNvPr id="3" name="Text 0"/>
+          <p:cNvSpPr/>
+          <p:nvPr/>
+        </p:nvSpPr>
+        <p:spPr>
+          <a:xfrm>
+            <a:off x="658368" y="292608"/>
+            <a:ext cx="5029200" cy="256032"/>
+          </a:xfrm>
+          <a:prstGeom prst="rect">
+            <a:avLst/>
+          </a:prstGeom>
+          <a:noFill/>
+          <a:ln/>
+        </p:spPr>
+        <p:txBody>
+          <a:bodyPr wrap="square" lIns="0" tIns="0" rIns="0" bIns="0" rtlCol="0" anchor="ctr"/>
+          <a:lstStyle/>
+          <a:p>
+            <a:pPr indent="0" marL="0">
+              <a:buNone/>
+            </a:pPr>
+            <a:r>
+              <a:rPr lang="en-US" sz="1100" b="1" dirty="0">
+                <a:solidFill>
+                  <a:srgbClr val="F97316"/>
+                </a:solidFill>
+                <a:latin typeface="Hiragino Sans GB" pitchFamily="34" charset="0"/>
+                <a:ea typeface="Hiragino Sans GB" pitchFamily="34" charset="-122"/>
+                <a:cs typeface="Hiragino Sans GB" pitchFamily="34" charset="-120"/>
+              </a:rPr>
+              <a:t>童澄课堂 · 29</a:t>
+            </a:r>
+            <a:endParaRPr lang="en-US" sz="1100" dirty="0"/>
+          </a:p>
+        </p:txBody>
+      </p:sp>
+      <p:sp>
+        <p:nvSpPr>
+          <p:cNvPr id="4" name="Text 1"/>
+          <p:cNvSpPr/>
+          <p:nvPr/>
+        </p:nvSpPr>
+        <p:spPr>
+          <a:xfrm>
+            <a:off x="658368" y="658368"/>
+            <a:ext cx="10789920" cy="594360"/>
+          </a:xfrm>
+          <a:prstGeom prst="rect">
+            <a:avLst/>
+          </a:prstGeom>
+          <a:noFill/>
+          <a:ln/>
+        </p:spPr>
+        <p:txBody>
+          <a:bodyPr wrap="square" lIns="0" tIns="0" rIns="0" bIns="0" rtlCol="0" anchor="ctr">
+            <a:normAutofit/>
+          </a:bodyPr>
+          <a:lstStyle/>
+          <a:p>
+            <a:pPr indent="0" marL="0">
+              <a:buNone/>
+            </a:pPr>
+            <a:r>
+              <a:rPr lang="en-US" sz="2700" b="1" dirty="0">
+                <a:solidFill>
+                  <a:srgbClr val="172033"/>
+                </a:solidFill>
+                <a:latin typeface="Hiragino Sans GB" pitchFamily="34" charset="0"/>
+                <a:ea typeface="Hiragino Sans GB" pitchFamily="34" charset="-122"/>
+                <a:cs typeface="Hiragino Sans GB" pitchFamily="34" charset="-120"/>
+              </a:rPr>
+              <a:t>教师分层补给</a:t>
+            </a:r>
+            <a:endParaRPr lang="en-US" sz="2700" dirty="0"/>
+          </a:p>
+        </p:txBody>
+      </p:sp>
+      <p:sp>
+        <p:nvSpPr>
+          <p:cNvPr id="5" name="Shape 2"/>
+          <p:cNvSpPr/>
+          <p:nvPr/>
+        </p:nvSpPr>
+        <p:spPr>
+          <a:xfrm>
+            <a:off x="658368" y="1508760"/>
+            <a:ext cx="5257800" cy="4297680"/>
+          </a:xfrm>
+          <a:prstGeom prst="roundRect">
+            <a:avLst>
+              <a:gd name="adj" fmla="val 1702"/>
+            </a:avLst>
+          </a:prstGeom>
+          <a:solidFill>
+            <a:srgbClr val="FFFFFF"/>
+          </a:solidFill>
+          <a:ln w="12700">
+            <a:solidFill>
+              <a:srgbClr val="D8DEE9"/>
+            </a:solidFill>
+            <a:prstDash val="solid"/>
+          </a:ln>
+        </p:spPr>
+      </p:sp>
+      <p:sp>
+        <p:nvSpPr>
+          <p:cNvPr id="6" name="Text 3"/>
+          <p:cNvSpPr/>
+          <p:nvPr/>
+        </p:nvSpPr>
+        <p:spPr>
+          <a:xfrm>
+            <a:off x="978408" y="1828800"/>
+            <a:ext cx="4617720" cy="3657600"/>
+          </a:xfrm>
+          <a:prstGeom prst="rect">
+            <a:avLst/>
+          </a:prstGeom>
+          <a:noFill/>
+          <a:ln/>
+        </p:spPr>
+        <p:txBody>
+          <a:bodyPr wrap="square" lIns="508" tIns="508" rIns="508" bIns="508" rtlCol="0" anchor="ctr">
+            <a:normAutofit/>
+          </a:bodyPr>
+          <a:lstStyle/>
+          <a:p>
+            <a:pPr indent="0" marL="0">
+              <a:buNone/>
+            </a:pPr>
+            <a:r>
+              <a:rPr lang="en-US" sz="2200" dirty="0">
+                <a:solidFill>
+                  <a:srgbClr val="172033"/>
+                </a:solidFill>
+                <a:latin typeface="Hiragino Sans GB" pitchFamily="34" charset="0"/>
+                <a:ea typeface="Hiragino Sans GB" pitchFamily="34" charset="-122"/>
+                <a:cs typeface="Hiragino Sans GB" pitchFamily="34" charset="-120"/>
+              </a:rPr>
+              <a:t>函数、循环、数组下标、输入输出</a:t>
+            </a:r>
+            <a:endParaRPr lang="en-US" sz="2200" dirty="0"/>
+          </a:p>
+          <a:p>
+            <a:pPr indent="0" marL="0">
+              <a:buNone/>
+            </a:pPr>
+            <a:endParaRPr lang="en-US" sz="2200" dirty="0"/>
+          </a:p>
+          <a:p>
+            <a:pPr indent="0" marL="0">
+              <a:buNone/>
+            </a:pPr>
+            <a:r>
+              <a:rPr lang="en-US" sz="2200" dirty="0">
+                <a:solidFill>
+                  <a:srgbClr val="172033"/>
+                </a:solidFill>
+                <a:latin typeface="Hiragino Sans GB" pitchFamily="34" charset="0"/>
+                <a:ea typeface="Hiragino Sans GB" pitchFamily="34" charset="-122"/>
+                <a:cs typeface="Hiragino Sans GB" pitchFamily="34" charset="-120"/>
+              </a:rPr>
+              <a:t>递归、字符数组、枚举与模拟</a:t>
+            </a:r>
+            <a:endParaRPr lang="en-US" sz="2200" dirty="0"/>
+          </a:p>
+        </p:txBody>
+      </p:sp>
+      <p:sp>
+        <p:nvSpPr>
+          <p:cNvPr id="7" name="Shape 4"/>
+          <p:cNvSpPr/>
+          <p:nvPr/>
+        </p:nvSpPr>
+        <p:spPr>
+          <a:xfrm>
+            <a:off x="6263640" y="1508760"/>
+            <a:ext cx="5257800" cy="4297680"/>
+          </a:xfrm>
+          <a:prstGeom prst="roundRect">
+            <a:avLst>
+              <a:gd name="adj" fmla="val 1702"/>
+            </a:avLst>
+          </a:prstGeom>
+          <a:solidFill>
+            <a:srgbClr val="FFFFFF"/>
+          </a:solidFill>
+          <a:ln w="12700">
+            <a:solidFill>
+              <a:srgbClr val="D8DEE9"/>
+            </a:solidFill>
+            <a:prstDash val="solid"/>
+          </a:ln>
+        </p:spPr>
+      </p:sp>
+      <p:sp>
+        <p:nvSpPr>
+          <p:cNvPr id="8" name="Text 5"/>
+          <p:cNvSpPr/>
+          <p:nvPr/>
+        </p:nvSpPr>
+        <p:spPr>
+          <a:xfrm>
+            <a:off x="6583680" y="1828800"/>
+            <a:ext cx="4617720" cy="3657600"/>
+          </a:xfrm>
+          <a:prstGeom prst="rect">
+            <a:avLst/>
+          </a:prstGeom>
+          <a:noFill/>
+          <a:ln/>
+        </p:spPr>
+        <p:txBody>
+          <a:bodyPr wrap="square" lIns="508" tIns="508" rIns="508" bIns="508" rtlCol="0" anchor="ctr">
+            <a:normAutofit/>
+          </a:bodyPr>
+          <a:lstStyle/>
+          <a:p>
+            <a:pPr indent="0" marL="0">
+              <a:buNone/>
+            </a:pPr>
+            <a:r>
+              <a:rPr lang="en-US" sz="2200" dirty="0">
+                <a:solidFill>
+                  <a:srgbClr val="172033"/>
+                </a:solidFill>
+                <a:latin typeface="Hiragino Sans GB" pitchFamily="34" charset="0"/>
+                <a:ea typeface="Hiragino Sans GB" pitchFamily="34" charset="-122"/>
+                <a:cs typeface="Hiragino Sans GB" pitchFamily="34" charset="-120"/>
+              </a:rPr>
+              <a:t>二维边界、综合调试、满分检查</a:t>
+            </a:r>
+            <a:endParaRPr lang="en-US" sz="2200" dirty="0"/>
+          </a:p>
+          <a:p>
+            <a:pPr indent="0" marL="0">
+              <a:buNone/>
+            </a:pPr>
+            <a:endParaRPr lang="en-US" sz="2200" dirty="0"/>
+          </a:p>
+          <a:p>
+            <a:pPr indent="0" marL="0">
+              <a:buNone/>
+            </a:pPr>
+            <a:r>
+              <a:rPr lang="en-US" sz="2200" dirty="0">
+                <a:solidFill>
+                  <a:srgbClr val="172033"/>
+                </a:solidFill>
+                <a:latin typeface="Hiragino Sans GB" pitchFamily="34" charset="0"/>
+                <a:ea typeface="Hiragino Sans GB" pitchFamily="34" charset="-122"/>
+                <a:cs typeface="Hiragino Sans GB" pitchFamily="34" charset="-120"/>
+              </a:rPr>
+              <a:t>连续两道同类题独立A</a:t>
+            </a:r>
+            <a:endParaRPr lang="en-US" sz="2200" dirty="0"/>
+          </a:p>
+        </p:txBody>
+      </p:sp>
+      <p:sp>
+        <p:nvSpPr>
+          <p:cNvPr id="9" name="Text 6"/>
           <p:cNvSpPr/>
           <p:nvPr/>
         </p:nvSpPr>
@@ -8505,7 +11090,7 @@
                 <a:ea typeface="Hiragino Sans GB" pitchFamily="34" charset="-122"/>
                 <a:cs typeface="Hiragino Sans GB" pitchFamily="34" charset="-120"/>
               </a:rPr>
-              <a:t>三级知识地图：函数与递归</a:t>
+              <a:t>整卷结构与计分</a:t>
             </a:r>
             <a:endParaRPr lang="en-US" sz="2700" dirty="0"/>
           </a:p>
@@ -8610,7 +11195,7 @@
                 <a:ea typeface="Hiragino Sans GB" pitchFamily="34" charset="-122"/>
                 <a:cs typeface="Hiragino Sans GB" pitchFamily="34" charset="-120"/>
               </a:rPr>
-              <a:t>声明、定义、调用、返回值</a:t>
+              <a:t>每题2分，共20分</a:t>
             </a:r>
             <a:endParaRPr lang="en-US" sz="2200" dirty="0"/>
           </a:p>
@@ -8715,7 +11300,7 @@
                 <a:ea typeface="Hiragino Sans GB" pitchFamily="34" charset="-122"/>
                 <a:cs typeface="Hiragino Sans GB" pitchFamily="34" charset="-120"/>
               </a:rPr>
-              <a:t>值传递、引用传递、作用域</a:t>
+              <a:t>每题30分，共60分</a:t>
             </a:r>
             <a:endParaRPr lang="en-US" sz="2200" dirty="0"/>
           </a:p>
@@ -8820,7 +11405,7 @@
                 <a:ea typeface="Hiragino Sans GB" pitchFamily="34" charset="-122"/>
                 <a:cs typeface="Hiragino Sans GB" pitchFamily="34" charset="-120"/>
               </a:rPr>
-              <a:t>终止、缩小、返回</a:t>
+              <a:t>120分钟，总分100分</a:t>
             </a:r>
             <a:endParaRPr lang="en-US" sz="2200" dirty="0"/>
           </a:p>
@@ -8925,7 +11510,7 @@
                 <a:ea typeface="Hiragino Sans GB" pitchFamily="34" charset="-122"/>
                 <a:cs typeface="Hiragino Sans GB" pitchFamily="34" charset="-120"/>
               </a:rPr>
-              <a:t>检查所有返回路径</a:t>
+              <a:t>课程采用总纲确定的10选择＋10判断＋2编程结构；当次正式考试以准考证与通知为准。</a:t>
             </a:r>
             <a:endParaRPr lang="en-US" sz="2200" dirty="0"/>
           </a:p>
@@ -8934,6 +11519,262 @@
       <p:sp>
         <p:nvSpPr>
           <p:cNvPr id="17" name="Text 14"/>
+          <p:cNvSpPr/>
+          <p:nvPr/>
+        </p:nvSpPr>
+        <p:spPr>
+          <a:xfrm>
+            <a:off x="658368" y="6473952"/>
+            <a:ext cx="1828800" cy="182880"/>
+          </a:xfrm>
+          <a:prstGeom prst="rect">
+            <a:avLst/>
+          </a:prstGeom>
+          <a:noFill/>
+          <a:ln/>
+        </p:spPr>
+        <p:txBody>
+          <a:bodyPr wrap="square" lIns="0" tIns="0" rIns="0" bIns="0" rtlCol="0" anchor="ctr"/>
+          <a:lstStyle/>
+          <a:p>
+            <a:pPr indent="0" marL="0">
+              <a:buNone/>
+            </a:pPr>
+            <a:r>
+              <a:rPr lang="en-US" sz="1000" dirty="0">
+                <a:solidFill>
+                  <a:srgbClr val="64748B"/>
+                </a:solidFill>
+                <a:latin typeface="Hiragino Sans GB" pitchFamily="34" charset="0"/>
+                <a:ea typeface="Hiragino Sans GB" pitchFamily="34" charset="-122"/>
+                <a:cs typeface="Hiragino Sans GB" pitchFamily="34" charset="-120"/>
+              </a:rPr>
+              <a:t>童澄未来</a:t>
+            </a:r>
+            <a:endParaRPr lang="en-US" sz="1000" dirty="0"/>
+          </a:p>
+        </p:txBody>
+      </p:sp>
+    </p:spTree>
+  </p:cSld>
+  <p:clrMapOvr>
+    <a:masterClrMapping/>
+  </p:clrMapOvr>
+</p:sld>
+</file>
+
+<file path=ppt/slides/slide30.xml><?xml version="1.0" encoding="utf-8"?>
+<p:sld xmlns:a="http://schemas.openxmlformats.org/drawingml/2006/main" xmlns:r="http://schemas.openxmlformats.org/officeDocument/2006/relationships" xmlns:p="http://schemas.openxmlformats.org/presentationml/2006/main">
+  <p:cSld name="Slide 30">
+    <p:bg>
+      <p:bgPr>
+        <a:solidFill>
+          <a:srgbClr val="FCFCFD"/>
+        </a:solidFill>
+      </p:bgPr>
+    </p:bg>
+    <p:spTree>
+      <p:nvGrpSpPr>
+        <p:cNvPr id="1" name=""/>
+        <p:cNvGrpSpPr/>
+        <p:nvPr/>
+      </p:nvGrpSpPr>
+      <p:grpSpPr>
+        <a:xfrm>
+          <a:off x="0" y="0"/>
+          <a:ext cx="0" cy="0"/>
+          <a:chOff x="0" y="0"/>
+          <a:chExt cx="0" cy="0"/>
+        </a:xfrm>
+      </p:grpSpPr>
+      <p:sp>
+        <p:nvSpPr>
+          <p:cNvPr id="3" name="Text 0"/>
+          <p:cNvSpPr/>
+          <p:nvPr/>
+        </p:nvSpPr>
+        <p:spPr>
+          <a:xfrm>
+            <a:off x="658368" y="292608"/>
+            <a:ext cx="5029200" cy="256032"/>
+          </a:xfrm>
+          <a:prstGeom prst="rect">
+            <a:avLst/>
+          </a:prstGeom>
+          <a:noFill/>
+          <a:ln/>
+        </p:spPr>
+        <p:txBody>
+          <a:bodyPr wrap="square" lIns="0" tIns="0" rIns="0" bIns="0" rtlCol="0" anchor="ctr"/>
+          <a:lstStyle/>
+          <a:p>
+            <a:pPr indent="0" marL="0">
+              <a:buNone/>
+            </a:pPr>
+            <a:r>
+              <a:rPr lang="en-US" sz="1100" b="1" dirty="0">
+                <a:solidFill>
+                  <a:srgbClr val="F97316"/>
+                </a:solidFill>
+                <a:latin typeface="Hiragino Sans GB" pitchFamily="34" charset="0"/>
+                <a:ea typeface="Hiragino Sans GB" pitchFamily="34" charset="-122"/>
+                <a:cs typeface="Hiragino Sans GB" pitchFamily="34" charset="-120"/>
+              </a:rPr>
+              <a:t>童澄课堂 · 30</a:t>
+            </a:r>
+            <a:endParaRPr lang="en-US" sz="1100" dirty="0"/>
+          </a:p>
+        </p:txBody>
+      </p:sp>
+      <p:sp>
+        <p:nvSpPr>
+          <p:cNvPr id="4" name="Text 1"/>
+          <p:cNvSpPr/>
+          <p:nvPr/>
+        </p:nvSpPr>
+        <p:spPr>
+          <a:xfrm>
+            <a:off x="658368" y="658368"/>
+            <a:ext cx="10789920" cy="594360"/>
+          </a:xfrm>
+          <a:prstGeom prst="rect">
+            <a:avLst/>
+          </a:prstGeom>
+          <a:noFill/>
+          <a:ln/>
+        </p:spPr>
+        <p:txBody>
+          <a:bodyPr wrap="square" lIns="0" tIns="0" rIns="0" bIns="0" rtlCol="0" anchor="ctr">
+            <a:normAutofit/>
+          </a:bodyPr>
+          <a:lstStyle/>
+          <a:p>
+            <a:pPr indent="0" marL="0">
+              <a:buNone/>
+            </a:pPr>
+            <a:r>
+              <a:rPr lang="en-US" sz="2700" b="1" dirty="0">
+                <a:solidFill>
+                  <a:srgbClr val="172033"/>
+                </a:solidFill>
+                <a:latin typeface="Hiragino Sans GB" pitchFamily="34" charset="0"/>
+                <a:ea typeface="Hiragino Sans GB" pitchFamily="34" charset="-122"/>
+                <a:cs typeface="Hiragino Sans GB" pitchFamily="34" charset="-120"/>
+              </a:rPr>
+              <a:t>教师收课：把分数变成下一步行动</a:t>
+            </a:r>
+            <a:endParaRPr lang="en-US" sz="2700" dirty="0"/>
+          </a:p>
+        </p:txBody>
+      </p:sp>
+      <p:sp>
+        <p:nvSpPr>
+          <p:cNvPr id="5" name="Shape 2"/>
+          <p:cNvSpPr/>
+          <p:nvPr/>
+        </p:nvSpPr>
+        <p:spPr>
+          <a:xfrm>
+            <a:off x="822960" y="1508760"/>
+            <a:ext cx="594360" cy="594360"/>
+          </a:xfrm>
+          <a:prstGeom prst="ellipse">
+            <a:avLst/>
+          </a:prstGeom>
+          <a:solidFill>
+            <a:srgbClr val="F97316"/>
+          </a:solidFill>
+          <a:ln w="12700">
+            <a:solidFill>
+              <a:srgbClr val="F97316"/>
+            </a:solidFill>
+            <a:prstDash val="solid"/>
+          </a:ln>
+        </p:spPr>
+      </p:sp>
+      <p:sp>
+        <p:nvSpPr>
+          <p:cNvPr id="6" name="Text 3"/>
+          <p:cNvSpPr/>
+          <p:nvPr/>
+        </p:nvSpPr>
+        <p:spPr>
+          <a:xfrm>
+            <a:off x="822960" y="1627632"/>
+            <a:ext cx="594360" cy="228600"/>
+          </a:xfrm>
+          <a:prstGeom prst="rect">
+            <a:avLst/>
+          </a:prstGeom>
+          <a:noFill/>
+          <a:ln/>
+        </p:spPr>
+        <p:txBody>
+          <a:bodyPr wrap="square" lIns="0" tIns="0" rIns="0" bIns="0" rtlCol="0" anchor="ctr"/>
+          <a:lstStyle/>
+          <a:p>
+            <a:pPr algn="ctr" indent="0" marL="0">
+              <a:buNone/>
+            </a:pPr>
+            <a:r>
+              <a:rPr lang="en-US" b="1" dirty="0">
+                <a:solidFill>
+                  <a:srgbClr val="FFFFFF"/>
+                </a:solidFill>
+                <a:latin typeface="Hiragino Sans GB" pitchFamily="34" charset="0"/>
+                <a:ea typeface="Hiragino Sans GB" pitchFamily="34" charset="-122"/>
+                <a:cs typeface="Hiragino Sans GB" pitchFamily="34" charset="-120"/>
+              </a:rPr>
+              <a:t>1</a:t>
+            </a:r>
+            <a:endParaRPr lang="en-US" dirty="0"/>
+          </a:p>
+        </p:txBody>
+      </p:sp>
+      <p:sp>
+        <p:nvSpPr>
+          <p:cNvPr id="7" name="Text 4"/>
+          <p:cNvSpPr/>
+          <p:nvPr/>
+        </p:nvSpPr>
+        <p:spPr>
+          <a:xfrm>
+            <a:off x="1691640" y="1481328"/>
+            <a:ext cx="9601200" cy="685800"/>
+          </a:xfrm>
+          <a:prstGeom prst="rect">
+            <a:avLst/>
+          </a:prstGeom>
+          <a:noFill/>
+          <a:ln/>
+        </p:spPr>
+        <p:txBody>
+          <a:bodyPr wrap="square" lIns="381" tIns="381" rIns="381" bIns="381" rtlCol="0" anchor="ctr">
+            <a:normAutofit/>
+          </a:bodyPr>
+          <a:lstStyle/>
+          <a:p>
+            <a:pPr indent="0" marL="0">
+              <a:buNone/>
+            </a:pPr>
+            <a:r>
+              <a:rPr lang="en-US" sz="2200" dirty="0">
+                <a:solidFill>
+                  <a:srgbClr val="172033"/>
+                </a:solidFill>
+                <a:latin typeface="Hiragino Sans GB" pitchFamily="34" charset="0"/>
+                <a:ea typeface="Hiragino Sans GB" pitchFamily="34" charset="-122"/>
+                <a:cs typeface="Hiragino Sans GB" pitchFamily="34" charset="-120"/>
+              </a:rPr>
+              <a:t>成绩只是结果，错因才决定下一步收成绩→看证据→分错因→定复测</a:t>
+            </a:r>
+            <a:endParaRPr lang="en-US" sz="2200" dirty="0"/>
+          </a:p>
+        </p:txBody>
+      </p:sp>
+      <p:sp>
+        <p:nvSpPr>
+          <p:cNvPr id="8" name="Text 5"/>
           <p:cNvSpPr/>
           <p:nvPr/>
         </p:nvSpPr>
@@ -9076,7 +11917,7 @@
                 <a:ea typeface="Hiragino Sans GB" pitchFamily="34" charset="-122"/>
                 <a:cs typeface="Hiragino Sans GB" pitchFamily="34" charset="-120"/>
               </a:rPr>
-              <a:t>三级知识地图：字符数组与库函数</a:t>
+              <a:t>函数：定义、声明与调用</a:t>
             </a:r>
             <a:endParaRPr lang="en-US" sz="2700" dirty="0"/>
           </a:p>
@@ -9084,50 +11925,25 @@
       </p:sp>
       <p:sp>
         <p:nvSpPr>
-          <p:cNvPr id="5" name="Shape 2"/>
-          <p:cNvSpPr/>
-          <p:nvPr/>
-        </p:nvSpPr>
-        <p:spPr>
-          <a:xfrm>
-            <a:off x="777240" y="1645920"/>
-            <a:ext cx="10607040" cy="4114800"/>
-          </a:xfrm>
-          <a:prstGeom prst="roundRect">
-            <a:avLst>
-              <a:gd name="adj" fmla="val 1778"/>
-            </a:avLst>
+          <p:cNvPr id="5" name="Text 2"/>
+          <p:cNvSpPr/>
+          <p:nvPr/>
+        </p:nvSpPr>
+        <p:spPr>
+          <a:xfrm>
+            <a:off x="658368" y="1417320"/>
+            <a:ext cx="6583680" cy="4480560"/>
+          </a:xfrm>
+          <a:prstGeom prst="rect">
+            <a:avLst/>
           </a:prstGeom>
           <a:solidFill>
-            <a:srgbClr val="FFFFFF"/>
+            <a:srgbClr val="111827"/>
           </a:solidFill>
-          <a:ln w="12700">
-            <a:solidFill>
-              <a:srgbClr val="D8DEE9"/>
-            </a:solidFill>
-            <a:prstDash val="solid"/>
-          </a:ln>
-        </p:spPr>
-      </p:sp>
-      <p:sp>
-        <p:nvSpPr>
-          <p:cNvPr id="6" name="Text 3"/>
-          <p:cNvSpPr/>
-          <p:nvPr/>
-        </p:nvSpPr>
-        <p:spPr>
-          <a:xfrm>
-            <a:off x="1097280" y="1965960"/>
-            <a:ext cx="9966960" cy="3474720"/>
-          </a:xfrm>
-          <a:prstGeom prst="rect">
-            <a:avLst/>
-          </a:prstGeom>
-          <a:noFill/>
-          <a:ln/>
-        </p:spPr>
-        <p:txBody>
-          <a:bodyPr wrap="square" lIns="508" tIns="508" rIns="508" bIns="508" rtlCol="0" anchor="ctr">
+          <a:ln/>
+        </p:spPr>
+        <p:txBody>
+          <a:bodyPr wrap="square" lIns="3556" tIns="3556" rIns="3556" bIns="3556" rtlCol="0" anchor="ctr">
             <a:normAutofit/>
           </a:bodyPr>
           <a:lstStyle/>
@@ -9136,7 +11952,82 @@
               <a:buNone/>
             </a:pPr>
             <a:r>
-              <a:rPr lang="en-US" sz="2200" dirty="0">
+              <a:rPr lang="en-US" sz="1800" dirty="0">
+                <a:solidFill>
+                  <a:srgbClr val="F8FAFC"/>
+                </a:solidFill>
+                <a:latin typeface="Courier New" pitchFamily="34" charset="0"/>
+                <a:ea typeface="Courier New" pitchFamily="34" charset="-122"/>
+                <a:cs typeface="Courier New" pitchFamily="34" charset="-120"/>
+              </a:rPr>
+              <a:t>返回类型 函数名(参数表);          // 声明</a:t>
+            </a:r>
+            <a:endParaRPr lang="en-US" sz="1800" dirty="0"/>
+          </a:p>
+          <a:p>
+            <a:pPr indent="0" marL="0">
+              <a:buNone/>
+            </a:pPr>
+            <a:r>
+              <a:rPr lang="en-US" sz="1800" dirty="0">
+                <a:solidFill>
+                  <a:srgbClr val="F8FAFC"/>
+                </a:solidFill>
+                <a:latin typeface="Courier New" pitchFamily="34" charset="0"/>
+                <a:ea typeface="Courier New" pitchFamily="34" charset="-122"/>
+                <a:cs typeface="Courier New" pitchFamily="34" charset="-120"/>
+              </a:rPr>
+              <a:t>返回类型 函数名(参数表) { ... }  // 定义</a:t>
+            </a:r>
+            <a:endParaRPr lang="en-US" sz="1800" dirty="0"/>
+          </a:p>
+          <a:p>
+            <a:pPr indent="0" marL="0">
+              <a:buNone/>
+            </a:pPr>
+            <a:r>
+              <a:rPr lang="en-US" sz="1800" dirty="0">
+                <a:solidFill>
+                  <a:srgbClr val="F8FAFC"/>
+                </a:solidFill>
+                <a:latin typeface="Courier New" pitchFamily="34" charset="0"/>
+                <a:ea typeface="Courier New" pitchFamily="34" charset="-122"/>
+                <a:cs typeface="Courier New" pitchFamily="34" charset="-120"/>
+              </a:rPr>
+              <a:t>结果变量 = 函数名(实参);         // 调用</a:t>
+            </a:r>
+            <a:endParaRPr lang="en-US" sz="1800" dirty="0"/>
+          </a:p>
+        </p:txBody>
+      </p:sp>
+      <p:sp>
+        <p:nvSpPr>
+          <p:cNvPr id="6" name="Text 3"/>
+          <p:cNvSpPr/>
+          <p:nvPr/>
+        </p:nvSpPr>
+        <p:spPr>
+          <a:xfrm>
+            <a:off x="7543800" y="1554480"/>
+            <a:ext cx="3931920" cy="3931920"/>
+          </a:xfrm>
+          <a:prstGeom prst="rect">
+            <a:avLst/>
+          </a:prstGeom>
+          <a:noFill/>
+          <a:ln/>
+        </p:spPr>
+        <p:txBody>
+          <a:bodyPr wrap="square" lIns="1016" tIns="1016" rIns="1016" bIns="1016" rtlCol="0" anchor="ctr">
+            <a:normAutofit/>
+          </a:bodyPr>
+          <a:lstStyle/>
+          <a:p>
+            <a:pPr indent="0" marL="0">
+              <a:buNone/>
+            </a:pPr>
+            <a:r>
+              <a:rPr lang="en-US" sz="2100" dirty="0">
                 <a:solidFill>
                   <a:srgbClr val="172033"/>
                 </a:solidFill>
@@ -9144,78 +12035,9 @@
                 <a:ea typeface="Hiragino Sans GB" pitchFamily="34" charset="-122"/>
                 <a:cs typeface="Hiragino Sans GB" pitchFamily="34" charset="-120"/>
               </a:rPr>
-              <a:t>容量要给\0留位置</a:t>
-            </a:r>
-            <a:endParaRPr lang="en-US" sz="2200" dirty="0"/>
-          </a:p>
-          <a:p>
-            <a:pPr indent="0" marL="0">
-              <a:buNone/>
-            </a:pPr>
-            <a:endParaRPr lang="en-US" sz="2200" dirty="0"/>
-          </a:p>
-          <a:p>
-            <a:pPr indent="0" marL="0">
-              <a:buNone/>
-            </a:pPr>
-            <a:r>
-              <a:rPr lang="en-US" sz="2200" dirty="0">
-                <a:solidFill>
-                  <a:srgbClr val="172033"/>
-                </a:solidFill>
-                <a:latin typeface="Hiragino Sans GB" pitchFamily="34" charset="0"/>
-                <a:ea typeface="Hiragino Sans GB" pitchFamily="34" charset="-122"/>
-                <a:cs typeface="Hiragino Sans GB" pitchFamily="34" charset="-120"/>
-              </a:rPr>
-              <a:t>strlen、strcpy、strcat、strcmp</a:t>
-            </a:r>
-            <a:endParaRPr lang="en-US" sz="2200" dirty="0"/>
-          </a:p>
-          <a:p>
-            <a:pPr indent="0" marL="0">
-              <a:buNone/>
-            </a:pPr>
-            <a:endParaRPr lang="en-US" sz="2200" dirty="0"/>
-          </a:p>
-          <a:p>
-            <a:pPr indent="0" marL="0">
-              <a:buNone/>
-            </a:pPr>
-            <a:r>
-              <a:rPr lang="en-US" sz="2200" dirty="0">
-                <a:solidFill>
-                  <a:srgbClr val="172033"/>
-                </a:solidFill>
-                <a:latin typeface="Hiragino Sans GB" pitchFamily="34" charset="0"/>
-                <a:ea typeface="Hiragino Sans GB" pitchFamily="34" charset="-122"/>
-                <a:cs typeface="Hiragino Sans GB" pitchFamily="34" charset="-120"/>
-              </a:rPr>
-              <a:t>大小写、数字与类别统计</a:t>
-            </a:r>
-            <a:endParaRPr lang="en-US" sz="2200" dirty="0"/>
-          </a:p>
-          <a:p>
-            <a:pPr indent="0" marL="0">
-              <a:buNone/>
-            </a:pPr>
-            <a:endParaRPr lang="en-US" sz="2200" dirty="0"/>
-          </a:p>
-          <a:p>
-            <a:pPr indent="0" marL="0">
-              <a:buNone/>
-            </a:pPr>
-            <a:r>
-              <a:rPr lang="en-US" sz="2200" dirty="0">
-                <a:solidFill>
-                  <a:srgbClr val="172033"/>
-                </a:solidFill>
-                <a:latin typeface="Hiragino Sans GB" pitchFamily="34" charset="0"/>
-                <a:ea typeface="Hiragino Sans GB" pitchFamily="34" charset="-122"/>
-                <a:cs typeface="Hiragino Sans GB" pitchFamily="34" charset="-120"/>
-              </a:rPr>
-              <a:t>先验容量，再复制拼接</a:t>
-            </a:r>
-            <a:endParaRPr lang="en-US" sz="2200" dirty="0"/>
+              <a:t>定义：函数是完成一个明确任务、可以重复调用的代码块。调用前，编译器必须已经看见声明或完整定义。</a:t>
+            </a:r>
+            <a:endParaRPr lang="en-US" sz="2100" dirty="0"/>
           </a:p>
         </p:txBody>
       </p:sp>
@@ -9364,7 +12186,7 @@
                 <a:ea typeface="Hiragino Sans GB" pitchFamily="34" charset="-122"/>
                 <a:cs typeface="Hiragino Sans GB" pitchFamily="34" charset="-120"/>
               </a:rPr>
-              <a:t>三级知识地图：数学函数与类型</a:t>
+              <a:t>函数参数：值传递与引用传递</a:t>
             </a:r>
             <a:endParaRPr lang="en-US" sz="2700" dirty="0"/>
           </a:p>
@@ -9372,50 +12194,25 @@
       </p:sp>
       <p:sp>
         <p:nvSpPr>
-          <p:cNvPr id="5" name="Shape 2"/>
-          <p:cNvSpPr/>
-          <p:nvPr/>
-        </p:nvSpPr>
-        <p:spPr>
-          <a:xfrm>
-            <a:off x="658368" y="1508760"/>
-            <a:ext cx="5257800" cy="4297680"/>
-          </a:xfrm>
-          <a:prstGeom prst="roundRect">
-            <a:avLst>
-              <a:gd name="adj" fmla="val 1702"/>
-            </a:avLst>
+          <p:cNvPr id="5" name="Text 2"/>
+          <p:cNvSpPr/>
+          <p:nvPr/>
+        </p:nvSpPr>
+        <p:spPr>
+          <a:xfrm>
+            <a:off x="658368" y="1417320"/>
+            <a:ext cx="6583680" cy="4480560"/>
+          </a:xfrm>
+          <a:prstGeom prst="rect">
+            <a:avLst/>
           </a:prstGeom>
           <a:solidFill>
-            <a:srgbClr val="FFFFFF"/>
+            <a:srgbClr val="111827"/>
           </a:solidFill>
-          <a:ln w="12700">
-            <a:solidFill>
-              <a:srgbClr val="D8DEE9"/>
-            </a:solidFill>
-            <a:prstDash val="solid"/>
-          </a:ln>
-        </p:spPr>
-      </p:sp>
-      <p:sp>
-        <p:nvSpPr>
-          <p:cNvPr id="6" name="Text 3"/>
-          <p:cNvSpPr/>
-          <p:nvPr/>
-        </p:nvSpPr>
-        <p:spPr>
-          <a:xfrm>
-            <a:off x="978408" y="1828800"/>
-            <a:ext cx="4617720" cy="3657600"/>
-          </a:xfrm>
-          <a:prstGeom prst="rect">
-            <a:avLst/>
-          </a:prstGeom>
-          <a:noFill/>
-          <a:ln/>
-        </p:spPr>
-        <p:txBody>
-          <a:bodyPr wrap="square" lIns="508" tIns="508" rIns="508" bIns="508" rtlCol="0" anchor="ctr">
+          <a:ln/>
+        </p:spPr>
+        <p:txBody>
+          <a:bodyPr wrap="square" lIns="3556" tIns="3556" rIns="3556" bIns="3556" rtlCol="0" anchor="ctr">
             <a:normAutofit/>
           </a:bodyPr>
           <a:lstStyle/>
@@ -9424,89 +12221,39 @@
               <a:buNone/>
             </a:pPr>
             <a:r>
-              <a:rPr lang="en-US" sz="2200" dirty="0">
-                <a:solidFill>
-                  <a:srgbClr val="172033"/>
-                </a:solidFill>
-                <a:latin typeface="Hiragino Sans GB" pitchFamily="34" charset="0"/>
-                <a:ea typeface="Hiragino Sans GB" pitchFamily="34" charset="-122"/>
-                <a:cs typeface="Hiragino Sans GB" pitchFamily="34" charset="-120"/>
-              </a:rPr>
-              <a:t>sqrt、pow、abs</a:t>
-            </a:r>
-            <a:endParaRPr lang="en-US" sz="2200" dirty="0"/>
-          </a:p>
-          <a:p>
-            <a:pPr indent="0" marL="0">
-              <a:buNone/>
-            </a:pPr>
-            <a:endParaRPr lang="en-US" sz="2200" dirty="0"/>
-          </a:p>
-          <a:p>
-            <a:pPr indent="0" marL="0">
-              <a:buNone/>
-            </a:pPr>
-            <a:r>
-              <a:rPr lang="en-US" sz="2200" dirty="0">
-                <a:solidFill>
-                  <a:srgbClr val="172033"/>
-                </a:solidFill>
-                <a:latin typeface="Hiragino Sans GB" pitchFamily="34" charset="0"/>
-                <a:ea typeface="Hiragino Sans GB" pitchFamily="34" charset="-122"/>
-                <a:cs typeface="Hiragino Sans GB" pitchFamily="34" charset="-120"/>
-              </a:rPr>
-              <a:t>floor、ceil、round</a:t>
-            </a:r>
-            <a:endParaRPr lang="en-US" sz="2200" dirty="0"/>
-          </a:p>
-        </p:txBody>
-      </p:sp>
-      <p:sp>
-        <p:nvSpPr>
-          <p:cNvPr id="7" name="Shape 4"/>
-          <p:cNvSpPr/>
-          <p:nvPr/>
-        </p:nvSpPr>
-        <p:spPr>
-          <a:xfrm>
-            <a:off x="6263640" y="1508760"/>
-            <a:ext cx="5257800" cy="4297680"/>
-          </a:xfrm>
-          <a:prstGeom prst="roundRect">
-            <a:avLst>
-              <a:gd name="adj" fmla="val 1702"/>
-            </a:avLst>
-          </a:prstGeom>
-          <a:solidFill>
-            <a:srgbClr val="FFFFFF"/>
-          </a:solidFill>
-          <a:ln w="12700">
-            <a:solidFill>
-              <a:srgbClr val="D8DEE9"/>
-            </a:solidFill>
-            <a:prstDash val="solid"/>
-          </a:ln>
-        </p:spPr>
-      </p:sp>
-      <p:sp>
-        <p:nvSpPr>
-          <p:cNvPr id="8" name="Text 5"/>
-          <p:cNvSpPr/>
-          <p:nvPr/>
-        </p:nvSpPr>
-        <p:spPr>
-          <a:xfrm>
-            <a:off x="6583680" y="1828800"/>
-            <a:ext cx="4617720" cy="3657600"/>
-          </a:xfrm>
-          <a:prstGeom prst="rect">
-            <a:avLst/>
-          </a:prstGeom>
-          <a:noFill/>
-          <a:ln/>
-        </p:spPr>
-        <p:txBody>
-          <a:bodyPr wrap="square" lIns="508" tIns="508" rIns="508" bIns="508" rtlCol="0" anchor="ctr">
+              <a:rPr lang="en-US" sz="1800" dirty="0">
+                <a:solidFill>
+                  <a:srgbClr val="F8FAFC"/>
+                </a:solidFill>
+                <a:latin typeface="Courier New" pitchFamily="34" charset="0"/>
+                <a:ea typeface="Courier New" pitchFamily="34" charset="-122"/>
+                <a:cs typeface="Courier New" pitchFamily="34" charset="-120"/>
+              </a:rPr>
+              <a:t>void swap2(int &amp;a, int &amp;b) { int t=a; a=b; b=t; }</a:t>
+            </a:r>
+            <a:endParaRPr lang="en-US" sz="1800" dirty="0"/>
+          </a:p>
+        </p:txBody>
+      </p:sp>
+      <p:sp>
+        <p:nvSpPr>
+          <p:cNvPr id="6" name="Text 3"/>
+          <p:cNvSpPr/>
+          <p:nvPr/>
+        </p:nvSpPr>
+        <p:spPr>
+          <a:xfrm>
+            <a:off x="7543800" y="1554480"/>
+            <a:ext cx="3931920" cy="3931920"/>
+          </a:xfrm>
+          <a:prstGeom prst="rect">
+            <a:avLst/>
+          </a:prstGeom>
+          <a:noFill/>
+          <a:ln/>
+        </p:spPr>
+        <p:txBody>
+          <a:bodyPr wrap="square" lIns="1016" tIns="1016" rIns="1016" bIns="1016" rtlCol="0" anchor="ctr">
             <a:normAutofit/>
           </a:bodyPr>
           <a:lstStyle/>
@@ -9515,7 +12262,7 @@
               <a:buNone/>
             </a:pPr>
             <a:r>
-              <a:rPr lang="en-US" sz="2200" dirty="0">
+              <a:rPr lang="en-US" sz="2100" dirty="0">
                 <a:solidFill>
                   <a:srgbClr val="172033"/>
                 </a:solidFill>
@@ -9523,22 +12270,22 @@
                 <a:ea typeface="Hiragino Sans GB" pitchFamily="34" charset="-122"/>
                 <a:cs typeface="Hiragino Sans GB" pitchFamily="34" charset="-120"/>
               </a:rPr>
-              <a:t>整数除法与浮点除法</a:t>
-            </a:r>
-            <a:endParaRPr lang="en-US" sz="2200" dirty="0"/>
-          </a:p>
-          <a:p>
-            <a:pPr indent="0" marL="0">
-              <a:buNone/>
-            </a:pPr>
-            <a:endParaRPr lang="en-US" sz="2200" dirty="0"/>
-          </a:p>
-          <a:p>
-            <a:pPr indent="0" marL="0">
-              <a:buNone/>
-            </a:pPr>
-            <a:r>
-              <a:rPr lang="en-US" sz="2200" dirty="0">
+              <a:t>把实参的值复制给形参；函数内修改x，不改变原变量</a:t>
+            </a:r>
+            <a:endParaRPr lang="en-US" sz="2100" dirty="0"/>
+          </a:p>
+          <a:p>
+            <a:pPr indent="0" marL="0">
+              <a:buNone/>
+            </a:pPr>
+            <a:endParaRPr lang="en-US" sz="2100" dirty="0"/>
+          </a:p>
+          <a:p>
+            <a:pPr indent="0" marL="0">
+              <a:buNone/>
+            </a:pPr>
+            <a:r>
+              <a:rPr lang="en-US" sz="2100" dirty="0">
                 <a:solidFill>
                   <a:srgbClr val="172033"/>
                 </a:solidFill>
@@ -9546,15 +12293,61 @@
                 <a:ea typeface="Hiragino Sans GB" pitchFamily="34" charset="-122"/>
                 <a:cs typeface="Hiragino Sans GB" pitchFamily="34" charset="-120"/>
               </a:rPr>
-              <a:t>浮点找候选，整数再核对</a:t>
-            </a:r>
-            <a:endParaRPr lang="en-US" sz="2200" dirty="0"/>
-          </a:p>
-        </p:txBody>
-      </p:sp>
-      <p:sp>
-        <p:nvSpPr>
-          <p:cNvPr id="9" name="Text 6"/>
+              <a:t>形参是实参的别名；修改x会直接修改原变量</a:t>
+            </a:r>
+            <a:endParaRPr lang="en-US" sz="2100" dirty="0"/>
+          </a:p>
+          <a:p>
+            <a:pPr indent="0" marL="0">
+              <a:buNone/>
+            </a:pPr>
+            <a:endParaRPr lang="en-US" sz="2100" dirty="0"/>
+          </a:p>
+          <a:p>
+            <a:pPr indent="0" marL="0">
+              <a:buNone/>
+            </a:pPr>
+            <a:r>
+              <a:rPr lang="en-US" sz="2100" dirty="0">
+                <a:solidFill>
+                  <a:srgbClr val="172033"/>
+                </a:solidFill>
+                <a:latin typeface="Hiragino Sans GB" pitchFamily="34" charset="0"/>
+                <a:ea typeface="Hiragino Sans GB" pitchFamily="34" charset="-122"/>
+                <a:cs typeface="Hiragino Sans GB" pitchFamily="34" charset="-120"/>
+              </a:rPr>
+              <a:t>交换数据、返回多个结果、避免复制大对象</a:t>
+            </a:r>
+            <a:endParaRPr lang="en-US" sz="2100" dirty="0"/>
+          </a:p>
+          <a:p>
+            <a:pPr indent="0" marL="0">
+              <a:buNone/>
+            </a:pPr>
+            <a:endParaRPr lang="en-US" sz="2100" dirty="0"/>
+          </a:p>
+          <a:p>
+            <a:pPr indent="0" marL="0">
+              <a:buNone/>
+            </a:pPr>
+            <a:r>
+              <a:rPr lang="en-US" sz="2100" dirty="0">
+                <a:solidFill>
+                  <a:srgbClr val="172033"/>
+                </a:solidFill>
+                <a:latin typeface="Hiragino Sans GB" pitchFamily="34" charset="0"/>
+                <a:ea typeface="Hiragino Sans GB" pitchFamily="34" charset="-122"/>
+                <a:cs typeface="Hiragino Sans GB" pitchFamily="34" charset="-120"/>
+              </a:rPr>
+              <a:t>引用会产生副作用，调用前要知道哪些变量可能改变</a:t>
+            </a:r>
+            <a:endParaRPr lang="en-US" sz="2100" dirty="0"/>
+          </a:p>
+        </p:txBody>
+      </p:sp>
+      <p:sp>
+        <p:nvSpPr>
+          <p:cNvPr id="7" name="Text 4"/>
           <p:cNvSpPr/>
           <p:nvPr/>
         </p:nvSpPr>
@@ -9697,7 +12490,7 @@
                 <a:ea typeface="Hiragino Sans GB" pitchFamily="34" charset="-122"/>
                 <a:cs typeface="Hiragino Sans GB" pitchFamily="34" charset="-120"/>
               </a:rPr>
-              <a:t>三级知识地图：枚举与模拟</a:t>
+              <a:t>返回值、作用域与函数重载</a:t>
             </a:r>
             <a:endParaRPr lang="en-US" sz="2700" dirty="0"/>
           </a:p>
@@ -9802,7 +12595,7 @@
                 <a:ea typeface="Hiragino Sans GB" pitchFamily="34" charset="-122"/>
                 <a:cs typeface="Hiragino Sans GB" pitchFamily="34" charset="-120"/>
               </a:rPr>
-              <a:t>列全候选，逐个验证</a:t>
+              <a:t>结束本次函数调用，并把结果交回调用处</a:t>
             </a:r>
             <a:endParaRPr lang="en-US" sz="2200" dirty="0"/>
           </a:p>
@@ -9907,7 +12700,7 @@
                 <a:ea typeface="Hiragino Sans GB" pitchFamily="34" charset="-122"/>
                 <a:cs typeface="Hiragino Sans GB" pitchFamily="34" charset="-120"/>
               </a:rPr>
-              <a:t>用顺序限制减少重复</a:t>
+              <a:t>非void函数的所有可能路径都应返回合法值</a:t>
             </a:r>
             <a:endParaRPr lang="en-US" sz="2200" dirty="0"/>
           </a:p>
@@ -10012,7 +12805,7 @@
                 <a:ea typeface="Hiragino Sans GB" pitchFamily="34" charset="-122"/>
                 <a:cs typeface="Hiragino Sans GB" pitchFamily="34" charset="-120"/>
               </a:rPr>
-              <a:t>事件驱动，按序更新状态</a:t>
+              <a:t>只在所在代码块内有效，离开作用域即失效</a:t>
             </a:r>
             <a:endParaRPr lang="en-US" sz="2200" dirty="0"/>
           </a:p>
@@ -10117,7 +12910,7 @@
                 <a:ea typeface="Hiragino Sans GB" pitchFamily="34" charset="-122"/>
                 <a:cs typeface="Hiragino Sans GB" pitchFamily="34" charset="-120"/>
               </a:rPr>
-              <a:t>明确终止条件和输出时机</a:t>
+              <a:t>同名函数的参数列表必须不同，不能只靠返回类型区分</a:t>
             </a:r>
             <a:endParaRPr lang="en-US" sz="2200" dirty="0"/>
           </a:p>
@@ -10268,7 +13061,7 @@
                 <a:ea typeface="Hiragino Sans GB" pitchFamily="34" charset="-122"/>
                 <a:cs typeface="Hiragino Sans GB" pitchFamily="34" charset="-120"/>
               </a:rPr>
-              <a:t>三级知识地图：数组、二维与边界</a:t>
+              <a:t>递归：函数直接或间接调用自己</a:t>
             </a:r>
             <a:endParaRPr lang="en-US" sz="2700" dirty="0"/>
           </a:p>
@@ -10276,50 +13069,25 @@
       </p:sp>
       <p:sp>
         <p:nvSpPr>
-          <p:cNvPr id="5" name="Shape 2"/>
-          <p:cNvSpPr/>
-          <p:nvPr/>
-        </p:nvSpPr>
-        <p:spPr>
-          <a:xfrm>
-            <a:off x="777240" y="1645920"/>
-            <a:ext cx="10607040" cy="4114800"/>
-          </a:xfrm>
-          <a:prstGeom prst="roundRect">
-            <a:avLst>
-              <a:gd name="adj" fmla="val 1778"/>
-            </a:avLst>
+          <p:cNvPr id="5" name="Text 2"/>
+          <p:cNvSpPr/>
+          <p:nvPr/>
+        </p:nvSpPr>
+        <p:spPr>
+          <a:xfrm>
+            <a:off x="658368" y="1417320"/>
+            <a:ext cx="6583680" cy="4480560"/>
+          </a:xfrm>
+          <a:prstGeom prst="rect">
+            <a:avLst/>
           </a:prstGeom>
           <a:solidFill>
-            <a:srgbClr val="FFFFFF"/>
+            <a:srgbClr val="111827"/>
           </a:solidFill>
-          <a:ln w="12700">
-            <a:solidFill>
-              <a:srgbClr val="D8DEE9"/>
-            </a:solidFill>
-            <a:prstDash val="solid"/>
-          </a:ln>
-        </p:spPr>
-      </p:sp>
-      <p:sp>
-        <p:nvSpPr>
-          <p:cNvPr id="6" name="Text 3"/>
-          <p:cNvSpPr/>
-          <p:nvPr/>
-        </p:nvSpPr>
-        <p:spPr>
-          <a:xfrm>
-            <a:off x="1097280" y="1965960"/>
-            <a:ext cx="9966960" cy="3474720"/>
-          </a:xfrm>
-          <a:prstGeom prst="rect">
-            <a:avLst/>
-          </a:prstGeom>
-          <a:noFill/>
-          <a:ln/>
-        </p:spPr>
-        <p:txBody>
-          <a:bodyPr wrap="square" lIns="508" tIns="508" rIns="508" bIns="508" rtlCol="0" anchor="ctr">
+          <a:ln/>
+        </p:spPr>
+        <p:txBody>
+          <a:bodyPr wrap="square" lIns="3556" tIns="3556" rIns="3556" bIns="3556" rtlCol="0" anchor="ctr">
             <a:normAutofit/>
           </a:bodyPr>
           <a:lstStyle/>
@@ -10328,7 +13096,99 @@
               <a:buNone/>
             </a:pPr>
             <a:r>
-              <a:rPr lang="en-US" sz="2200" dirty="0">
+              <a:rPr lang="en-US" sz="1800" dirty="0">
+                <a:solidFill>
+                  <a:srgbClr val="F8FAFC"/>
+                </a:solidFill>
+                <a:latin typeface="Courier New" pitchFamily="34" charset="0"/>
+                <a:ea typeface="Courier New" pitchFamily="34" charset="-122"/>
+                <a:cs typeface="Courier New" pitchFamily="34" charset="-120"/>
+              </a:rPr>
+              <a:t>int sum(int n) {</a:t>
+            </a:r>
+            <a:endParaRPr lang="en-US" sz="1800" dirty="0"/>
+          </a:p>
+          <a:p>
+            <a:pPr indent="0" marL="0">
+              <a:buNone/>
+            </a:pPr>
+            <a:r>
+              <a:rPr lang="en-US" sz="1800" dirty="0">
+                <a:solidFill>
+                  <a:srgbClr val="F8FAFC"/>
+                </a:solidFill>
+                <a:latin typeface="Courier New" pitchFamily="34" charset="0"/>
+                <a:ea typeface="Courier New" pitchFamily="34" charset="-122"/>
+                <a:cs typeface="Courier New" pitchFamily="34" charset="-120"/>
+              </a:rPr>
+              <a:t>  if (n == 0) return 0;</a:t>
+            </a:r>
+            <a:endParaRPr lang="en-US" sz="1800" dirty="0"/>
+          </a:p>
+          <a:p>
+            <a:pPr indent="0" marL="0">
+              <a:buNone/>
+            </a:pPr>
+            <a:r>
+              <a:rPr lang="en-US" sz="1800" dirty="0">
+                <a:solidFill>
+                  <a:srgbClr val="F8FAFC"/>
+                </a:solidFill>
+                <a:latin typeface="Courier New" pitchFamily="34" charset="0"/>
+                <a:ea typeface="Courier New" pitchFamily="34" charset="-122"/>
+                <a:cs typeface="Courier New" pitchFamily="34" charset="-120"/>
+              </a:rPr>
+              <a:t>  return n + sum(n - 1);</a:t>
+            </a:r>
+            <a:endParaRPr lang="en-US" sz="1800" dirty="0"/>
+          </a:p>
+          <a:p>
+            <a:pPr indent="0" marL="0">
+              <a:buNone/>
+            </a:pPr>
+            <a:r>
+              <a:rPr lang="en-US" sz="1800" dirty="0">
+                <a:solidFill>
+                  <a:srgbClr val="F8FAFC"/>
+                </a:solidFill>
+                <a:latin typeface="Courier New" pitchFamily="34" charset="0"/>
+                <a:ea typeface="Courier New" pitchFamily="34" charset="-122"/>
+                <a:cs typeface="Courier New" pitchFamily="34" charset="-120"/>
+              </a:rPr>
+              <a:t>}</a:t>
+            </a:r>
+            <a:endParaRPr lang="en-US" sz="1800" dirty="0"/>
+          </a:p>
+        </p:txBody>
+      </p:sp>
+      <p:sp>
+        <p:nvSpPr>
+          <p:cNvPr id="6" name="Text 3"/>
+          <p:cNvSpPr/>
+          <p:nvPr/>
+        </p:nvSpPr>
+        <p:spPr>
+          <a:xfrm>
+            <a:off x="7543800" y="1554480"/>
+            <a:ext cx="3931920" cy="3931920"/>
+          </a:xfrm>
+          <a:prstGeom prst="rect">
+            <a:avLst/>
+          </a:prstGeom>
+          <a:noFill/>
+          <a:ln/>
+        </p:spPr>
+        <p:txBody>
+          <a:bodyPr wrap="square" lIns="1016" tIns="1016" rIns="1016" bIns="1016" rtlCol="0" anchor="ctr">
+            <a:normAutofit/>
+          </a:bodyPr>
+          <a:lstStyle/>
+          <a:p>
+            <a:pPr indent="0" marL="0">
+              <a:buNone/>
+            </a:pPr>
+            <a:r>
+              <a:rPr lang="en-US" sz="2100" dirty="0">
                 <a:solidFill>
                   <a:srgbClr val="172033"/>
                 </a:solidFill>
@@ -10336,78 +13196,9 @@
                 <a:ea typeface="Hiragino Sans GB" pitchFamily="34" charset="-122"/>
                 <a:cs typeface="Hiragino Sans GB" pitchFamily="34" charset="-120"/>
               </a:rPr>
-              <a:t>合法下标0到n-1</a:t>
-            </a:r>
-            <a:endParaRPr lang="en-US" sz="2200" dirty="0"/>
-          </a:p>
-          <a:p>
-            <a:pPr indent="0" marL="0">
-              <a:buNone/>
-            </a:pPr>
-            <a:endParaRPr lang="en-US" sz="2200" dirty="0"/>
-          </a:p>
-          <a:p>
-            <a:pPr indent="0" marL="0">
-              <a:buNone/>
-            </a:pPr>
-            <a:r>
-              <a:rPr lang="en-US" sz="2200" dirty="0">
-                <a:solidFill>
-                  <a:srgbClr val="172033"/>
-                </a:solidFill>
-                <a:latin typeface="Hiragino Sans GB" pitchFamily="34" charset="0"/>
-                <a:ea typeface="Hiragino Sans GB" pitchFamily="34" charset="-122"/>
-                <a:cs typeface="Hiragino Sans GB" pitchFamily="34" charset="-120"/>
-              </a:rPr>
-              <a:t>行列含义不要交换</a:t>
-            </a:r>
-            <a:endParaRPr lang="en-US" sz="2200" dirty="0"/>
-          </a:p>
-          <a:p>
-            <a:pPr indent="0" marL="0">
-              <a:buNone/>
-            </a:pPr>
-            <a:endParaRPr lang="en-US" sz="2200" dirty="0"/>
-          </a:p>
-          <a:p>
-            <a:pPr indent="0" marL="0">
-              <a:buNone/>
-            </a:pPr>
-            <a:r>
-              <a:rPr lang="en-US" sz="2200" dirty="0">
-                <a:solidFill>
-                  <a:srgbClr val="172033"/>
-                </a:solidFill>
-                <a:latin typeface="Hiragino Sans GB" pitchFamily="34" charset="0"/>
-                <a:ea typeface="Hiragino Sans GB" pitchFamily="34" charset="-122"/>
-                <a:cs typeface="Hiragino Sans GB" pitchFamily="34" charset="-120"/>
-              </a:rPr>
-              <a:t>先判坐标，再访问数组</a:t>
-            </a:r>
-            <a:endParaRPr lang="en-US" sz="2200" dirty="0"/>
-          </a:p>
-          <a:p>
-            <a:pPr indent="0" marL="0">
-              <a:buNone/>
-            </a:pPr>
-            <a:endParaRPr lang="en-US" sz="2200" dirty="0"/>
-          </a:p>
-          <a:p>
-            <a:pPr indent="0" marL="0">
-              <a:buNone/>
-            </a:pPr>
-            <a:r>
-              <a:rPr lang="en-US" sz="2200" dirty="0">
-                <a:solidFill>
-                  <a:srgbClr val="172033"/>
-                </a:solidFill>
-                <a:latin typeface="Hiragino Sans GB" pitchFamily="34" charset="0"/>
-                <a:ea typeface="Hiragino Sans GB" pitchFamily="34" charset="-122"/>
-                <a:cs typeface="Hiragino Sans GB" pitchFamily="34" charset="-120"/>
-              </a:rPr>
-              <a:t>最小、非方阵、边角位置</a:t>
-            </a:r>
-            <a:endParaRPr lang="en-US" sz="2200" dirty="0"/>
+              <a:t>递归适用：大问题可以变成结构相同、规模更小的问题。</a:t>
+            </a:r>
+            <a:endParaRPr lang="en-US" sz="2100" dirty="0"/>
           </a:p>
         </p:txBody>
       </p:sp>
@@ -10556,7 +13347,7 @@
                 <a:ea typeface="Hiragino Sans GB" pitchFamily="34" charset="-122"/>
                 <a:cs typeface="Hiragino Sans GB" pitchFamily="34" charset="-120"/>
               </a:rPr>
-              <a:t>错题清库：四类原因</a:t>
+              <a:t>递归追踪：向下调用，向上返回</a:t>
             </a:r>
             <a:endParaRPr lang="en-US" sz="2700" dirty="0"/>
           </a:p>
@@ -10564,50 +13355,25 @@
       </p:sp>
       <p:sp>
         <p:nvSpPr>
-          <p:cNvPr id="5" name="Shape 2"/>
-          <p:cNvSpPr/>
-          <p:nvPr/>
-        </p:nvSpPr>
-        <p:spPr>
-          <a:xfrm>
-            <a:off x="658368" y="1508760"/>
-            <a:ext cx="5257800" cy="4297680"/>
-          </a:xfrm>
-          <a:prstGeom prst="roundRect">
-            <a:avLst>
-              <a:gd name="adj" fmla="val 1702"/>
-            </a:avLst>
+          <p:cNvPr id="5" name="Text 2"/>
+          <p:cNvSpPr/>
+          <p:nvPr/>
+        </p:nvSpPr>
+        <p:spPr>
+          <a:xfrm>
+            <a:off x="658368" y="1417320"/>
+            <a:ext cx="6583680" cy="4480560"/>
+          </a:xfrm>
+          <a:prstGeom prst="rect">
+            <a:avLst/>
           </a:prstGeom>
           <a:solidFill>
-            <a:srgbClr val="FFFFFF"/>
+            <a:srgbClr val="111827"/>
           </a:solidFill>
-          <a:ln w="12700">
-            <a:solidFill>
-              <a:srgbClr val="D8DEE9"/>
-            </a:solidFill>
-            <a:prstDash val="solid"/>
-          </a:ln>
-        </p:spPr>
-      </p:sp>
-      <p:sp>
-        <p:nvSpPr>
-          <p:cNvPr id="6" name="Text 3"/>
-          <p:cNvSpPr/>
-          <p:nvPr/>
-        </p:nvSpPr>
-        <p:spPr>
-          <a:xfrm>
-            <a:off x="978408" y="1828800"/>
-            <a:ext cx="4617720" cy="3657600"/>
-          </a:xfrm>
-          <a:prstGeom prst="rect">
-            <a:avLst/>
-          </a:prstGeom>
-          <a:noFill/>
-          <a:ln/>
-        </p:spPr>
-        <p:txBody>
-          <a:bodyPr wrap="square" lIns="508" tIns="508" rIns="508" bIns="508" rtlCol="0" anchor="ctr">
+          <a:ln/>
+        </p:spPr>
+        <p:txBody>
+          <a:bodyPr wrap="square" lIns="3556" tIns="3556" rIns="3556" bIns="3556" rtlCol="0" anchor="ctr">
             <a:normAutofit/>
           </a:bodyPr>
           <a:lstStyle/>
@@ -10616,89 +13382,107 @@
               <a:buNone/>
             </a:pPr>
             <a:r>
-              <a:rPr lang="en-US" sz="2200" dirty="0">
-                <a:solidFill>
-                  <a:srgbClr val="172033"/>
-                </a:solidFill>
-                <a:latin typeface="Hiragino Sans GB" pitchFamily="34" charset="0"/>
-                <a:ea typeface="Hiragino Sans GB" pitchFamily="34" charset="-122"/>
-                <a:cs typeface="Hiragino Sans GB" pitchFamily="34" charset="-120"/>
-              </a:rPr>
-              <a:t>回到定义并做同考点题</a:t>
-            </a:r>
-            <a:endParaRPr lang="en-US" sz="2200" dirty="0"/>
-          </a:p>
-          <a:p>
-            <a:pPr indent="0" marL="0">
-              <a:buNone/>
-            </a:pPr>
-            <a:endParaRPr lang="en-US" sz="2200" dirty="0"/>
-          </a:p>
-          <a:p>
-            <a:pPr indent="0" marL="0">
-              <a:buNone/>
-            </a:pPr>
-            <a:r>
-              <a:rPr lang="en-US" sz="2200" dirty="0">
-                <a:solidFill>
-                  <a:srgbClr val="172033"/>
-                </a:solidFill>
-                <a:latin typeface="Hiragino Sans GB" pitchFamily="34" charset="0"/>
-                <a:ea typeface="Hiragino Sans GB" pitchFamily="34" charset="-122"/>
-                <a:cs typeface="Hiragino Sans GB" pitchFamily="34" charset="-120"/>
-              </a:rPr>
-              <a:t>补最小、最大、特殊数据</a:t>
-            </a:r>
-            <a:endParaRPr lang="en-US" sz="2200" dirty="0"/>
-          </a:p>
-        </p:txBody>
-      </p:sp>
-      <p:sp>
-        <p:nvSpPr>
-          <p:cNvPr id="7" name="Shape 4"/>
-          <p:cNvSpPr/>
-          <p:nvPr/>
-        </p:nvSpPr>
-        <p:spPr>
-          <a:xfrm>
-            <a:off x="6263640" y="1508760"/>
-            <a:ext cx="5257800" cy="4297680"/>
-          </a:xfrm>
-          <a:prstGeom prst="roundRect">
-            <a:avLst>
-              <a:gd name="adj" fmla="val 1702"/>
-            </a:avLst>
-          </a:prstGeom>
-          <a:solidFill>
-            <a:srgbClr val="FFFFFF"/>
-          </a:solidFill>
-          <a:ln w="12700">
-            <a:solidFill>
-              <a:srgbClr val="D8DEE9"/>
-            </a:solidFill>
-            <a:prstDash val="solid"/>
-          </a:ln>
-        </p:spPr>
-      </p:sp>
-      <p:sp>
-        <p:nvSpPr>
-          <p:cNvPr id="8" name="Text 5"/>
-          <p:cNvSpPr/>
-          <p:nvPr/>
-        </p:nvSpPr>
-        <p:spPr>
-          <a:xfrm>
-            <a:off x="6583680" y="1828800"/>
-            <a:ext cx="4617720" cy="3657600"/>
-          </a:xfrm>
-          <a:prstGeom prst="rect">
-            <a:avLst/>
-          </a:prstGeom>
-          <a:noFill/>
-          <a:ln/>
-        </p:spPr>
-        <p:txBody>
-          <a:bodyPr wrap="square" lIns="508" tIns="508" rIns="508" bIns="508" rtlCol="0" anchor="ctr">
+              <a:rPr lang="en-US" sz="1800" dirty="0">
+                <a:solidFill>
+                  <a:srgbClr val="F8FAFC"/>
+                </a:solidFill>
+                <a:latin typeface="Courier New" pitchFamily="34" charset="0"/>
+                <a:ea typeface="Courier New" pitchFamily="34" charset="-122"/>
+                <a:cs typeface="Courier New" pitchFamily="34" charset="-120"/>
+              </a:rPr>
+              <a:t>sum(3)</a:t>
+            </a:r>
+            <a:endParaRPr lang="en-US" sz="1800" dirty="0"/>
+          </a:p>
+          <a:p>
+            <a:pPr indent="0" marL="0">
+              <a:buNone/>
+            </a:pPr>
+            <a:r>
+              <a:rPr lang="en-US" sz="1800" dirty="0">
+                <a:solidFill>
+                  <a:srgbClr val="F8FAFC"/>
+                </a:solidFill>
+                <a:latin typeface="Courier New" pitchFamily="34" charset="0"/>
+                <a:ea typeface="Courier New" pitchFamily="34" charset="-122"/>
+                <a:cs typeface="Courier New" pitchFamily="34" charset="-120"/>
+              </a:rPr>
+              <a:t>= 3 + sum(2)</a:t>
+            </a:r>
+            <a:endParaRPr lang="en-US" sz="1800" dirty="0"/>
+          </a:p>
+          <a:p>
+            <a:pPr indent="0" marL="0">
+              <a:buNone/>
+            </a:pPr>
+            <a:r>
+              <a:rPr lang="en-US" sz="1800" dirty="0">
+                <a:solidFill>
+                  <a:srgbClr val="F8FAFC"/>
+                </a:solidFill>
+                <a:latin typeface="Courier New" pitchFamily="34" charset="0"/>
+                <a:ea typeface="Courier New" pitchFamily="34" charset="-122"/>
+                <a:cs typeface="Courier New" pitchFamily="34" charset="-120"/>
+              </a:rPr>
+              <a:t>= 3 + 2 + sum(1)</a:t>
+            </a:r>
+            <a:endParaRPr lang="en-US" sz="1800" dirty="0"/>
+          </a:p>
+          <a:p>
+            <a:pPr indent="0" marL="0">
+              <a:buNone/>
+            </a:pPr>
+            <a:r>
+              <a:rPr lang="en-US" sz="1800" dirty="0">
+                <a:solidFill>
+                  <a:srgbClr val="F8FAFC"/>
+                </a:solidFill>
+                <a:latin typeface="Courier New" pitchFamily="34" charset="0"/>
+                <a:ea typeface="Courier New" pitchFamily="34" charset="-122"/>
+                <a:cs typeface="Courier New" pitchFamily="34" charset="-120"/>
+              </a:rPr>
+              <a:t>= 3 + 2 + 1 + sum(0)</a:t>
+            </a:r>
+            <a:endParaRPr lang="en-US" sz="1800" dirty="0"/>
+          </a:p>
+          <a:p>
+            <a:pPr indent="0" marL="0">
+              <a:buNone/>
+            </a:pPr>
+            <a:r>
+              <a:rPr lang="en-US" sz="1800" dirty="0">
+                <a:solidFill>
+                  <a:srgbClr val="F8FAFC"/>
+                </a:solidFill>
+                <a:latin typeface="Courier New" pitchFamily="34" charset="0"/>
+                <a:ea typeface="Courier New" pitchFamily="34" charset="-122"/>
+                <a:cs typeface="Courier New" pitchFamily="34" charset="-120"/>
+              </a:rPr>
+              <a:t>= 3 + 2 + 1 + 0 = 6</a:t>
+            </a:r>
+            <a:endParaRPr lang="en-US" sz="1800" dirty="0"/>
+          </a:p>
+        </p:txBody>
+      </p:sp>
+      <p:sp>
+        <p:nvSpPr>
+          <p:cNvPr id="6" name="Text 3"/>
+          <p:cNvSpPr/>
+          <p:nvPr/>
+        </p:nvSpPr>
+        <p:spPr>
+          <a:xfrm>
+            <a:off x="7543800" y="1554480"/>
+            <a:ext cx="3931920" cy="3931920"/>
+          </a:xfrm>
+          <a:prstGeom prst="rect">
+            <a:avLst/>
+          </a:prstGeom>
+          <a:noFill/>
+          <a:ln/>
+        </p:spPr>
+        <p:txBody>
+          <a:bodyPr wrap="square" lIns="1016" tIns="1016" rIns="1016" bIns="1016" rtlCol="0" anchor="ctr">
             <a:normAutofit/>
           </a:bodyPr>
           <a:lstStyle/>
@@ -10707,7 +13491,7 @@
               <a:buNone/>
             </a:pPr>
             <a:r>
-              <a:rPr lang="en-US" sz="2200" dirty="0">
+              <a:rPr lang="en-US" sz="2100" dirty="0">
                 <a:solidFill>
                   <a:srgbClr val="172033"/>
                 </a:solidFill>
@@ -10715,38 +13499,15 @@
                 <a:ea typeface="Hiragino Sans GB" pitchFamily="34" charset="-122"/>
                 <a:cs typeface="Hiragino Sans GB" pitchFamily="34" charset="-120"/>
               </a:rPr>
-              <a:t>按变量表逐步模拟</a:t>
-            </a:r>
-            <a:endParaRPr lang="en-US" sz="2200" dirty="0"/>
-          </a:p>
-          <a:p>
-            <a:pPr indent="0" marL="0">
-              <a:buNone/>
-            </a:pPr>
-            <a:endParaRPr lang="en-US" sz="2200" dirty="0"/>
-          </a:p>
-          <a:p>
-            <a:pPr indent="0" marL="0">
-              <a:buNone/>
-            </a:pPr>
-            <a:r>
-              <a:rPr lang="en-US" sz="2200" dirty="0">
-                <a:solidFill>
-                  <a:srgbClr val="172033"/>
-                </a:solidFill>
-                <a:latin typeface="Hiragino Sans GB" pitchFamily="34" charset="0"/>
-                <a:ea typeface="Hiragino Sans GB" pitchFamily="34" charset="-122"/>
-                <a:cs typeface="Hiragino Sans GB" pitchFamily="34" charset="-120"/>
-              </a:rPr>
-              <a:t>核对空格、换行和顺序</a:t>
-            </a:r>
-            <a:endParaRPr lang="en-US" sz="2200" dirty="0"/>
-          </a:p>
-        </p:txBody>
-      </p:sp>
-      <p:sp>
-        <p:nvSpPr>
-          <p:cNvPr id="9" name="Text 6"/>
+              <a:t>调用时先暂停当前层；最小问题得到结果后，才逐层恢复并计算。</a:t>
+            </a:r>
+            <a:endParaRPr lang="en-US" sz="2100" dirty="0"/>
+          </a:p>
+        </p:txBody>
+      </p:sp>
+      <p:sp>
+        <p:nvSpPr>
+          <p:cNvPr id="7" name="Text 4"/>
           <p:cNvSpPr/>
           <p:nvPr/>
         </p:nvSpPr>
@@ -10889,7 +13650,7 @@
                 <a:ea typeface="Hiragino Sans GB" pitchFamily="34" charset="-122"/>
                 <a:cs typeface="Hiragino Sans GB" pitchFamily="34" charset="-120"/>
               </a:rPr>
-              <a:t>个人分层：今天只攻最薄弱的一层</a:t>
+              <a:t>字符数组：容量、长度和结束标记</a:t>
             </a:r>
             <a:endParaRPr lang="en-US" sz="2700" dirty="0"/>
           </a:p>
@@ -10897,87 +13658,25 @@
       </p:sp>
       <p:sp>
         <p:nvSpPr>
-          <p:cNvPr id="5" name="Shape 2"/>
-          <p:cNvSpPr/>
-          <p:nvPr/>
-        </p:nvSpPr>
-        <p:spPr>
-          <a:xfrm>
-            <a:off x="822960" y="1508760"/>
-            <a:ext cx="594360" cy="594360"/>
-          </a:xfrm>
-          <a:prstGeom prst="ellipse">
+          <p:cNvPr id="5" name="Text 2"/>
+          <p:cNvSpPr/>
+          <p:nvPr/>
+        </p:nvSpPr>
+        <p:spPr>
+          <a:xfrm>
+            <a:off x="658368" y="1417320"/>
+            <a:ext cx="6583680" cy="4480560"/>
+          </a:xfrm>
+          <a:prstGeom prst="rect">
             <a:avLst/>
           </a:prstGeom>
           <a:solidFill>
-            <a:srgbClr val="F97316"/>
+            <a:srgbClr val="111827"/>
           </a:solidFill>
-          <a:ln w="12700">
-            <a:solidFill>
-              <a:srgbClr val="F97316"/>
-            </a:solidFill>
-            <a:prstDash val="solid"/>
-          </a:ln>
-        </p:spPr>
-      </p:sp>
-      <p:sp>
-        <p:nvSpPr>
-          <p:cNvPr id="6" name="Text 3"/>
-          <p:cNvSpPr/>
-          <p:nvPr/>
-        </p:nvSpPr>
-        <p:spPr>
-          <a:xfrm>
-            <a:off x="822960" y="1627632"/>
-            <a:ext cx="594360" cy="228600"/>
-          </a:xfrm>
-          <a:prstGeom prst="rect">
-            <a:avLst/>
-          </a:prstGeom>
-          <a:noFill/>
-          <a:ln/>
-        </p:spPr>
-        <p:txBody>
-          <a:bodyPr wrap="square" lIns="0" tIns="0" rIns="0" bIns="0" rtlCol="0" anchor="ctr"/>
-          <a:lstStyle/>
-          <a:p>
-            <a:pPr algn="ctr" indent="0" marL="0">
-              <a:buNone/>
-            </a:pPr>
-            <a:r>
-              <a:rPr lang="en-US" b="1" dirty="0">
-                <a:solidFill>
-                  <a:srgbClr val="FFFFFF"/>
-                </a:solidFill>
-                <a:latin typeface="Hiragino Sans GB" pitchFamily="34" charset="0"/>
-                <a:ea typeface="Hiragino Sans GB" pitchFamily="34" charset="-122"/>
-                <a:cs typeface="Hiragino Sans GB" pitchFamily="34" charset="-120"/>
-              </a:rPr>
-              <a:t>1</a:t>
-            </a:r>
-            <a:endParaRPr lang="en-US" dirty="0"/>
-          </a:p>
-        </p:txBody>
-      </p:sp>
-      <p:sp>
-        <p:nvSpPr>
-          <p:cNvPr id="7" name="Text 4"/>
-          <p:cNvSpPr/>
-          <p:nvPr/>
-        </p:nvSpPr>
-        <p:spPr>
-          <a:xfrm>
-            <a:off x="1691640" y="1481328"/>
-            <a:ext cx="9601200" cy="685800"/>
-          </a:xfrm>
-          <a:prstGeom prst="rect">
-            <a:avLst/>
-          </a:prstGeom>
-          <a:noFill/>
-          <a:ln/>
-        </p:spPr>
-        <p:txBody>
-          <a:bodyPr wrap="square" lIns="381" tIns="381" rIns="381" bIns="381" rtlCol="0" anchor="ctr">
+          <a:ln/>
+        </p:spPr>
+        <p:txBody>
+          <a:bodyPr wrap="square" lIns="3556" tIns="3556" rIns="3556" bIns="3556" rtlCol="0" anchor="ctr">
             <a:normAutofit/>
           </a:bodyPr>
           <a:lstStyle/>
@@ -10986,103 +13685,39 @@
               <a:buNone/>
             </a:pPr>
             <a:r>
-              <a:rPr lang="en-US" sz="2200" dirty="0">
-                <a:solidFill>
-                  <a:srgbClr val="172033"/>
-                </a:solidFill>
-                <a:latin typeface="Hiragino Sans GB" pitchFamily="34" charset="0"/>
-                <a:ea typeface="Hiragino Sans GB" pitchFamily="34" charset="-122"/>
-                <a:cs typeface="Hiragino Sans GB" pitchFamily="34" charset="-120"/>
-              </a:rPr>
-              <a:t>函数、类型、循环边界</a:t>
-            </a:r>
-            <a:endParaRPr lang="en-US" sz="2200" dirty="0"/>
-          </a:p>
-        </p:txBody>
-      </p:sp>
-      <p:sp>
-        <p:nvSpPr>
-          <p:cNvPr id="8" name="Shape 5"/>
-          <p:cNvSpPr/>
-          <p:nvPr/>
-        </p:nvSpPr>
-        <p:spPr>
-          <a:xfrm>
-            <a:off x="822960" y="2606040"/>
-            <a:ext cx="594360" cy="594360"/>
-          </a:xfrm>
-          <a:prstGeom prst="ellipse">
-            <a:avLst/>
-          </a:prstGeom>
-          <a:solidFill>
-            <a:srgbClr val="F97316"/>
-          </a:solidFill>
-          <a:ln w="12700">
-            <a:solidFill>
-              <a:srgbClr val="F97316"/>
-            </a:solidFill>
-            <a:prstDash val="solid"/>
-          </a:ln>
-        </p:spPr>
-      </p:sp>
-      <p:sp>
-        <p:nvSpPr>
-          <p:cNvPr id="9" name="Text 6"/>
-          <p:cNvSpPr/>
-          <p:nvPr/>
-        </p:nvSpPr>
-        <p:spPr>
-          <a:xfrm>
-            <a:off x="822960" y="2724912"/>
-            <a:ext cx="594360" cy="228600"/>
-          </a:xfrm>
-          <a:prstGeom prst="rect">
-            <a:avLst/>
-          </a:prstGeom>
-          <a:noFill/>
-          <a:ln/>
-        </p:spPr>
-        <p:txBody>
-          <a:bodyPr wrap="square" lIns="0" tIns="0" rIns="0" bIns="0" rtlCol="0" anchor="ctr"/>
-          <a:lstStyle/>
-          <a:p>
-            <a:pPr algn="ctr" indent="0" marL="0">
-              <a:buNone/>
-            </a:pPr>
-            <a:r>
-              <a:rPr lang="en-US" b="1" dirty="0">
-                <a:solidFill>
-                  <a:srgbClr val="FFFFFF"/>
-                </a:solidFill>
-                <a:latin typeface="Hiragino Sans GB" pitchFamily="34" charset="0"/>
-                <a:ea typeface="Hiragino Sans GB" pitchFamily="34" charset="-122"/>
-                <a:cs typeface="Hiragino Sans GB" pitchFamily="34" charset="-120"/>
-              </a:rPr>
-              <a:t>2</a:t>
-            </a:r>
-            <a:endParaRPr lang="en-US" dirty="0"/>
-          </a:p>
-        </p:txBody>
-      </p:sp>
-      <p:sp>
-        <p:nvSpPr>
-          <p:cNvPr id="10" name="Text 7"/>
-          <p:cNvSpPr/>
-          <p:nvPr/>
-        </p:nvSpPr>
-        <p:spPr>
-          <a:xfrm>
-            <a:off x="1691640" y="2578608"/>
-            <a:ext cx="9601200" cy="685800"/>
-          </a:xfrm>
-          <a:prstGeom prst="rect">
-            <a:avLst/>
-          </a:prstGeom>
-          <a:noFill/>
-          <a:ln/>
-        </p:spPr>
-        <p:txBody>
-          <a:bodyPr wrap="square" lIns="381" tIns="381" rIns="381" bIns="381" rtlCol="0" anchor="ctr">
+              <a:rPr lang="en-US" sz="1800" dirty="0">
+                <a:solidFill>
+                  <a:srgbClr val="F8FAFC"/>
+                </a:solidFill>
+                <a:latin typeface="Courier New" pitchFamily="34" charset="0"/>
+                <a:ea typeface="Courier New" pitchFamily="34" charset="-122"/>
+                <a:cs typeface="Courier New" pitchFamily="34" charset="-120"/>
+              </a:rPr>
+              <a:t>char s[6] = "hello";  // 5个字符 + 1个\0</a:t>
+            </a:r>
+            <a:endParaRPr lang="en-US" sz="1800" dirty="0"/>
+          </a:p>
+        </p:txBody>
+      </p:sp>
+      <p:sp>
+        <p:nvSpPr>
+          <p:cNvPr id="6" name="Text 3"/>
+          <p:cNvSpPr/>
+          <p:nvPr/>
+        </p:nvSpPr>
+        <p:spPr>
+          <a:xfrm>
+            <a:off x="7543800" y="1554480"/>
+            <a:ext cx="3931920" cy="3931920"/>
+          </a:xfrm>
+          <a:prstGeom prst="rect">
+            <a:avLst/>
+          </a:prstGeom>
+          <a:noFill/>
+          <a:ln/>
+        </p:spPr>
+        <p:txBody>
+          <a:bodyPr wrap="square" lIns="1016" tIns="1016" rIns="1016" bIns="1016" rtlCol="0" anchor="ctr">
             <a:normAutofit/>
           </a:bodyPr>
           <a:lstStyle/>
@@ -11091,7 +13726,7 @@
               <a:buNone/>
             </a:pPr>
             <a:r>
-              <a:rPr lang="en-US" sz="2200" dirty="0">
+              <a:rPr lang="en-US" sz="2100" dirty="0">
                 <a:solidFill>
                   <a:srgbClr val="172033"/>
                 </a:solidFill>
@@ -11099,104 +13734,22 @@
                 <a:ea typeface="Hiragino Sans GB" pitchFamily="34" charset="-122"/>
                 <a:cs typeface="Hiragino Sans GB" pitchFamily="34" charset="-120"/>
               </a:rPr>
-              <a:t>递归、字符数组、枚举</a:t>
-            </a:r>
-            <a:endParaRPr lang="en-US" sz="2200" dirty="0"/>
-          </a:p>
-        </p:txBody>
-      </p:sp>
-      <p:sp>
-        <p:nvSpPr>
-          <p:cNvPr id="11" name="Shape 8"/>
-          <p:cNvSpPr/>
-          <p:nvPr/>
-        </p:nvSpPr>
-        <p:spPr>
-          <a:xfrm>
-            <a:off x="822960" y="3703320"/>
-            <a:ext cx="594360" cy="594360"/>
-          </a:xfrm>
-          <a:prstGeom prst="ellipse">
-            <a:avLst/>
-          </a:prstGeom>
-          <a:solidFill>
-            <a:srgbClr val="F97316"/>
-          </a:solidFill>
-          <a:ln w="12700">
-            <a:solidFill>
-              <a:srgbClr val="F97316"/>
-            </a:solidFill>
-            <a:prstDash val="solid"/>
-          </a:ln>
-        </p:spPr>
-      </p:sp>
-      <p:sp>
-        <p:nvSpPr>
-          <p:cNvPr id="12" name="Text 9"/>
-          <p:cNvSpPr/>
-          <p:nvPr/>
-        </p:nvSpPr>
-        <p:spPr>
-          <a:xfrm>
-            <a:off x="822960" y="3822192"/>
-            <a:ext cx="594360" cy="228600"/>
-          </a:xfrm>
-          <a:prstGeom prst="rect">
-            <a:avLst/>
-          </a:prstGeom>
-          <a:noFill/>
-          <a:ln/>
-        </p:spPr>
-        <p:txBody>
-          <a:bodyPr wrap="square" lIns="0" tIns="0" rIns="0" bIns="0" rtlCol="0" anchor="ctr"/>
-          <a:lstStyle/>
-          <a:p>
-            <a:pPr algn="ctr" indent="0" marL="0">
-              <a:buNone/>
-            </a:pPr>
-            <a:r>
-              <a:rPr lang="en-US" b="1" dirty="0">
-                <a:solidFill>
-                  <a:srgbClr val="FFFFFF"/>
-                </a:solidFill>
-                <a:latin typeface="Hiragino Sans GB" pitchFamily="34" charset="0"/>
-                <a:ea typeface="Hiragino Sans GB" pitchFamily="34" charset="-122"/>
-                <a:cs typeface="Hiragino Sans GB" pitchFamily="34" charset="-120"/>
-              </a:rPr>
-              <a:t>3</a:t>
-            </a:r>
-            <a:endParaRPr lang="en-US" dirty="0"/>
-          </a:p>
-        </p:txBody>
-      </p:sp>
-      <p:sp>
-        <p:nvSpPr>
-          <p:cNvPr id="13" name="Text 10"/>
-          <p:cNvSpPr/>
-          <p:nvPr/>
-        </p:nvSpPr>
-        <p:spPr>
-          <a:xfrm>
-            <a:off x="1691640" y="3675888"/>
-            <a:ext cx="9601200" cy="685800"/>
-          </a:xfrm>
-          <a:prstGeom prst="rect">
-            <a:avLst/>
-          </a:prstGeom>
-          <a:noFill/>
-          <a:ln/>
-        </p:spPr>
-        <p:txBody>
-          <a:bodyPr wrap="square" lIns="381" tIns="381" rIns="381" bIns="381" rtlCol="0" anchor="ctr">
-            <a:normAutofit/>
-          </a:bodyPr>
-          <a:lstStyle/>
-          <a:p>
-            <a:pPr indent="0" marL="0">
-              <a:buNone/>
-            </a:pPr>
-            <a:r>
-              <a:rPr lang="en-US" sz="2200" dirty="0">
+              <a:t>char数组用连续字符保存C风格字符串</a:t>
+            </a:r>
+            <a:endParaRPr lang="en-US" sz="2100" dirty="0"/>
+          </a:p>
+          <a:p>
+            <a:pPr indent="0" marL="0">
+              <a:buNone/>
+            </a:pPr>
+            <a:endParaRPr lang="en-US" sz="2100" dirty="0"/>
+          </a:p>
+          <a:p>
+            <a:pPr indent="0" marL="0">
+              <a:buNone/>
+            </a:pPr>
+            <a:r>
+              <a:rPr lang="en-US" sz="2100" dirty="0">
                 <a:solidFill>
                   <a:srgbClr val="172033"/>
                 </a:solidFill>
@@ -11204,104 +13757,22 @@
                 <a:ea typeface="Hiragino Sans GB" pitchFamily="34" charset="-122"/>
                 <a:cs typeface="Hiragino Sans GB" pitchFamily="34" charset="-120"/>
               </a:rPr>
-              <a:t>模拟、二维、综合调试</a:t>
-            </a:r>
-            <a:endParaRPr lang="en-US" sz="2200" dirty="0"/>
-          </a:p>
-        </p:txBody>
-      </p:sp>
-      <p:sp>
-        <p:nvSpPr>
-          <p:cNvPr id="14" name="Shape 11"/>
-          <p:cNvSpPr/>
-          <p:nvPr/>
-        </p:nvSpPr>
-        <p:spPr>
-          <a:xfrm>
-            <a:off x="822960" y="4800600"/>
-            <a:ext cx="594360" cy="594360"/>
-          </a:xfrm>
-          <a:prstGeom prst="ellipse">
-            <a:avLst/>
-          </a:prstGeom>
-          <a:solidFill>
-            <a:srgbClr val="0F9F79"/>
-          </a:solidFill>
-          <a:ln w="12700">
-            <a:solidFill>
-              <a:srgbClr val="0F9F79"/>
-            </a:solidFill>
-            <a:prstDash val="solid"/>
-          </a:ln>
-        </p:spPr>
-      </p:sp>
-      <p:sp>
-        <p:nvSpPr>
-          <p:cNvPr id="15" name="Text 12"/>
-          <p:cNvSpPr/>
-          <p:nvPr/>
-        </p:nvSpPr>
-        <p:spPr>
-          <a:xfrm>
-            <a:off x="822960" y="4919472"/>
-            <a:ext cx="594360" cy="228600"/>
-          </a:xfrm>
-          <a:prstGeom prst="rect">
-            <a:avLst/>
-          </a:prstGeom>
-          <a:noFill/>
-          <a:ln/>
-        </p:spPr>
-        <p:txBody>
-          <a:bodyPr wrap="square" lIns="0" tIns="0" rIns="0" bIns="0" rtlCol="0" anchor="ctr"/>
-          <a:lstStyle/>
-          <a:p>
-            <a:pPr algn="ctr" indent="0" marL="0">
-              <a:buNone/>
-            </a:pPr>
-            <a:r>
-              <a:rPr lang="en-US" b="1" dirty="0">
-                <a:solidFill>
-                  <a:srgbClr val="FFFFFF"/>
-                </a:solidFill>
-                <a:latin typeface="Hiragino Sans GB" pitchFamily="34" charset="0"/>
-                <a:ea typeface="Hiragino Sans GB" pitchFamily="34" charset="-122"/>
-                <a:cs typeface="Hiragino Sans GB" pitchFamily="34" charset="-120"/>
-              </a:rPr>
-              <a:t>4</a:t>
-            </a:r>
-            <a:endParaRPr lang="en-US" dirty="0"/>
-          </a:p>
-        </p:txBody>
-      </p:sp>
-      <p:sp>
-        <p:nvSpPr>
-          <p:cNvPr id="16" name="Text 13"/>
-          <p:cNvSpPr/>
-          <p:nvPr/>
-        </p:nvSpPr>
-        <p:spPr>
-          <a:xfrm>
-            <a:off x="1691640" y="4773168"/>
-            <a:ext cx="9601200" cy="685800"/>
-          </a:xfrm>
-          <a:prstGeom prst="rect">
-            <a:avLst/>
-          </a:prstGeom>
-          <a:noFill/>
-          <a:ln/>
-        </p:spPr>
-        <p:txBody>
-          <a:bodyPr wrap="square" lIns="381" tIns="381" rIns="381" bIns="381" rtlCol="0" anchor="ctr">
-            <a:normAutofit/>
-          </a:bodyPr>
-          <a:lstStyle/>
-          <a:p>
-            <a:pPr indent="0" marL="0">
-              <a:buNone/>
-            </a:pPr>
-            <a:r>
-              <a:rPr lang="en-US" sz="2200" dirty="0">
+              <a:t>字符串末尾必须有\0</a:t>
+            </a:r>
+            <a:endParaRPr lang="en-US" sz="2100" dirty="0"/>
+          </a:p>
+          <a:p>
+            <a:pPr indent="0" marL="0">
+              <a:buNone/>
+            </a:pPr>
+            <a:endParaRPr lang="en-US" sz="2100" dirty="0"/>
+          </a:p>
+          <a:p>
+            <a:pPr indent="0" marL="0">
+              <a:buNone/>
+            </a:pPr>
+            <a:r>
+              <a:rPr lang="en-US" sz="2100" dirty="0">
                 <a:solidFill>
                   <a:srgbClr val="172033"/>
                 </a:solidFill>
@@ -11309,15 +13780,38 @@
                 <a:ea typeface="Hiragino Sans GB" pitchFamily="34" charset="-122"/>
                 <a:cs typeface="Hiragino Sans GB" pitchFamily="34" charset="-120"/>
               </a:rPr>
-              <a:t>连续两题独立A再升级</a:t>
-            </a:r>
-            <a:endParaRPr lang="en-US" sz="2200" dirty="0"/>
-          </a:p>
-        </p:txBody>
-      </p:sp>
-      <p:sp>
-        <p:nvSpPr>
-          <p:cNvPr id="17" name="Text 14"/>
+              <a:t>char s[10]最多安全保存9个可见字符</a:t>
+            </a:r>
+            <a:endParaRPr lang="en-US" sz="2100" dirty="0"/>
+          </a:p>
+          <a:p>
+            <a:pPr indent="0" marL="0">
+              <a:buNone/>
+            </a:pPr>
+            <a:endParaRPr lang="en-US" sz="2100" dirty="0"/>
+          </a:p>
+          <a:p>
+            <a:pPr indent="0" marL="0">
+              <a:buNone/>
+            </a:pPr>
+            <a:r>
+              <a:rPr lang="en-US" sz="2100" dirty="0">
+                <a:solidFill>
+                  <a:srgbClr val="172033"/>
+                </a:solidFill>
+                <a:latin typeface="Hiragino Sans GB" pitchFamily="34" charset="0"/>
+                <a:ea typeface="Hiragino Sans GB" pitchFamily="34" charset="-122"/>
+                <a:cs typeface="Hiragino Sans GB" pitchFamily="34" charset="-120"/>
+              </a:rPr>
+              <a:t>strlen只数\0之前的字符，不包含\0</a:t>
+            </a:r>
+            <a:endParaRPr lang="en-US" sz="2100" dirty="0"/>
+          </a:p>
+        </p:txBody>
+      </p:sp>
+      <p:sp>
+        <p:nvSpPr>
+          <p:cNvPr id="7" name="Text 4"/>
           <p:cNvSpPr/>
           <p:nvPr/>
         </p:nvSpPr>
